--- a/rt-workbench/docs/2026_K조선해커톤_계획서_RT판독워크벤치.pptx
+++ b/rt-workbench/docs/2026_K조선해커톤_계획서_RT판독워크벤치.pptx
@@ -2751,7 +2751,29 @@
                 <a:ea typeface="Pretendard"/>
                 <a:cs typeface="Pretendard"/>
               </a:rPr>
-              <a:t>판독 인력: 고령화로 전문가가 줄어드는 것이 비파괴검사 시장의 가장 큰 이슈(두산에너빌리티 2024·2026.03 인터뷰), 최저가 입찰로 숙련 인력 확보 곤란(가스신문 2025.09) — 정량 통계는 원자력안전재단 종사자 현황(공공데이터포털)으로 확보 예정</a:t>
+              <a:t>판독 인력: 고령화로 전문가가 줄어드는 것이 비파괴검사 시장의 가장 큰 이슈(두산에너빌리티 2024·2026.03 인터뷰), 최저가 입찰로 숙련 인력 확보 곤란(가스신문 2025.09). 국내 비파괴검사 물량의 </a:t>
+            </a:r>
+            <a:r>
+              <a:rPr sz="1380" b="1" i="0">
+                <a:solidFill>
+                  <a:srgbClr val="1F2A44"/>
+                </a:solidFill>
+                <a:latin typeface="Pretendard"/>
+                <a:ea typeface="Pretendard"/>
+                <a:cs typeface="Pretendard"/>
+              </a:rPr>
+              <a:t>약 80%가 방사선 방식 용접부 검사</a:t>
+            </a:r>
+            <a:r>
+              <a:rPr sz="1380" b="0" i="0">
+                <a:solidFill>
+                  <a:srgbClr val="1F2A44"/>
+                </a:solidFill>
+                <a:latin typeface="Pretendard"/>
+                <a:ea typeface="Pretendard"/>
+                <a:cs typeface="Pretendard"/>
+              </a:rPr>
+              <a:t>(업계 기고) → 판독 부담이 RT에 집중 — 정량 통계는 원자력안전재단 종사자 현황으로 확보 예정</a:t>
             </a:r>
           </a:p>
         </p:txBody>
@@ -3615,7 +3637,7 @@
                 <a:ea typeface="Pretendard"/>
                 <a:cs typeface="Pretendard"/>
               </a:rPr>
-              <a:t>출처: 황훈규 외, 한국정보통신학회논문지 25(2) 2021.02 · 데일리안·CCTV뉴스 2021.07.02(대우조선 디지털 RT·5대 선급 MOU) · IACS UR W33 Rev.1/Corr.1(2021) §1.6·3.3·8.2·8.5·9.2, W34(2019), W33 Rev.2·W34 Rev.1(2026.07.15 승인) · ISO 9712(현행 2021판; UR W33 Rev.1은 2012판 인용) · ASME BPVC VIII-1 UW-52(2차 자료; KR·ABS·DNV 개별 규칙 원문 미확인) · UR W33 §8.2·8.5 보고 항목 · 뉴스핌 2026.06.04(한화오션×NC AI) · 아시아투데이 2026.06(HD현대) · 두산에너빌리티 통합보고서 2024·2026, 팍스경제TV 2024(D-Vision 출시), 이투데이 2024.11.14(에너지공단 MOU), 위키리크스한국 2026.03 · 가스신문 2025.09.18 · ISO 14096-2 · ※ 뉴스·2차 자료는 검색 요약 기준, 제출 전 원문 재확인</a:t>
+              <a:t>출처: 황훈규 외, 한국정보통신학회논문지 25(2) 2021.02 · 데일리안·CCTV뉴스 2021.07.02(대우조선 디지털 RT·5대 선급 MOU) · IACS UR W33 Rev.1/Corr.1(2021) §1.6·3.3·8.2·8.5·9.2, W34(2019), W33 Rev.2·W34 Rev.1(2026.07.15 승인) · ISO 9712(현행 2021판; UR W33 Rev.1은 2012판 인용) · ASME BPVC VIII-1 UW-52(2차 자료; KR·ABS·DNV 개별 규칙 원문 미확인) · UR W33 §8.2·8.5 보고 항목 · 뉴스핌 2026.06.04(한화오션×NC AI) · 아시아투데이 2026.06(HD현대) · 두산에너빌리티 통합보고서 2024·2026, 팍스경제TV 2024(D-Vision 출시), 이투데이 2024.11.14(에너지공단 MOU), 위키리크스한국 2026.03 · 가스신문 2025.09.18, 가스신문 기고(비파괴검사 시장 현황, 방사선 약 80%) · ISO 14096-2 · ※ 뉴스·2차 자료는 검색 요약 기준, 제출 전 원문 재확인</a:t>
             </a:r>
           </a:p>
         </p:txBody>
@@ -5918,7 +5940,18 @@
                 <a:ea typeface="Pretendard"/>
                 <a:cs typeface="Pretendard"/>
               </a:rPr>
-              <a:t> — DNV도 2019 GSI 프로젝트에서 ‘AI는 검출, 사람은 최종 승인’으로 역할을 한정했고, AI 판독 자체를 선급이 규칙·가이드로 승인한 공개 사례는 2026.09 검색 기준 확인되지 않음. 본 안은 판정을 룰 엔진(조항 ID 자동 기재)에, 작문·검색을 LLM에 분리</a:t>
+              <a:t> — DNV도 2019 GSI 프로젝트에서 ‘AI는 검출, 사람은 최종 승인’으로 역할을 한정했고, AI 판독 자체를 선급이 규칙·가이드로 승인한 공개 사례는 2026.09 검색 기준 확인되지 않음. 본 안은 판정을 룰 엔진(조항 ID 자동 기재)에, 작문·검색을 LLM에 분리 → </a:t>
+            </a:r>
+            <a:r>
+              <a:rPr sz="1050" b="1" i="0">
+                <a:solidFill>
+                  <a:srgbClr val="1F2A44"/>
+                </a:solidFill>
+                <a:latin typeface="Pretendard"/>
+                <a:ea typeface="Pretendard"/>
+                <a:cs typeface="Pretendard"/>
+              </a:rPr>
+              <a:t>선급 승인이 필요 없는 판독 보조·문서화 영역에서 즉시 도입 가능</a:t>
             </a:r>
           </a:p>
           <a:p>
@@ -11644,7 +11677,7 @@
                 <a:ea typeface="Pretendard"/>
                 <a:cs typeface="Pretendard"/>
               </a:rPr>
-              <a:t>: IACS UR W33 §8 필수 항목이 구조화 저장·조건 검색·CSV 반출 → 선주·선급 요청 시 서류 수색을 조회로 대체</a:t>
+              <a:t>: IACS UR W33 §8.2 일반 보고 항목 13개 중 7개(일자·부재·용접부·이음·두께·판정 기준·결과·판정자)를 이미 구조화 저장, 나머지와 RT 특정 12개 항목은 본선에서 필드 추가 → 선주·선급 요청 시 서류 수색을 조회로 대체</a:t>
             </a:r>
           </a:p>
           <a:p>
@@ -11670,7 +11703,7 @@
                 <a:ea typeface="Pretendard"/>
                 <a:cs typeface="Pretendard"/>
               </a:rPr>
-              <a:t>필름→디지털 과도기 양쪽에 적용</a:t>
+              <a:t>2028.01 시행 IACS 신규칙의 100mm 판독 단위를 이미 기본값으로 구현</a:t>
             </a:r>
             <a:r>
               <a:rPr sz="1320" b="0" i="0">
@@ -11681,7 +11714,7 @@
                 <a:ea typeface="Pretendard"/>
                 <a:cs typeface="Pretendard"/>
               </a:rPr>
-              <a:t>: 스캔 필름과 CR/DR 이미지가 같은 파이프라인 — 2028.01 시행 IACS 개정(100mm 평가 길이 전 구간 적용)에 맞춘 판정 구간 기본값</a:t>
+              <a:t> — 규칙이 바뀌기 전에 준비된 판정 엔진. 스캔 필름과 CR/DR 이미지가 같은 파이프라인이라 필름→디지털 과도기 양쪽에 적용</a:t>
             </a:r>
           </a:p>
           <a:p>
@@ -11916,7 +11949,7 @@
                 <a:ea typeface="Pretendard"/>
                 <a:cs typeface="Pretendard"/>
               </a:rPr>
-              <a:t>는 동일 파이프라인으로 즉시 적용 — IACS UR W34 적용 선박(2021.07 이후 계약)의 검사 흐름에 그대로 편입. UT 판독은 신호 기반이라 범위 밖</a:t>
+              <a:t>는 동일 파이프라인으로 즉시 적용 — IACS UR W34 적용 선박(2021.07 이후 계약)의 검사 흐름에 그대로 편입. KR도 2026.06 AI 기반 디지털 선급 협력에 착수(검색 요약 기준). UT 판독은 신호 기반이라 범위 밖</a:t>
             </a:r>
           </a:p>
           <a:p>
@@ -12758,7 +12791,7 @@
                 <a:ea typeface="Pretendard"/>
                 <a:cs typeface="Pretendard"/>
               </a:rPr>
-              <a:t>출처: IACS UR W33 Rev.2·W34 Rev.1(2026.07.15 승인, 2028.01.01 시행 — 100mm 해석 길이 지침) · UR W33 §8 보고 항목 · 두산에너빌리티 2026 스마트공장·자동화산업전 발언(위키리크스한국, 검색 요약 기준) · 가스신문 2025.09.18(검색 요약 기준) · DNV-RP-0671(2023.09) · 앱 자체 측정(합성 필름) — 효과 지표는 측정 설계이며 확정 수치가 아님</a:t>
+              <a:t>출처: IACS UR W33 Rev.2·W34 Rev.1(2026.07.15 승인, 2028.01.01 시행 — 100mm 해석 길이 지침) · UR W33 §8.2·8.5 보고 항목(자체 대조) · KR×Microsoft AI 협력 보도(2026.06, 검색 요약 기준) · 두산에너빌리티 2026 스마트공장·자동화산업전 발언(위키리크스한국, 검색 요약 기준) · 가스신문 2025.09.18(검색 요약 기준) · DNV-RP-0671(2023.09) · 앱 자체 측정(합성 필름) — 효과 지표는 측정 설계이며 확정 수치가 아님</a:t>
             </a:r>
           </a:p>
         </p:txBody>

--- a/rt-workbench/docs/2026_K조선해커톤_계획서_RT판독워크벤치.pptx
+++ b/rt-workbench/docs/2026_K조선해커톤_계획서_RT판독워크벤치.pptx
@@ -1719,7 +1719,7 @@
                 <a:ea typeface="Pretendard"/>
                 <a:cs typeface="Pretendard"/>
               </a:rPr>
-              <a:t>생산 분야 · 용접부 RT(방사선투과검사) 판독원의 판정·소견서·이력 업무를 돕는 로컬 실행 소프트웨어</a:t>
+              <a:t>생산 분야 · 용접부 RT(방사선투과검사) 사진을 판독하는 사람의 판정·소견서·기록 업무를 돕는, 내 PC에서 도는 소프트웨어</a:t>
             </a:r>
           </a:p>
         </p:txBody>
@@ -2445,7 +2445,7 @@
                 <a:ea typeface="Pretendard"/>
                 <a:cs typeface="Pretendard"/>
               </a:rPr>
-              <a:t>국내 조선소 용접부 RT는 </a:t>
+              <a:t>RT(방사선투과검사)는 용접부를 X선으로 찍어 속에 숨은 결함을 찾는 검사다. 국내 조선소는 2021년 기준 대부분 </a:t>
             </a:r>
             <a:r>
               <a:rPr sz="1380" b="1" i="0">
@@ -2456,7 +2456,7 @@
                 <a:ea typeface="Pretendard"/>
                 <a:cs typeface="Pretendard"/>
               </a:rPr>
-              <a:t>2021년 기준 대부분 필름 방식</a:t>
+              <a:t>필름</a:t>
             </a:r>
             <a:r>
               <a:rPr sz="1380" b="0" i="0">
@@ -2467,7 +2467,7 @@
                 <a:ea typeface="Pretendard"/>
                 <a:cs typeface="Pretendard"/>
               </a:rPr>
-              <a:t>(황훈규 외 2021.02·대우조선해양 2021.07 보도). 한화오션(당시 대우조선해양)이 2021.07 필름 없는 디지털 RT를 개발하고 5대 선급(ABS·BV·DNV·KR·LR)과 승인 시스템 개발 MOU를 맺었으나 이후 전환율의 공개 확인은 찾지 못함 → </a:t>
+              <a:t>으로 찍는다[1][2]. 한화오션이 2021.07 필름 없는 디지털 RT를 개발하고 5대 선급과 승인 체계 개발 MOU를 맺었지만[2], 이후 얼마나 바뀌었는지는 공개 자료로 확인되지 않는다 → </a:t>
             </a:r>
             <a:r>
               <a:rPr sz="1380" b="1" i="0">
@@ -2478,7 +2478,18 @@
                 <a:ea typeface="Pretendard"/>
                 <a:cs typeface="Pretendard"/>
               </a:rPr>
-              <a:t>필름·디지털 이미지가 공존하는 과도기로 가정</a:t>
+              <a:t>필름과 디지털이 함께 쓰이는 과도기</a:t>
+            </a:r>
+            <a:r>
+              <a:rPr sz="1380" b="0" i="0">
+                <a:solidFill>
+                  <a:srgbClr val="1F2A44"/>
+                </a:solidFill>
+                <a:latin typeface="Pretendard"/>
+                <a:ea typeface="Pretendard"/>
+                <a:cs typeface="Pretendard"/>
+              </a:rPr>
+              <a:t>로 본다</a:t>
             </a:r>
           </a:p>
           <a:p>
@@ -2504,7 +2515,7 @@
                 <a:ea typeface="Pretendard"/>
                 <a:cs typeface="Pretendard"/>
               </a:rPr>
-              <a:t>IACS UR W34(2021.07.01 이후 건조계약분)로 디지털 RT(RT-D = RT-S·RT-CR)가 선급 규칙에 편입. 2026.07.15 승인된 개정판(2028.01.01 이후 계약분)은 ISO 10675-1/-2:2021의 </a:t>
+              <a:t>선급(배의 안전 기준을 정하고 검사하는 기관: KR·DNV·ABS 등)의 국제 협회 IACS는 2021.07부터 디지털 RT를 규칙에 넣었고[3], 2026.07.15 승인한 개정판(2028.01 이후 계약 선박)은 </a:t>
             </a:r>
             <a:r>
               <a:rPr sz="1380" b="1" i="0">
@@ -2515,7 +2526,7 @@
                 <a:ea typeface="Pretendard"/>
                 <a:cs typeface="Pretendard"/>
               </a:rPr>
-              <a:t>100mm 평가 길이</a:t>
+              <a:t>사진 전체를 100mm 구간 단위로 판독</a:t>
             </a:r>
             <a:r>
               <a:rPr sz="1380" b="0" i="0">
@@ -2526,7 +2537,7 @@
                 <a:ea typeface="Pretendard"/>
                 <a:cs typeface="Pretendard"/>
               </a:rPr>
-              <a:t>를 필름·디지털 이미지 전 구간에 적용하도록 지침으로 명시 — 매체가 바뀌어도 </a:t>
+              <a:t>하도록 정했다[4]. 찍는 방법이 바뀌어도 </a:t>
             </a:r>
             <a:r>
               <a:rPr sz="1380" b="1" i="0">
@@ -2537,7 +2548,18 @@
                 <a:ea typeface="Pretendard"/>
                 <a:cs typeface="Pretendard"/>
               </a:rPr>
-              <a:t>판독·판정·기록은 사람의 일</a:t>
+              <a:t>판독·판정·기록은 여전히 사람의 일</a:t>
+            </a:r>
+            <a:r>
+              <a:rPr sz="1380" b="0" i="0">
+                <a:solidFill>
+                  <a:srgbClr val="1F2A44"/>
+                </a:solidFill>
+                <a:latin typeface="Pretendard"/>
+                <a:ea typeface="Pretendard"/>
+                <a:cs typeface="Pretendard"/>
+              </a:rPr>
+              <a:t>이다</a:t>
             </a:r>
           </a:p>
           <a:p>
@@ -2563,7 +2585,7 @@
                 <a:ea typeface="Pretendard"/>
                 <a:cs typeface="Pretendard"/>
               </a:rPr>
-              <a:t>판독원의 하루: 판독 → 크기 측정·기준 대조 → 합부 판정 → </a:t>
+              <a:t>판독원(자격을 가진 사람)의 하루: 사진에서 결함을 찾고 → 크기를 재서 기준과 대조하고 → 합격/불합격을 정하고 → </a:t>
             </a:r>
             <a:r>
               <a:rPr sz="1380" b="1" i="0">
@@ -2574,7 +2596,7 @@
                 <a:ea typeface="Pretendard"/>
                 <a:cs typeface="Pretendard"/>
               </a:rPr>
-              <a:t>리포트 수기 작성</a:t>
+              <a:t>보고서를 손으로 쓴다</a:t>
             </a:r>
             <a:r>
               <a:rPr sz="1380" b="0" i="0">
@@ -2585,7 +2607,7 @@
                 <a:ea typeface="Pretendard"/>
                 <a:cs typeface="Pretendard"/>
               </a:rPr>
-              <a:t>(IACS UR W33 §8 필수 항목 20여 개) → 보관 → 선주·선급 요청 시 </a:t>
+              <a:t>(선급 규칙 필수 항목 25개[3]) → 보관 → 선주·선급이 물으면 </a:t>
             </a:r>
             <a:r>
               <a:rPr sz="1380" b="1" i="0">
@@ -2596,7 +2618,7 @@
                 <a:ea typeface="Pretendard"/>
                 <a:cs typeface="Pretendard"/>
               </a:rPr>
-              <a:t>서류 더미 수색</a:t>
+              <a:t>서류 더미를 뒤진다</a:t>
             </a:r>
             <a:r>
               <a:rPr sz="1380" b="0" i="0">
@@ -2607,29 +2629,7 @@
                 <a:ea typeface="Pretendard"/>
                 <a:cs typeface="Pretendard"/>
               </a:rPr>
-              <a:t>. 불합격 시 </a:t>
-            </a:r>
-            <a:r>
-              <a:rPr sz="1380" b="1" i="0">
-                <a:solidFill>
-                  <a:srgbClr val="1F2A44"/>
-                </a:solidFill>
-                <a:latin typeface="Pretendard"/>
-                <a:ea typeface="Pretendard"/>
-                <a:cs typeface="Pretendard"/>
-              </a:rPr>
-              <a:t>같은 용접선의 추가 구간 검사</a:t>
-            </a:r>
-            <a:r>
-              <a:rPr sz="1380" b="0" i="0">
-                <a:solidFill>
-                  <a:srgbClr val="1F2A44"/>
-                </a:solidFill>
-                <a:latin typeface="Pretendard"/>
-                <a:ea typeface="Pretendard"/>
-                <a:cs typeface="Pretendard"/>
-              </a:rPr>
-              <a:t>(§9.2, 개소 수 미규정)로 촬영·판독·리포트가 다시 늘어남</a:t>
+              <a:t>. 불합격이 나오면 같은 용접선을 더 찍어 다시 판독한다[3]</a:t>
             </a:r>
           </a:p>
           <a:p>
@@ -2655,7 +2655,7 @@
                 <a:ea typeface="Pretendard"/>
                 <a:cs typeface="Pretendard"/>
               </a:rPr>
-              <a:t>조선 3사 AI 투자는 용접 ‘수행’·비전 검사에 집중(한화오션×NC AI 2026.06, HD현대중공업 AI 조선소 2026.06) — </a:t>
+              <a:t>조선 3사의 AI 투자는 용접 ‘작업’과 카메라 검사에 몰려 있다(한화오션×NC AI 2026.06[5], HD현대중공업 AI 조선소 2026.06[6]). </a:t>
             </a:r>
             <a:r>
               <a:rPr sz="1380" b="1" i="0">
@@ -2666,7 +2666,7 @@
                 <a:ea typeface="Pretendard"/>
                 <a:cs typeface="Pretendard"/>
               </a:rPr>
-              <a:t>판독 이후 워크플로우(판정 근거·리포트·이력)의 공개 투자 사례는 찾지 못함</a:t>
+              <a:t>판독 이후 단계(판정 근거·보고서·이력)에 대한 공개 투자 사례는 찾지 못했다</a:t>
             </a:r>
             <a:r>
               <a:rPr sz="1380" b="0" i="0">
@@ -2703,7 +2703,7 @@
                 <a:ea typeface="Pretendard"/>
                 <a:cs typeface="Pretendard"/>
               </a:rPr>
-              <a:t>두산에너빌리티 D-Vision: 2019 말 자사 튜브 용접부 시범 → 2024.03 정식 출시(구독형) → 2024.11 에너지공단 MOU — </a:t>
+              <a:t>두산에너빌리티 D-Vision(RT 사진 AI 판독)은 2019년 말 자사 시범 → 2024.03 출시 → 2024.11 에너지공단 MOU[7] — </a:t>
             </a:r>
             <a:r>
               <a:rPr sz="1380" b="1" i="0">
@@ -2725,7 +2725,7 @@
                 <a:ea typeface="Pretendard"/>
                 <a:cs typeface="Pretendard"/>
               </a:rPr>
-              <a:t>, 외부 유료 고객은 공개 확인 안 됨 → 문제는 실재, 지불의사는 미검증</a:t>
+              <a:t>이며 외부 유료 고객은 공개 확인되지 않는다 → 문제는 실재하지만 시장의 지불 의사는 아직 미검증</a:t>
             </a:r>
           </a:p>
           <a:p>
@@ -2751,7 +2751,7 @@
                 <a:ea typeface="Pretendard"/>
                 <a:cs typeface="Pretendard"/>
               </a:rPr>
-              <a:t>판독 인력: 고령화로 전문가가 줄어드는 것이 비파괴검사 시장의 가장 큰 이슈(두산에너빌리티 2024·2026.03 인터뷰), 최저가 입찰로 숙련 인력 확보 곤란(가스신문 2025.09). 국내 비파괴검사 물량의 </a:t>
+              <a:t>판독 인력은 고령화로 줄고 있고(두산에너빌리티 2024·2026 인터뷰[7]), 최저가 입찰로 숙련자 확보가 어렵다[8]. 국내 비파괴검사 물량의 </a:t>
             </a:r>
             <a:r>
               <a:rPr sz="1380" b="1" i="0">
@@ -2773,7 +2773,7 @@
                 <a:ea typeface="Pretendard"/>
                 <a:cs typeface="Pretendard"/>
               </a:rPr>
-              <a:t>(업계 기고) → 판독 부담이 RT에 집중 — 정량 통계는 원자력안전재단 종사자 현황으로 확보 예정</a:t>
+              <a:t>[9] → 판독 부담이 RT에 집중된다</a:t>
             </a:r>
           </a:p>
         </p:txBody>
@@ -2923,7 +2923,7 @@
                 <a:ea typeface="Pretendard"/>
                 <a:cs typeface="Pretendard"/>
               </a:rPr>
-              <a:t>RT 판독원의 하루에서 문서 노동과 이력 검색 노동을 제거</a:t>
+              <a:t>판독원의 하루에서 문서 작업과 서류 검색을 없앤다</a:t>
             </a:r>
             <a:r>
               <a:rPr sz="1300" b="0" i="0">
@@ -2934,7 +2934,7 @@
                 <a:ea typeface="Pretendard"/>
                 <a:cs typeface="Pretendard"/>
               </a:rPr>
-              <a:t> — 합부 결정은 자격자(ISO 9712 Level 2 이상 — IACS UR W33 §3.3)가, 서류는 AI가</a:t>
+              <a:t> — 합격/불합격은 자격자(ISO 9712 Level 2 이상[3])가 정하고, 서류는 AI가 만든다</a:t>
             </a:r>
           </a:p>
           <a:p>
@@ -2960,7 +2960,7 @@
                 <a:ea typeface="Pretendard"/>
                 <a:cs typeface="Pretendard"/>
               </a:rPr>
-              <a:t>목표 상태: 이미지 로드 → AI 2차 눈 → 2클릭 측정 → 룰 판정(100mm 평가 구간) → 소견서 초안 → 승인·PDF → 아카이브까지 </a:t>
+              <a:t>목표 화면: 사진 열기 → AI가 놓칠 만한 곳 표시 → 클릭 두 번으로 크기 측정 → 규칙 엔진이 100mm 구간 기준으로 판정 → 소견서 초안 → 승인·PDF → 검색 가능한 기록 보관, </a:t>
             </a:r>
             <a:r>
               <a:rPr sz="1300" b="1" i="0">
@@ -2971,7 +2971,7 @@
                 <a:ea typeface="Pretendard"/>
                 <a:cs typeface="Pretendard"/>
               </a:rPr>
-              <a:t>한 화면에서 완주</a:t>
+              <a:t>한 화면에서 끝</a:t>
             </a:r>
           </a:p>
           <a:p>
@@ -3008,7 +3008,7 @@
                 <a:ea typeface="Pretendard"/>
                 <a:cs typeface="Pretendard"/>
               </a:rPr>
-              <a:t>스캔된 필름 이미지 또는 디지털 RT(CR/DR) 이미지</a:t>
+              <a:t>스캔한 필름 사진 또는 디지털 RT 사진</a:t>
             </a:r>
             <a:r>
               <a:rPr sz="1300" b="0" i="0">
@@ -3019,7 +3019,7 @@
                 <a:ea typeface="Pretendard"/>
                 <a:cs typeface="Pretendard"/>
               </a:rPr>
-              <a:t> — 판독원 개인에게 새 장비·새 촬영 절차를 요구하지 않음. 단, 필름 디지털화(ISO 14096-2 등급 디지타이저 또는 스캔 서비스)는 </a:t>
+              <a:t> — 판독원에게 새 장비나 새 촬영 절차를 요구하지 않는다. 단, 필름을 스캔하는 장비(ISO 14096-2 등급 디지타이저 또는 스캔 서비스)는 </a:t>
             </a:r>
             <a:r>
               <a:rPr sz="1300" b="1" i="0">
@@ -3030,7 +3030,7 @@
                 <a:ea typeface="Pretendard"/>
                 <a:cs typeface="Pretendard"/>
               </a:rPr>
-              <a:t>조직 단위 전제조건으로 명시</a:t>
+              <a:t>조직이 갖춰야 할 전제조건</a:t>
             </a:r>
           </a:p>
         </p:txBody>
@@ -3195,7 +3195,7 @@
                 <a:ea typeface="Pretendard"/>
                 <a:cs typeface="Pretendard"/>
               </a:rPr>
-              <a:t>합부 = 룰 엔진 + 판독원, LLM = 작문·검색 보조</a:t>
+              <a:t>합격/불합격 = 규칙 엔진 + 판독원, LLM = 글쓰기·검색 보조</a:t>
             </a:r>
           </a:p>
         </p:txBody>
@@ -3278,7 +3278,7 @@
                 <a:ea typeface="Pretendard"/>
                 <a:cs typeface="Pretendard"/>
               </a:rPr>
-              <a:t>기존 이미지·기존 절차 위에</a:t>
+              <a:t>기존 사진·기존 절차 위에</a:t>
             </a:r>
           </a:p>
         </p:txBody>
@@ -3319,7 +3319,7 @@
                 <a:ea typeface="Pretendard"/>
                 <a:cs typeface="Pretendard"/>
               </a:rPr>
-              <a:t>스캔 필름·디지털 RT 이미지 어느 쪽이든 같은 파이프라인</a:t>
+              <a:t>스캔 필름이든 디지털 사진이든 같은 파이프라인</a:t>
             </a:r>
           </a:p>
         </p:txBody>
@@ -3443,7 +3443,7 @@
                 <a:ea typeface="Pretendard"/>
                 <a:cs typeface="Pretendard"/>
               </a:rPr>
-              <a:t>신규성은 판독 워크플로우 전체의 통합</a:t>
+              <a:t>새로움은 판독 업무 전체를 하나로 잇는 통합</a:t>
             </a:r>
           </a:p>
         </p:txBody>
@@ -3596,7 +3596,7 @@
                 <a:ea typeface="Pretendard"/>
                 <a:cs typeface="Pretendard"/>
               </a:rPr>
-              <a:t>선체 블록 용접부 RT 검사의 판독·판정·문서화·이력 관리 — 생산 공정 후단의 용접 품질 확인 업무</a:t>
+              <a:t>선체 블록 용접부 RT 사진의 판독·판정·보고서·이력 관리 — 생산 공정 뒤쪽의 용접 품질 확인 업무</a:t>
             </a:r>
           </a:p>
         </p:txBody>
@@ -3637,7 +3637,7 @@
                 <a:ea typeface="Pretendard"/>
                 <a:cs typeface="Pretendard"/>
               </a:rPr>
-              <a:t>출처: 황훈규 외, 한국정보통신학회논문지 25(2) 2021.02 · 데일리안·CCTV뉴스 2021.07.02(대우조선 디지털 RT·5대 선급 MOU) · IACS UR W33 Rev.1/Corr.1(2021) §1.6·3.3·8.2·8.5·9.2, W34(2019), W33 Rev.2·W34 Rev.1(2026.07.15 승인) · ISO 9712(현행 2021판; UR W33 Rev.1은 2012판 인용) · ASME BPVC VIII-1 UW-52(2차 자료; KR·ABS·DNV 개별 규칙 원문 미확인) · UR W33 §8.2·8.5 보고 항목 · 뉴스핌 2026.06.04(한화오션×NC AI) · 아시아투데이 2026.06(HD현대) · 두산에너빌리티 통합보고서 2024·2026, 팍스경제TV 2024(D-Vision 출시), 이투데이 2024.11.14(에너지공단 MOU), 위키리크스한국 2026.03 · 가스신문 2025.09.18, 가스신문 기고(비파괴검사 시장 현황, 방사선 약 80%) · ISO 14096-2 · ※ 뉴스·2차 자료는 검색 요약 기준, 제출 전 원문 재확인</a:t>
+              <a:t>참고  [1] 황훈규 외, 한국정보통신학회논문지 25(2), 2021.02  ·  [2] 데일리안·CCTV뉴스 2021.07.02†  ·  [3] IACS UR W33 Rev.1/Corr.1(2021) §3.3·§8·§9.2  ·  [4] IACS UR W33 Rev.2·W34 Rev.1(2026.07.15 승인)  ·  [5] 뉴스핌 2026.06.04†  ·  [6] 아시아투데이 2026.06†  ·  [7] 두산에너빌리티 통합보고서 2024·2026, 팍스경제TV 2024, 이투데이 2024.11.14, 위키리크스한국 2026.03†  ·  [8] 가스신문 2025.09.18†  ·  [9] 가스신문 기고 ‘비파괴검사 시장 현황’†  ·  † 검색 요약 기준(제출 전 원문 확인)</a:t>
             </a:r>
           </a:p>
         </p:txBody>
@@ -4418,7 +4418,7 @@
                 <a:ea typeface="Pretendard"/>
                 <a:cs typeface="Pretendard"/>
               </a:rPr>
-              <a:t> — 스캔 필름·디지털 RT 이미지를 열면 AI가 놓침 방지 후보를 표시하고, 판독원이 유형을 확정하고 2클릭으로 잰 크기를 룰 엔진이 100mm 평가 구간 기준으로 판정하며, 소견서 초안·PDF·아카이브까지 한 화면에서 끝나는 </a:t>
+              <a:t> — 사진을 열면 AI가 놓칠 만한 곳을 표시하고, 판독원이 결함 종류를 확정하고 클릭 두 번으로 잰 크기를 규칙 엔진이 100mm 구간 기준으로 판정하며, 소견서·PDF·기록 보관까지 한 화면에서 끝나는 </a:t>
             </a:r>
             <a:r>
               <a:rPr sz="1300" b="1" i="0">
@@ -4429,7 +4429,7 @@
                 <a:ea typeface="Pretendard"/>
                 <a:cs typeface="Pretendard"/>
               </a:rPr>
-              <a:t>로컬 실행 웹앱</a:t>
+              <a:t>내 PC에서 도는 웹앱</a:t>
             </a:r>
             <a:r>
               <a:rPr sz="1300" b="0" i="0">
@@ -4440,7 +4440,7 @@
                 <a:ea typeface="Pretendard"/>
                 <a:cs typeface="Pretendard"/>
               </a:rPr>
-              <a:t>(Streamlit — PC에서 실행·브라우저 표시, 같은 와이파이의 태블릿 접속 가능)</a:t>
+              <a:t>(Streamlit — 브라우저로 표시, 같은 와이파이의 태블릿에서도 접속)</a:t>
             </a:r>
           </a:p>
         </p:txBody>
@@ -4481,7 +4481,7 @@
                 <a:ea typeface="Pretendard"/>
                 <a:cs typeface="Pretendard"/>
               </a:rPr>
-              <a:t>주요 사용자: RT 판독원(비파괴검사 자격자) 1인 — 검사업체 판독원 또는 조선소 QC · 판정·승인 권한은 항상 사람</a:t>
+              <a:t>사용자: RT 판독원(비파괴검사 자격자) 1인 — 검사업체 판독원 또는 조선소 품질 담당 · 판정·승인은 언제나 사람이 한다</a:t>
             </a:r>
           </a:p>
         </p:txBody>
@@ -4584,37 +4584,37 @@
               </a:lnSpc>
             </a:pPr>
             <a:r>
-              <a:rPr sz="1000" b="0" i="0">
-                <a:solidFill>
-                  <a:srgbClr val="1F2A44"/>
-                </a:solidFill>
-                <a:latin typeface="Pretendard"/>
-                <a:ea typeface="Pretendard"/>
-                <a:cs typeface="Pretendard"/>
-              </a:rPr>
-              <a:t>판독원이 먼저 보고, AI가 놓침 방지 후보를 표시. 재현율 우선 운영점(오탐은 클릭 한 번, 미탐은 배에 남는다). 후보의 결함 유형은 </a:t>
-            </a:r>
-            <a:r>
-              <a:rPr sz="1000" b="1" i="0">
-                <a:solidFill>
-                  <a:srgbClr val="1F2A44"/>
-                </a:solidFill>
-                <a:latin typeface="Pretendard"/>
-                <a:ea typeface="Pretendard"/>
-                <a:cs typeface="Pretendard"/>
-              </a:rPr>
-              <a:t>판독원이 수정·확정한 뒤 채택</a:t>
-            </a:r>
-            <a:r>
-              <a:rPr sz="1000" b="0" i="0">
-                <a:solidFill>
-                  <a:srgbClr val="1F2A44"/>
-                </a:solidFill>
-                <a:latin typeface="Pretendard"/>
-                <a:ea typeface="Pretendard"/>
-                <a:cs typeface="Pretendard"/>
-              </a:rPr>
-              <a:t> — 균열 등 허용 불가 판정은 확정 유형에만 적용</a:t>
+              <a:rPr sz="950" b="0" i="0">
+                <a:solidFill>
+                  <a:srgbClr val="1F2A44"/>
+                </a:solidFill>
+                <a:latin typeface="Pretendard"/>
+                <a:ea typeface="Pretendard"/>
+                <a:cs typeface="Pretendard"/>
+              </a:rPr>
+              <a:t>판독원이 먼저 보고, AI가 놓칠 만한 후보를 표시한다. 놓침을 줄이는 쪽으로 조정(오탐은 클릭 한 번으로 지우면 되지만, 놓친 결함은 배에 남는다). 후보의 결함 종류는 </a:t>
+            </a:r>
+            <a:r>
+              <a:rPr sz="950" b="1" i="0">
+                <a:solidFill>
+                  <a:srgbClr val="1F2A44"/>
+                </a:solidFill>
+                <a:latin typeface="Pretendard"/>
+                <a:ea typeface="Pretendard"/>
+                <a:cs typeface="Pretendard"/>
+              </a:rPr>
+              <a:t>판독원이 고쳐서 확정한 뒤 채택</a:t>
+            </a:r>
+            <a:r>
+              <a:rPr sz="950" b="0" i="0">
+                <a:solidFill>
+                  <a:srgbClr val="1F2A44"/>
+                </a:solidFill>
+                <a:latin typeface="Pretendard"/>
+                <a:ea typeface="Pretendard"/>
+                <a:cs typeface="Pretendard"/>
+              </a:rPr>
+              <a:t> — 균열 같은 허용 불가 판정은 확정된 종류에만 적용</a:t>
             </a:r>
           </a:p>
         </p:txBody>
@@ -4684,7 +4684,7 @@
                 <a:ea typeface="Pretendard"/>
                 <a:cs typeface="Pretendard"/>
               </a:rPr>
-              <a:t>② 2클릭 자 + 룰 판정</a:t>
+              <a:t>② 2클릭 자 + 규칙 판정</a:t>
             </a:r>
           </a:p>
         </p:txBody>
@@ -4717,37 +4717,37 @@
               </a:lnSpc>
             </a:pPr>
             <a:r>
-              <a:rPr sz="1000" b="0" i="0">
-                <a:solidFill>
-                  <a:srgbClr val="1F2A44"/>
-                </a:solidFill>
-                <a:latin typeface="Pretendard"/>
-                <a:ea typeface="Pretendard"/>
-                <a:cs typeface="Pretendard"/>
-              </a:rPr>
-              <a:t>IQI·납마커 2클릭으로 mm/px, 결함 2클릭으로 크기 확정 → 결정론적 룰 엔진이 </a:t>
-            </a:r>
-            <a:r>
-              <a:rPr sz="1000" b="1" i="0">
-                <a:solidFill>
-                  <a:srgbClr val="1F2A44"/>
-                </a:solidFill>
-                <a:latin typeface="Pretendard"/>
-                <a:ea typeface="Pretendard"/>
-                <a:cs typeface="Pretendard"/>
-              </a:rPr>
-              <a:t>단일 치수·누적 길이·투영 면적률(%)</a:t>
-            </a:r>
-            <a:r>
-              <a:rPr sz="1000" b="0" i="0">
-                <a:solidFill>
-                  <a:srgbClr val="1F2A44"/>
-                </a:solidFill>
-                <a:latin typeface="Pretendard"/>
-                <a:ea typeface="Pretendard"/>
-                <a:cs typeface="Pretendard"/>
-              </a:rPr>
-              <a:t> 3종 판정식으로 합부 + 근거 조항 제시(평가 길이 100mm·용접부 폭 입력)</a:t>
+              <a:rPr sz="950" b="0" i="0">
+                <a:solidFill>
+                  <a:srgbClr val="1F2A44"/>
+                </a:solidFill>
+                <a:latin typeface="Pretendard"/>
+                <a:ea typeface="Pretendard"/>
+                <a:cs typeface="Pretendard"/>
+              </a:rPr>
+              <a:t>기준물(IQI·납마커: 화질·크기 확인용 표준 지시계) 양 끝을 두 번 클릭해 mm/픽셀을 정하고, 결함 양 끝을 두 번 클릭해 크기 확정 → 규칙 엔진이 </a:t>
+            </a:r>
+            <a:r>
+              <a:rPr sz="950" b="1" i="0">
+                <a:solidFill>
+                  <a:srgbClr val="1F2A44"/>
+                </a:solidFill>
+                <a:latin typeface="Pretendard"/>
+                <a:ea typeface="Pretendard"/>
+                <a:cs typeface="Pretendard"/>
+              </a:rPr>
+              <a:t>단일 크기·누적 길이·기공 면적률(%)</a:t>
+            </a:r>
+            <a:r>
+              <a:rPr sz="950" b="0" i="0">
+                <a:solidFill>
+                  <a:srgbClr val="1F2A44"/>
+                </a:solidFill>
+                <a:latin typeface="Pretendard"/>
+                <a:ea typeface="Pretendard"/>
+                <a:cs typeface="Pretendard"/>
+              </a:rPr>
+              <a:t> 3가지 방식으로 합격/불합격과 근거 조항을 제시(100mm 평가 구간·용접부 폭 입력, 기준표 판본 선택)</a:t>
             </a:r>
           </a:p>
         </p:txBody>
@@ -4850,15 +4850,15 @@
               </a:lnSpc>
             </a:pPr>
             <a:r>
-              <a:rPr sz="1000" b="0" i="0">
-                <a:solidFill>
-                  <a:srgbClr val="1F2A44"/>
-                </a:solidFill>
-                <a:latin typeface="Pretendard"/>
-                <a:ea typeface="Pretendard"/>
-                <a:cs typeface="Pretendard"/>
-              </a:rPr>
-              <a:t>확정 판정(비식별 텍스트만)을 LLM이 리포트 문체로 작성 → 판독원 수정·승인 → PDF. 아카이브에서는 ‘3번 블록 지난달 기공 불합격’ 같은 자연어를 LLM이 검색 필터로 변환하고 이력 요약을 생성 — LLM이 없어도 규칙 파서·템플릿으로 동작</a:t>
+              <a:rPr sz="950" b="0" i="0">
+                <a:solidFill>
+                  <a:srgbClr val="1F2A44"/>
+                </a:solidFill>
+                <a:latin typeface="Pretendard"/>
+                <a:ea typeface="Pretendard"/>
+                <a:cs typeface="Pretendard"/>
+              </a:rPr>
+              <a:t>확정된 판정 결과(이미지·개인정보 제외)를 LLM이 보고서 문체로 작성 → 판독원 수정·승인 → PDF. 기록에서는 ‘3번 블록 지난달 기공 불합격’처럼 말로 검색하고 요약 — LLM이 없어도 규칙 파서·템플릿으로 동작</a:t>
             </a:r>
           </a:p>
         </p:txBody>
@@ -4928,7 +4928,7 @@
                 <a:ea typeface="Pretendard"/>
                 <a:cs typeface="Pretendard"/>
               </a:rPr>
-              <a:t>④ 검색 아카이브 + 데이터 축적</a:t>
+              <a:t>④ 검색 기록 + 데이터 축적</a:t>
             </a:r>
           </a:p>
         </p:txBody>
@@ -4961,15 +4961,15 @@
               </a:lnSpc>
             </a:pPr>
             <a:r>
-              <a:rPr sz="1000" b="0" i="0">
-                <a:solidFill>
-                  <a:srgbClr val="1F2A44"/>
-                </a:solidFill>
-                <a:latin typeface="Pretendard"/>
-                <a:ea typeface="Pretendard"/>
-                <a:cs typeface="Pretendard"/>
-              </a:rPr>
-              <a:t>승인 기록 DB·조건 검색·CSV. 채택·직접 추가(bbox 2클릭) 기록은 YOLO 라벨로 export, 기각은 오탐 신호로 집계만(재검토 대상) — 재학습은 별도 프로젝트, 데이터는 반출 없이 조직 소유</a:t>
+              <a:rPr sz="950" b="0" i="0">
+                <a:solidFill>
+                  <a:srgbClr val="1F2A44"/>
+                </a:solidFill>
+                <a:latin typeface="Pretendard"/>
+                <a:ea typeface="Pretendard"/>
+                <a:cs typeface="Pretendard"/>
+              </a:rPr>
+              <a:t>승인 기록 DB·조건 검색·CSV. 채택하거나 직접 추가한 결함 박스는 학습용 라벨로 내보내고, 기각은 오탐 신호로 집계만 — 재학습은 별도 프로젝트, 데이터는 반출 없이 조직 소유</a:t>
             </a:r>
           </a:p>
         </p:txBody>
@@ -5084,7 +5084,7 @@
         <p:spPr>
           <a:xfrm>
             <a:off x="5120640" y="5824728"/>
-            <a:ext cx="3305556" cy="1481328"/>
+            <a:ext cx="3305556" cy="1444752"/>
           </a:xfrm>
           <a:prstGeom prst="roundRect">
             <a:avLst>
@@ -5154,7 +5154,7 @@
         <p:spPr>
           <a:xfrm>
             <a:off x="5276088" y="6208776"/>
-            <a:ext cx="2994660" cy="1024128"/>
+            <a:ext cx="2994660" cy="987552"/>
           </a:xfrm>
           <a:prstGeom prst="rect">
             <a:avLst/>
@@ -5173,7 +5173,7 @@
               </a:lnSpc>
             </a:pPr>
             <a:r>
-              <a:rPr sz="1000" b="0" i="0">
+              <a:rPr sz="950" b="0" i="0">
                 <a:solidFill>
                   <a:srgbClr val="1F2A44"/>
                 </a:solidFill>
@@ -5184,7 +5184,7 @@
               <a:t>Ultralytics YOLO(</a:t>
             </a:r>
             <a:r>
-              <a:rPr sz="1000" b="1" i="0">
+              <a:rPr sz="950" b="1" i="0">
                 <a:solidFill>
                   <a:srgbClr val="1F2A44"/>
                 </a:solidFill>
@@ -5195,37 +5195,37 @@
               <a:t>YOLO26s</a:t>
             </a:r>
             <a:r>
-              <a:rPr sz="1000" b="0" i="0">
-                <a:solidFill>
-                  <a:srgbClr val="1F2A44"/>
-                </a:solidFill>
-                <a:latin typeface="Pretendard"/>
-                <a:ea typeface="Pretendard"/>
-                <a:cs typeface="Pretendard"/>
-              </a:rPr>
-              <a:t> 권장, 2026.01 공개; YOLOv8/11 가중치도 같은 API) + CLAHE로 AI Hub·RIAWELC 학습 예정. </a:t>
-            </a:r>
-            <a:r>
-              <a:rPr sz="1000" b="1" i="0">
-                <a:solidFill>
-                  <a:srgbClr val="1F2A44"/>
-                </a:solidFill>
-                <a:latin typeface="Pretendard"/>
-                <a:ea typeface="Pretendard"/>
-                <a:cs typeface="Pretendard"/>
-              </a:rPr>
-              <a:t>현재 프로토타입은 OpenCV 휴리스틱 폴백 탐지기</a:t>
-            </a:r>
-            <a:r>
-              <a:rPr sz="1000" b="0" i="0">
-                <a:solidFill>
-                  <a:srgbClr val="1F2A44"/>
-                </a:solidFill>
-                <a:latin typeface="Pretendard"/>
-                <a:ea typeface="Pretendard"/>
-                <a:cs typeface="Pretendard"/>
-              </a:rPr>
-              <a:t>(학습 모델 아님): 합성 필름 결함 14개 재현율 14/14, 장당 오탐 3.8건(신뢰도 0.5). 가중치를 두면 자동 전환. AGPL-3.0(사내 배포 시 Enterprise)</a:t>
+              <a:rPr sz="950" b="0" i="0">
+                <a:solidFill>
+                  <a:srgbClr val="1F2A44"/>
+                </a:solidFill>
+                <a:latin typeface="Pretendard"/>
+                <a:ea typeface="Pretendard"/>
+                <a:cs typeface="Pretendard"/>
+              </a:rPr>
+              <a:t> 권장, 2026.01 공개[1]; YOLOv8/11 가중치도 같은 방식) + CLAHE(대비 향상)로 AI Hub·RIAWELC 학습 예정. </a:t>
+            </a:r>
+            <a:r>
+              <a:rPr sz="950" b="1" i="0">
+                <a:solidFill>
+                  <a:srgbClr val="1F2A44"/>
+                </a:solidFill>
+                <a:latin typeface="Pretendard"/>
+                <a:ea typeface="Pretendard"/>
+                <a:cs typeface="Pretendard"/>
+              </a:rPr>
+              <a:t>지금 프로토타입은 학습 모델이 아닌 OpenCV 규칙 기반 폴백 탐지기</a:t>
+            </a:r>
+            <a:r>
+              <a:rPr sz="950" b="0" i="0">
+                <a:solidFill>
+                  <a:srgbClr val="1F2A44"/>
+                </a:solidFill>
+                <a:latin typeface="Pretendard"/>
+                <a:ea typeface="Pretendard"/>
+                <a:cs typeface="Pretendard"/>
+              </a:rPr>
+              <a:t>: 합성 필름 결함 14개 중 14개 검출, 장당 오탐 3.8건(임계 0.5). 가중치 파일을 두면 자동 전환. AGPL-3.0(사내 배포 시 Enterprise 라이선스)</a:t>
             </a:r>
           </a:p>
         </p:txBody>
@@ -5239,7 +5239,7 @@
         <p:spPr>
           <a:xfrm>
             <a:off x="8627364" y="5824728"/>
-            <a:ext cx="3305556" cy="1481328"/>
+            <a:ext cx="3305556" cy="1444752"/>
           </a:xfrm>
           <a:prstGeom prst="roundRect">
             <a:avLst>
@@ -5309,7 +5309,7 @@
         <p:spPr>
           <a:xfrm>
             <a:off x="8782812" y="6208776"/>
-            <a:ext cx="2994660" cy="1024128"/>
+            <a:ext cx="2994660" cy="987552"/>
           </a:xfrm>
           <a:prstGeom prst="rect">
             <a:avLst/>
@@ -5328,7 +5328,7 @@
               </a:lnSpc>
             </a:pPr>
             <a:r>
-              <a:rPr sz="1000" b="0" i="0">
+              <a:rPr sz="950" b="0" i="0">
                 <a:solidFill>
                   <a:srgbClr val="1F2A44"/>
                 </a:solidFill>
@@ -5339,26 +5339,48 @@
               <a:t>기본은 </a:t>
             </a:r>
             <a:r>
-              <a:rPr sz="1000" b="1" i="0">
-                <a:solidFill>
-                  <a:srgbClr val="1F2A44"/>
-                </a:solidFill>
-                <a:latin typeface="Pretendard"/>
-                <a:ea typeface="Pretendard"/>
-                <a:cs typeface="Pretendard"/>
-              </a:rPr>
-              <a:t>온프레미스 로컬 LLM</a:t>
-            </a:r>
-            <a:r>
-              <a:rPr sz="1000" b="0" i="0">
-                <a:solidFill>
-                  <a:srgbClr val="1F2A44"/>
-                </a:solidFill>
-                <a:latin typeface="Pretendard"/>
-                <a:ea typeface="Pretendard"/>
-                <a:cs typeface="Pretendard"/>
-              </a:rPr>
-              <a:t>(Ollama·vLLM OpenAI 호환 API — EXAONE 3.5(코드 기본값)·4.x, HyperCLOVA X SEED 등 한국어 모델) 또는 오프라인 템플릿. 클라우드(Claude Sonnet 5 → Gemini, 코드 기본값 gemini-2.0-flash는 본선 전 최신 모델로 교체)는 명시 허용 시에만 호출. 이미지·실명·파일 경로는 어떤 경우에도 미전송(전송 내용 미리보기 제공)</a:t>
+              <a:rPr sz="950" b="1" i="0">
+                <a:solidFill>
+                  <a:srgbClr val="1F2A44"/>
+                </a:solidFill>
+                <a:latin typeface="Pretendard"/>
+                <a:ea typeface="Pretendard"/>
+                <a:cs typeface="Pretendard"/>
+              </a:rPr>
+              <a:t>사내 PC의 로컬 LLM</a:t>
+            </a:r>
+            <a:r>
+              <a:rPr sz="950" b="0" i="0">
+                <a:solidFill>
+                  <a:srgbClr val="1F2A44"/>
+                </a:solidFill>
+                <a:latin typeface="Pretendard"/>
+                <a:ea typeface="Pretendard"/>
+                <a:cs typeface="Pretendard"/>
+              </a:rPr>
+              <a:t>(Ollama·vLLM — EXAONE 3.5 기본값·4.x, HyperCLOVA X SEED 등 한국어 모델[4][5]) 또는 오프라인 템플릿. 클라우드(Claude Sonnet 5 → Gemini; 코드 기본값 gemini-2.0-flash는 본선 전 교체)는 </a:t>
+            </a:r>
+            <a:r>
+              <a:rPr sz="950" b="1" i="0">
+                <a:solidFill>
+                  <a:srgbClr val="1F2A44"/>
+                </a:solidFill>
+                <a:latin typeface="Pretendard"/>
+                <a:ea typeface="Pretendard"/>
+                <a:cs typeface="Pretendard"/>
+              </a:rPr>
+              <a:t>명시 허용 시에만</a:t>
+            </a:r>
+            <a:r>
+              <a:rPr sz="950" b="0" i="0">
+                <a:solidFill>
+                  <a:srgbClr val="1F2A44"/>
+                </a:solidFill>
+                <a:latin typeface="Pretendard"/>
+                <a:ea typeface="Pretendard"/>
+                <a:cs typeface="Pretendard"/>
+              </a:rPr>
+              <a:t>. 이미지·실명·파일 경로는 어떤 경우에도 보내지 않는다(전송 내용 미리보기 제공)</a:t>
             </a:r>
           </a:p>
         </p:txBody>
@@ -5371,8 +5393,8 @@
         </p:nvSpPr>
         <p:spPr>
           <a:xfrm>
-            <a:off x="5120640" y="7452360"/>
-            <a:ext cx="3305556" cy="1170432"/>
+            <a:off x="5120640" y="7415783"/>
+            <a:ext cx="3305556" cy="1133856"/>
           </a:xfrm>
           <a:prstGeom prst="roundRect">
             <a:avLst>
@@ -5400,7 +5422,7 @@
         </p:nvSpPr>
         <p:spPr>
           <a:xfrm>
-            <a:off x="5276088" y="7552944"/>
+            <a:off x="5276088" y="7516367"/>
             <a:ext cx="2994660" cy="274320"/>
           </a:xfrm>
           <a:prstGeom prst="rect">
@@ -5428,7 +5450,7 @@
                 <a:ea typeface="Pretendard"/>
                 <a:cs typeface="Pretendard"/>
               </a:rPr>
-              <a:t>합부 판정(의도적으로 AI 미사용)</a:t>
+              <a:t>합부 판정(일부러 AI 미사용)</a:t>
             </a:r>
           </a:p>
         </p:txBody>
@@ -5441,8 +5463,8 @@
         </p:nvSpPr>
         <p:spPr>
           <a:xfrm>
-            <a:off x="5276088" y="7836408"/>
-            <a:ext cx="2994660" cy="713232"/>
+            <a:off x="5276088" y="7799831"/>
+            <a:ext cx="2994660" cy="676656"/>
           </a:xfrm>
           <a:prstGeom prst="rect">
             <a:avLst/>
@@ -5461,15 +5483,15 @@
               </a:lnSpc>
             </a:pPr>
             <a:r>
-              <a:rPr sz="1000" b="0" i="0">
-                <a:solidFill>
-                  <a:srgbClr val="1F2A44"/>
-                </a:solidFill>
-                <a:latin typeface="Pretendard"/>
-                <a:ea typeface="Pretendard"/>
-                <a:cs typeface="Pretendard"/>
-              </a:rPr>
-              <a:t>결정론적 룰 엔진 — ISO 10675-1/5817 구조(등급 B·C·D ↔ 허용 레벨 1·2·3, 100mm 평가 길이, 기공 면적률)를 모사한 기준표 JSON. 판본(2021/2023·2016/2014)별 JSON 분리는 본선 목표, 수치는 선급 지침·멘토링 확정 후 교체</a:t>
+              <a:rPr sz="950" b="0" i="0">
+                <a:solidFill>
+                  <a:srgbClr val="1F2A44"/>
+                </a:solidFill>
+                <a:latin typeface="Pretendard"/>
+                <a:ea typeface="Pretendard"/>
+                <a:cs typeface="Pretendard"/>
+              </a:rPr>
+              <a:t>규칙 엔진 — ISO 10675-1·5817 구조(품질등급 B·C·D ↔ 허용 레벨 1·2·3, 100mm 평가 길이, 기공 면적률)를 본뜬 기준표 JSON 2종(2021/2023판·2016/2014판 구조, 데모 수치)을 화면에서 선택. 실제 수치는 선급 지침·멘토링으로 확정 후 JSON만 교체</a:t>
             </a:r>
           </a:p>
         </p:txBody>
@@ -5482,8 +5504,8 @@
         </p:nvSpPr>
         <p:spPr>
           <a:xfrm>
-            <a:off x="8627364" y="7452360"/>
-            <a:ext cx="3305556" cy="1170432"/>
+            <a:off x="8627364" y="7415783"/>
+            <a:ext cx="3305556" cy="1133856"/>
           </a:xfrm>
           <a:prstGeom prst="roundRect">
             <a:avLst>
@@ -5511,7 +5533,7 @@
         </p:nvSpPr>
         <p:spPr>
           <a:xfrm>
-            <a:off x="8782812" y="7552944"/>
+            <a:off x="8782812" y="7516367"/>
             <a:ext cx="2994660" cy="274320"/>
           </a:xfrm>
           <a:prstGeom prst="rect">
@@ -5552,8 +5574,8 @@
         </p:nvSpPr>
         <p:spPr>
           <a:xfrm>
-            <a:off x="8782812" y="7836408"/>
-            <a:ext cx="2994660" cy="713232"/>
+            <a:off x="8782812" y="7799831"/>
+            <a:ext cx="2994660" cy="676656"/>
           </a:xfrm>
           <a:prstGeom prst="rect">
             <a:avLst/>
@@ -5572,7 +5594,7 @@
               </a:lnSpc>
             </a:pPr>
             <a:r>
-              <a:rPr sz="1000" b="1" i="0">
+              <a:rPr sz="950" b="1" i="0">
                 <a:solidFill>
                   <a:srgbClr val="1F2A44"/>
                 </a:solidFill>
@@ -5583,15 +5605,15 @@
               <a:t>Claude Code</a:t>
             </a:r>
             <a:r>
-              <a:rPr sz="1000" b="0" i="0">
-                <a:solidFill>
-                  <a:srgbClr val="1F2A44"/>
-                </a:solidFill>
-                <a:latin typeface="Pretendard"/>
-                <a:ea typeface="Pretendard"/>
-                <a:cs typeface="Pretendard"/>
-              </a:rPr>
-              <a:t>로 설계·구현·적대적 코드 리뷰(자동 테스트 195건). 본선에서는 해커톤 지원 항목인 Claude Max 플랜(공고 기준)으로 고도화</a:t>
+              <a:rPr sz="950" b="0" i="0">
+                <a:solidFill>
+                  <a:srgbClr val="1F2A44"/>
+                </a:solidFill>
+                <a:latin typeface="Pretendard"/>
+                <a:ea typeface="Pretendard"/>
+                <a:cs typeface="Pretendard"/>
+              </a:rPr>
+              <a:t>로 설계·구현·적대적 코드 리뷰(자동 테스트 235건). 본선에서는 해커톤 지원 항목인 Claude Max 플랜(공고 기준)으로 고도화</a:t>
             </a:r>
           </a:p>
         </p:txBody>
@@ -5604,8 +5626,8 @@
         </p:nvSpPr>
         <p:spPr>
           <a:xfrm>
-            <a:off x="5120640" y="8769096"/>
-            <a:ext cx="6812280" cy="420624"/>
+            <a:off x="5120640" y="8695944"/>
+            <a:ext cx="6812280" cy="512064"/>
           </a:xfrm>
           <a:prstGeom prst="roundRect">
             <a:avLst>
@@ -5633,8 +5655,8 @@
         </p:nvSpPr>
         <p:spPr>
           <a:xfrm>
-            <a:off x="5276088" y="8860536"/>
-            <a:ext cx="6501384" cy="283464"/>
+            <a:off x="5276088" y="8787384"/>
+            <a:ext cx="6501384" cy="374904"/>
           </a:xfrm>
           <a:prstGeom prst="rect">
             <a:avLst/>
@@ -5653,7 +5675,7 @@
               </a:lnSpc>
             </a:pPr>
             <a:r>
-              <a:rPr sz="1050" b="1" i="0">
+              <a:rPr sz="1000" b="1" i="0">
                 <a:solidFill>
                   <a:srgbClr val="1F2A44"/>
                 </a:solidFill>
@@ -5664,15 +5686,15 @@
               <a:t>기술 스택</a:t>
             </a:r>
             <a:r>
-              <a:rPr sz="1050" b="0" i="0">
-                <a:solidFill>
-                  <a:srgbClr val="1F2A44"/>
-                </a:solidFill>
-                <a:latin typeface="Pretendard"/>
-                <a:ea typeface="Pretendard"/>
-                <a:cs typeface="Pretendard"/>
-              </a:rPr>
-              <a:t>  Python 3.11 · Streamlit 1.63 · OpenCV · SQLite · reportlab(PDF) · 합성 필름 생성기 · Docker · 더블클릭 실행</a:t>
+              <a:rPr sz="1000" b="0" i="0">
+                <a:solidFill>
+                  <a:srgbClr val="1F2A44"/>
+                </a:solidFill>
+                <a:latin typeface="Pretendard"/>
+                <a:ea typeface="Pretendard"/>
+                <a:cs typeface="Pretendard"/>
+              </a:rPr>
+              <a:t>  Python 3.11 · Streamlit 1.63[2] · OpenCV · SQLite · reportlab(PDF) · 합성 필름 생성기 · Docker · 더블클릭 실행</a:t>
             </a:r>
           </a:p>
         </p:txBody>
@@ -5822,7 +5844,7 @@
                 <a:ea typeface="Pretendard"/>
                 <a:cs typeface="Pretendard"/>
               </a:rPr>
-              <a:t>탐지 단독은 이미 연구·상용화가 진행된 영역</a:t>
+              <a:t>결함 찾기(탐지) 하나만으로는 새롭지 않다</a:t>
             </a:r>
             <a:r>
               <a:rPr sz="1050" b="0" i="0">
@@ -5833,7 +5855,7 @@
                 <a:ea typeface="Pretendard"/>
                 <a:cs typeface="Pretendard"/>
               </a:rPr>
-              <a:t> — D-Vision(자사 적용), 코드비전 RT AI 판독 웹 플랫폼(2024.10 전시), Trueflaw FlawML(핀란드, RT용 AI 어시스턴트 — Meyer Turku 조선소·DEKRA와 ADR 학습 데이터 협업 2022.02), DNV×GSI 공동개발(2019) 등(공개 정보 기준) → 신규성은 판독원 워크플로우 전체의 </a:t>
+              <a:t> — D-Vision(자사 적용), 코드비전 RT AI 판독 플랫폼(2024.10 전시)[6], Trueflaw FlawML(핀란드; Meyer Turku 조선소·DEKRA와 협업 2022)[7], DNV×GSI 공동개발(2019)[8] 등 → 새로움은 판독원의 하루 전체(2차 눈+판정+소견서+기록)를 </a:t>
             </a:r>
             <a:r>
               <a:rPr sz="1050" b="1" i="0">
@@ -5844,7 +5866,7 @@
                 <a:ea typeface="Pretendard"/>
                 <a:cs typeface="Pretendard"/>
               </a:rPr>
-              <a:t>통합</a:t>
+              <a:t>하나로 잇는 통합</a:t>
             </a:r>
           </a:p>
           <a:p>
@@ -5881,7 +5903,7 @@
                 <a:ea typeface="Pretendard"/>
                 <a:cs typeface="Pretendard"/>
               </a:rPr>
-              <a:t>: 촬영 장비·선급 승인 체계의 디지털화. 본 안은 그 다음 단계(판독·판정·문서·이력)를 다루며 </a:t>
+              <a:t>: 그쪽은 촬영 장비와 선급 승인 체계의 디지털화. 본 안은 그 다음 단계(판독·판정·문서·이력)이고 </a:t>
             </a:r>
             <a:r>
               <a:rPr sz="1050" b="1" i="0">
@@ -5892,7 +5914,7 @@
                 <a:ea typeface="Pretendard"/>
                 <a:cs typeface="Pretendard"/>
               </a:rPr>
-              <a:t>스캔 필름과 디지털 RT 이미지 모두 입력</a:t>
+              <a:t>필름 스캔과 디지털 사진 모두 입력</a:t>
             </a:r>
             <a:r>
               <a:rPr sz="1050" b="0" i="0">
@@ -5940,7 +5962,7 @@
                 <a:ea typeface="Pretendard"/>
                 <a:cs typeface="Pretendard"/>
               </a:rPr>
-              <a:t> — DNV도 2019 GSI 프로젝트에서 ‘AI는 검출, 사람은 최종 승인’으로 역할을 한정했고, AI 판독 자체를 선급이 규칙·가이드로 승인한 공개 사례는 2026.09 검색 기준 확인되지 않음. 본 안은 판정을 룰 엔진(조항 ID 자동 기재)에, 작문·검색을 LLM에 분리 → </a:t>
+              <a:t> — DNV도 2019년 ‘AI는 검출, 사람은 최종 승인’으로 역할을 나눴고[8], AI 판독을 선급이 규칙으로 승인한 공개 사례는 2026.09 기준 확인되지 않는다. 본 안은 판정을 규칙 엔진(조항 번호 자동 기재)에, 글쓰기·검색을 LLM에 맡긴다 → </a:t>
             </a:r>
             <a:r>
               <a:rPr sz="1050" b="1" i="0">
@@ -5951,7 +5973,7 @@
                 <a:ea typeface="Pretendard"/>
                 <a:cs typeface="Pretendard"/>
               </a:rPr>
-              <a:t>선급 승인이 필요 없는 판독 보조·문서화 영역에서 즉시 도입 가능</a:t>
+              <a:t>선급 승인이 필요 없는 영역에서 바로 도입 가능</a:t>
             </a:r>
           </a:p>
           <a:p>
@@ -5977,7 +5999,7 @@
                 <a:ea typeface="Pretendard"/>
                 <a:cs typeface="Pretendard"/>
               </a:rPr>
-              <a:t>픽셀→mm 스케일은 </a:t>
+              <a:t>픽셀→mm 환산은 </a:t>
             </a:r>
             <a:r>
               <a:rPr sz="1050" b="1" i="0">
@@ -5988,7 +6010,7 @@
                 <a:ea typeface="Pretendard"/>
                 <a:cs typeface="Pretendard"/>
               </a:rPr>
-              <a:t>판독원의 2클릭</a:t>
+              <a:t>판독원의 클릭 두 번</a:t>
             </a:r>
             <a:r>
               <a:rPr sz="1050" b="0" i="0">
@@ -5999,7 +6021,7 @@
                 <a:ea typeface="Pretendard"/>
                 <a:cs typeface="Pretendard"/>
               </a:rPr>
-              <a:t>(IQI·납마커)으로 확정 — AI 추정 스케일 없음</a:t>
+              <a:t>으로 확정 — AI가 추정하지 않는다</a:t>
             </a:r>
           </a:p>
           <a:p>
@@ -6036,7 +6058,7 @@
                 <a:ea typeface="Pretendard"/>
                 <a:cs typeface="Pretendard"/>
               </a:rPr>
-              <a:t> — 조선·방산 현장의 반출 금지를 전제로 로컬 LLM/템플릿이 기본, 클라우드는 옵트인. 국산 모델 선택지: EXAONE 4.5(2026.04, 상용은 별도 계약), HyperCLOVA X SEED Think 32B(2025.12, 자체 라이선스로 조건부 상용 허용 — 원문 확인 필요)</a:t>
+              <a:t> — 조선·방산 현장의 반출 금지를 전제로 로컬 LLM/템플릿이 기본, 클라우드는 옵트인. 국산 모델: EXAONE 4.5(2026.04, 상용은 별도 계약)[4], HyperCLOVA X SEED Think 32B(2025.12, 조건부 상용 허용)[5]</a:t>
             </a:r>
           </a:p>
         </p:txBody>
@@ -6077,7 +6099,7 @@
                 <a:ea typeface="Pretendard"/>
                 <a:cs typeface="Pretendard"/>
               </a:rPr>
-              <a:t>출처: Ultralytics 8.4.0 릴리스 노트·PyPI(2026.01.14, AGPL-3.0/Enterprise) · Streamlit 1.63.0 PyPI(2026.09.01) · Anthropic 모델·구조화 출력 문서 · Ollama/vLLM OpenAI 호환 API 문서 · LG AI연구원 EXAONE 4.5 README(2026.04.09) · NAVER HyperCLOVA X SEED Think 보도자료(2025.12.26, 검색 요약 기준) · 헬로티 2024.10(코드비전, 검색 요약 기준) · Trueflaw(LinkedIn 2022.02, Pexraytech 협업 2024.12, 검색 요약 기준) · DNV GL×GSI JDP 보도자료(2019.12, 검색 요약 기준) · 해커톤 공고(Max 플랜 지원) · 탐지 수치는 합성 필름 자체 측정</a:t>
+              <a:t>참고  [1] Ultralytics 8.4.0 릴리스·PyPI(2026.01.14, AGPL-3.0)  ·  [2] Streamlit 1.63.0 PyPI(2026.09.01)  ·  [3] Anthropic 모델 문서 · Ollama/vLLM API 문서  ·  [4] LG AI연구원 EXAONE 4.5 README(2026.04.09)  ·  [5] NAVER HyperCLOVA X SEED Think 보도자료(2025.12.26)†  ·  [6] 헬로티 2024.10†  ·  [7] Trueflaw LinkedIn 2022.02 · Pexraytech 협업 2024.12†  ·  [8] DNV GL×GSI 보도자료(2019.12)†  ·  탐지 수치는 합성 필름 자체 측정  ·  † 검색 요약 기준</a:t>
             </a:r>
           </a:p>
         </p:txBody>
@@ -6754,7 +6776,7 @@
         <p:spPr>
           <a:xfrm>
             <a:off x="4800600" y="1371600"/>
-            <a:ext cx="7818120" cy="2788920"/>
+            <a:ext cx="7818120" cy="2971800"/>
           </a:xfrm>
           <a:prstGeom prst="roundRect">
             <a:avLst>
@@ -6897,7 +6919,7 @@
         <p:spPr>
           <a:xfrm>
             <a:off x="5120640" y="2606040"/>
-            <a:ext cx="3451860" cy="1417319"/>
+            <a:ext cx="3451860" cy="1600200"/>
           </a:xfrm>
           <a:prstGeom prst="rect">
             <a:avLst/>
@@ -6932,7 +6954,7 @@
                 <a:ea typeface="Pretendard"/>
                 <a:cs typeface="Pretendard"/>
               </a:rPr>
-              <a:t>로컬 실행 웹앱 — 4대 기능 전 구간 동작(탐지→측정→판정→소견서→PDF→아카이브)</a:t>
+              <a:t>내 PC에서 도는 웹앱 — 4대 기능 전 구간 동작(탐지→측정→판정→소견서→PDF→기록)</a:t>
             </a:r>
           </a:p>
           <a:p>
@@ -6958,7 +6980,7 @@
                 <a:ea typeface="Pretendard"/>
                 <a:cs typeface="Pretendard"/>
               </a:rPr>
-              <a:t>자동 테스트 195건 통과 · 합성 필름 E2E 헤드리스 검증</a:t>
+              <a:t>자동 테스트 235건 통과 · 합성 필름으로 전 과정 자동 검증</a:t>
             </a:r>
           </a:p>
           <a:p>
@@ -6984,7 +7006,7 @@
                 <a:ea typeface="Pretendard"/>
                 <a:cs typeface="Pretendard"/>
               </a:rPr>
-              <a:t>룰 엔진 판정식 3종(단일·누적·면적률) · 로컬 LLM 우선 정책 · 자연어 검색</a:t>
+              <a:t>판정식 3종 · 기준표 판본 선택(적용 판본을 판정표·PDF·기록에 기재) · 선급 보고 항목 25개 입력 필드(n/25 커버리지 표시·PDF에 W33 원문 병기·초안에 촬영 조건 반영) · 로컬 LLM 우선 · 자연어 검색</a:t>
             </a:r>
           </a:p>
         </p:txBody>
@@ -7040,7 +7062,7 @@
         <p:spPr>
           <a:xfrm>
             <a:off x="8846820" y="2606040"/>
-            <a:ext cx="3451860" cy="1417319"/>
+            <a:ext cx="3451860" cy="1600200"/>
           </a:xfrm>
           <a:prstGeom prst="rect">
             <a:avLst/>
@@ -7101,7 +7123,7 @@
                 <a:ea typeface="Pretendard"/>
                 <a:cs typeface="Pretendard"/>
               </a:rPr>
-              <a:t>기준표 실제 수치 확정(선급 지침·멘토링) — 대체: 공개 규격 구조 기반 데모값 유지, 조항 ID로 구분</a:t>
+              <a:t>기준표 실제 수치 확정(선급 지침·멘토링) — 대체: 공개 규격 구조의 데모 수치 유지, 조항 번호로 구분</a:t>
             </a:r>
           </a:p>
           <a:p>
@@ -7127,7 +7149,7 @@
                 <a:ea typeface="Pretendard"/>
                 <a:cs typeface="Pretendard"/>
               </a:rPr>
-              <a:t>현직 판독원 리포트 양식 검증 — 대체: IACS UR W33 §8.2·8.5 필수 항목으로 자체 검증</a:t>
+              <a:t>현직 판독원의 보고서 양식 검증 — 대체: IACS UR W33 §8 필수 항목으로 자체 검증</a:t>
             </a:r>
           </a:p>
         </p:txBody>
@@ -7141,7 +7163,7 @@
         <p:spPr>
           <a:xfrm>
             <a:off x="12893040" y="1371600"/>
-            <a:ext cx="4782311" cy="2788920"/>
+            <a:ext cx="4782311" cy="2971800"/>
           </a:xfrm>
           <a:prstGeom prst="roundRect">
             <a:avLst>
@@ -7284,7 +7306,7 @@
         <p:spPr>
           <a:xfrm>
             <a:off x="13213080" y="2560320"/>
-            <a:ext cx="1956815" cy="1463039"/>
+            <a:ext cx="1956815" cy="1645920"/>
           </a:xfrm>
           <a:prstGeom prst="rect">
             <a:avLst/>
@@ -7319,7 +7341,7 @@
                 <a:ea typeface="Pretendard"/>
                 <a:cs typeface="Pretendard"/>
               </a:rPr>
-              <a:t>4대 기능(2차 눈·2클릭 자 + 룰 판정·소견서·아카이브) + 자연어 검색</a:t>
+              <a:t>4대 기능(2차 눈·2클릭 자+규칙 판정·소견서·기록) + 자연어 검색</a:t>
             </a:r>
           </a:p>
           <a:p>
@@ -7345,7 +7367,7 @@
                 <a:ea typeface="Pretendard"/>
                 <a:cs typeface="Pretendard"/>
               </a:rPr>
-              <a:t>YOLO 학습 + GDXray 교차 검증 수치(재현율·장당 오탐) 공개</a:t>
+              <a:t>YOLO 학습 + GDXray 교차 검증 수치(검출률·장당 오탐) 공개</a:t>
             </a:r>
           </a:p>
           <a:p>
@@ -7427,7 +7449,7 @@
         <p:spPr>
           <a:xfrm>
             <a:off x="15398496" y="2560320"/>
-            <a:ext cx="1956815" cy="1463039"/>
+            <a:ext cx="1956815" cy="1645920"/>
           </a:xfrm>
           <a:prstGeom prst="rect">
             <a:avLst/>
@@ -7488,7 +7510,7 @@
                 <a:ea typeface="Pretendard"/>
                 <a:cs typeface="Pretendard"/>
               </a:rPr>
-              <a:t>위험도 샘플링 추천(검사 지점은 선급·선주·QC 권한)</a:t>
+              <a:t>위험도 샘플링 추천(검사 지점은 선급·선주·품질부서 권한)</a:t>
             </a:r>
           </a:p>
           <a:p>
@@ -7514,7 +7536,7 @@
                 <a:ea typeface="Pretendard"/>
                 <a:cs typeface="Pretendard"/>
               </a:rPr>
-              <a:t>재학습 파이프라인·UT(PAUT·TOFD) 판독·야드 파일럿 → 로드맵</a:t>
+              <a:t>재학습 파이프라인·초음파(UT) 판독·야드 파일럿 → 로드맵</a:t>
             </a:r>
           </a:p>
         </p:txBody>
@@ -7527,8 +7549,8 @@
         </p:nvSpPr>
         <p:spPr>
           <a:xfrm>
-            <a:off x="4800600" y="4389120"/>
-            <a:ext cx="7818120" cy="1691640"/>
+            <a:off x="4800600" y="4572000"/>
+            <a:ext cx="7818120" cy="1508760"/>
           </a:xfrm>
           <a:prstGeom prst="roundRect">
             <a:avLst>
@@ -7558,7 +7580,7 @@
         </p:nvSpPr>
         <p:spPr>
           <a:xfrm>
-            <a:off x="5120640" y="4672584"/>
+            <a:off x="5120640" y="4855464"/>
             <a:ext cx="146304" cy="146304"/>
           </a:xfrm>
           <a:prstGeom prst="ellipse">
@@ -7587,7 +7609,7 @@
         </p:nvSpPr>
         <p:spPr>
           <a:xfrm>
-            <a:off x="5367527" y="4572000"/>
+            <a:off x="5367527" y="4754880"/>
             <a:ext cx="6931152" cy="384048"/>
           </a:xfrm>
           <a:prstGeom prst="rect">
@@ -7628,8 +7650,8 @@
         </p:nvSpPr>
         <p:spPr>
           <a:xfrm>
-            <a:off x="5120640" y="4956048"/>
-            <a:ext cx="7178040" cy="1051560"/>
+            <a:off x="5120640" y="5138928"/>
+            <a:ext cx="7178040" cy="868680"/>
           </a:xfrm>
           <a:prstGeom prst="rect">
             <a:avLst/>
@@ -7701,7 +7723,7 @@
                 <a:ea typeface="Pretendard"/>
                 <a:cs typeface="Pretendard"/>
               </a:rPr>
-              <a:t>보유 경험: YOLO 결함 탐지(랩실)·LLM 파이프라인 프로토타입 / 프로토타입 적용 스택: Python·Streamlit·OpenCV·SQLite</a:t>
+              <a:t>보유 경험: YOLO 결함 탐지(랩실)·LLM 파이프라인 프로토타입 / 적용 스택: Python·Streamlit·OpenCV·SQLite</a:t>
             </a:r>
           </a:p>
           <a:p>
@@ -7727,7 +7749,7 @@
                 <a:ea typeface="Pretendard"/>
                 <a:cs typeface="Pretendard"/>
               </a:rPr>
-              <a:t>외부 자원(본선 진출 시): 도메인 멘토링 2회(기준 원문·리포트 양식), 기술 멘토링 2회(모델 성능·자 도구 UX·리허설), 현직자 오픈카톡</a:t>
+              <a:t>외부 자원(본선 진출 시): 도메인 멘토링 2회(기준 원문·보고서 양식), 기술 멘토링 2회(모델 성능·UX·리허설), 현직자 오픈카톡</a:t>
             </a:r>
           </a:p>
         </p:txBody>
@@ -7940,7 +7962,7 @@
                 <a:ea typeface="Pretendard"/>
                 <a:cs typeface="Pretendard"/>
               </a:rPr>
-              <a:t>이미지 로드(스캔 필름) · CLAHE 대비 향상</a:t>
+              <a:t>사진 열기(스캔 필름) · 대비 향상</a:t>
             </a:r>
           </a:p>
         </p:txBody>
@@ -8052,7 +8074,7 @@
                 <a:ea typeface="Pretendard"/>
                 <a:cs typeface="Pretendard"/>
               </a:rPr>
-              <a:t>AI 후보 표시 → 유형 확정·채택 / 오탐 기각</a:t>
+              <a:t>AI 후보 표시 → 종류 확정·채택 / 오탐 기각</a:t>
             </a:r>
           </a:p>
         </p:txBody>
@@ -8164,7 +8186,7 @@
                 <a:ea typeface="Pretendard"/>
                 <a:cs typeface="Pretendard"/>
               </a:rPr>
-              <a:t>납마커 양 끝 2클릭 캘리브레이션(mm/px)</a:t>
+              <a:t>납마커 양 끝 2클릭 → mm/픽셀 확정</a:t>
             </a:r>
           </a:p>
         </p:txBody>
@@ -8612,7 +8634,7 @@
                 <a:ea typeface="Pretendard"/>
                 <a:cs typeface="Pretendard"/>
               </a:rPr>
-              <a:t>자연어로 ‘3번 블록 기공 이력’ 검색·요약</a:t>
+              <a:t>말로 ‘3번 블록 기공 이력’ 검색·요약</a:t>
             </a:r>
           </a:p>
         </p:txBody>
@@ -8724,7 +8746,7 @@
                 <a:ea typeface="Pretendard"/>
                 <a:cs typeface="Pretendard"/>
               </a:rPr>
-              <a:t>채택률·미탐 지표 확인 · YOLO 라벨 export</a:t>
+              <a:t>채택률·미탐 지표 확인 · 학습 라벨 내보내기</a:t>
             </a:r>
           </a:p>
         </p:txBody>
@@ -8765,7 +8787,7 @@
                 <a:ea typeface="Pretendard"/>
                 <a:cs typeface="Pretendard"/>
               </a:rPr>
-              <a:t>균열 포함 불합격 1건 + 무결함 합격 1건, 합성 RT 필름으로 시연(실필름은 현장 보안 통제로 기간 내 확보 곤란). 오른쪽 화면의 후보 박스는 OpenCV 폴백 탐지기 출력(탐지 임계 0.5는 내부값, 화면 슬라이더는 표시 필터)</a:t>
+              <a:t>균열 포함 불합격 1건 + 무결함 합격 1건을 합성 RT 필름으로 시연(실제 필름은 현장 보안 통제로 기간 내 확보 곤란). 화면의 후보 박스는 OpenCV 폴백 탐지기 출력(탐지 임계 0.5는 내부값, 화면 슬라이더는 표시 필터)</a:t>
             </a:r>
           </a:p>
         </p:txBody>
@@ -8778,8 +8800,8 @@
         </p:nvSpPr>
         <p:spPr>
           <a:xfrm>
-            <a:off x="12893040" y="4389120"/>
-            <a:ext cx="4782311" cy="4864607"/>
+            <a:off x="12893040" y="4572000"/>
+            <a:ext cx="4782311" cy="4681727"/>
           </a:xfrm>
           <a:prstGeom prst="roundRect">
             <a:avLst>
@@ -8809,7 +8831,7 @@
         </p:nvSpPr>
         <p:spPr>
           <a:xfrm>
-            <a:off x="13213080" y="4617720"/>
+            <a:off x="13213080" y="4800600"/>
             <a:ext cx="4142231" cy="292608"/>
           </a:xfrm>
           <a:prstGeom prst="rect">
@@ -8858,7 +8880,7 @@
         </p:blipFill>
         <p:spPr>
           <a:xfrm>
-            <a:off x="13213080" y="5010912"/>
+            <a:off x="13213080" y="5193792"/>
             <a:ext cx="4142231" cy="2816717"/>
           </a:xfrm>
           <a:prstGeom prst="rect">
@@ -8948,7 +8970,7 @@
                 <a:ea typeface="Pretendard"/>
                 <a:cs typeface="Pretendard"/>
               </a:rPr>
-              <a:t>출처: rt-workbench 저장소(2026.09 — 테스트 195건·E2E 로그·탐지 측정 스크립트) · IACS UR W33 Rev.1/Corr.1(2021) §8.2·8.5 보고 항목 · 화면은 Streamlit 앱 실제 캡처(합성 필름)</a:t>
+              <a:t>참고  [1] rt-workbench 저장소(2026.09 — 자동 테스트 tests/ · E2E scripts/demo_e2e.py · 탐지 측정 scripts/eval_detector.py)  ·  [2] IACS UR W33 Rev.1/Corr.1(2021) §8.2·8.5  ·  화면은 앱 실제 캡처(합성 필름)</a:t>
             </a:r>
           </a:p>
         </p:txBody>
@@ -9801,7 +9823,7 @@
                 <a:ea typeface="Pretendard"/>
                 <a:cs typeface="Pretendard"/>
               </a:rPr>
-              <a:t>「창원 지역 특화산업 고도화 및 디지털 전환 촉진을 위한 용접 AI 학습 데이터」 — 강재(RT·VT)·알루미늄(RT) 용접 이미지 144,019장(RT 70,000장 — 활용 신청 시 페이지에서 확인한 수치), 폴리곤 JSON 라벨, 공식 활용예시 YOLOv5x-seg</a:t>
+              <a:t>「창원 지역 특화산업 고도화 및 디지털 전환 촉진을 위한 용접 AI 학습 데이터」 — 강재(RT·VT)·알루미늄(RT) 용접 사진 144,019장(RT 70,000장; 활용 신청 시 페이지에서 확인한 수치), 결함 영역 폴리곤 라벨(JSON), 공식 예시 모델 YOLOv5x-seg</a:t>
             </a:r>
           </a:p>
         </p:txBody>
@@ -9998,7 +10020,7 @@
                 <a:ea typeface="Pretendard"/>
                 <a:cs typeface="Pretendard"/>
               </a:rPr>
-              <a:t>224×224(공칭) 패치 24,407장 · 4클래스 분류(균열 7,635 · 기공 6,320 · 용입부족 4,452 · 정상 6,000 — 클래스명 매핑은 문헌 기준, 원저자 확인 예정) — bbox 없음, 2000×8640 산업 방사선 원본에서 잘라낸 패치, 라이선스 파일 없음(논문 인용 의무)</a:t>
+              <a:t>224×224(공칭) 조각 사진 24,407장 · 4종 분류(균열 7,635 · 기공 6,320 · 용입부족 4,452 · 정상 6,000 — 종류 이름 대응은 문헌 기준, 원저자 확인 예정) — 결함 위치 박스 없음, 2000×8640 산업 원본에서 잘라낸 조각, 라이선스 파일 없음(논문 인용 의무)</a:t>
             </a:r>
           </a:p>
         </p:txBody>
@@ -10154,7 +10176,7 @@
                 <a:ea typeface="Pretendard"/>
                 <a:cs typeface="Pretendard"/>
               </a:rPr>
-              <a:t>Mery et al. 2015 · BAM 제공</a:t>
+              <a:t>Mery 외 2015 · BAM 제공</a:t>
             </a:r>
           </a:p>
         </p:txBody>
@@ -10195,7 +10217,7 @@
                 <a:ea typeface="Pretendard"/>
                 <a:cs typeface="Pretendard"/>
               </a:rPr>
-              <a:t>3시리즈 88장 — W0001 10장 + W0002 정답 마스크(결함 641개 bbox·이진 GT), W0003 BAM 라운드로빈 필름 68장(논문 표 기준, 본문은 67장; ISO 17636-1 A급 촬영, ISO 14096-2 DB급 스캔) · 연구·교육 목적만</a:t>
+              <a:t>3시리즈 88장 — W0001 10장 + W0002 정답 마스크(결함 641개 박스·이진 GT), W0003 BAM 라운드로빈 필름 68장(논문 표 기준, 본문은 67장; ISO 17636-1 A급 촬영, ISO 14096-2 DB급 스캔) · 연구·교육 목적만</a:t>
             </a:r>
           </a:p>
         </p:txBody>
@@ -10278,7 +10300,7 @@
                 <a:ea typeface="Pretendard"/>
                 <a:cs typeface="Pretendard"/>
               </a:rPr>
-              <a:t>형태·규모는 위와 같고(3종 모두 실존 확인, 수치는 논문·README·신청 확인 기준) AI Hub 폴리곤 라벨은 YOLO bbox로 변환, RIAWELC는 위치정보가 없어 분류 사전학습에만 사용. AI Hub는 내국인 활용 신청·승인 필요·국외 반출 금지·NIA 출처 표기 의무, GDXray는 상업 이용 금지, RIAWELC는 공개 분할의 학습·테스트 중복이 확인되어 자체 재분할</a:t>
+              <a:t>3종 모두 실존 확인(수치는 논문·README·신청 확인 기준). AI Hub 폴리곤 라벨은 YOLO 박스로 변환, RIAWELC는 위치 정보가 없어 분류 사전학습에만 사용. AI Hub는 내국인 활용 신청·승인 필요·국외 반출 금지·NIA 출처 표기 의무, GDXray는 상업 이용 금지, RIAWELC는 공개 분할에 학습·테스트 중복이 있어 자체 재분할</a:t>
             </a:r>
           </a:p>
         </p:txBody>
@@ -10498,7 +10520,7 @@
                 <a:ea typeface="Pretendard"/>
                 <a:cs typeface="Pretendard"/>
               </a:rPr>
-              <a:t>: 개발·시연용 합성 RT 필름 생성기(IQI·납마커·결함 시딩) — 프로토타입 포함, 재현율·오탐 측정에 사용</a:t>
+              <a:t>: 개발·시연용 합성 RT 필름 생성기(IQI·납마커·결함 심기) — 프로토타입에 포함, 검출률·오탐 측정에 사용</a:t>
             </a:r>
           </a:p>
           <a:p>
@@ -10535,7 +10557,7 @@
                 <a:ea typeface="Pretendard"/>
                 <a:cs typeface="Pretendard"/>
               </a:rPr>
-              <a:t>: 채택·직접 추가 bbox가 YOLO 라벨로 export되는 구조 — 데이터는 검사업체·조선소 소유, 반출 없이 온프레미스 보관</a:t>
+              <a:t>: 채택·직접 추가한 결함 박스가 학습 라벨로 내보내지는 구조 — 데이터는 검사업체·조선소 소유, 반출 없이 사내 보관</a:t>
             </a:r>
           </a:p>
           <a:p>
@@ -10561,7 +10583,7 @@
                 <a:ea typeface="Pretendard"/>
                 <a:cs typeface="Pretendard"/>
               </a:rPr>
-              <a:t>필름 디지털화 전제</a:t>
+              <a:t>필름 스캔 전제</a:t>
             </a:r>
             <a:r>
               <a:rPr sz="1250" b="0" i="0">
@@ -10572,7 +10594,7 @@
                 <a:ea typeface="Pretendard"/>
                 <a:cs typeface="Pretendard"/>
               </a:rPr>
-              <a:t>: ISO 14096-2 등급(DS/DB/DA) 디지타이저는 3만 달러급 장비(VIDAR NDT PRO 리셀러 가격 기준) → 조직 공용 장비 또는 국내 RT 필름 스캔 서비스로 확보</a:t>
+              <a:t>: ISO 14096-2 등급(DS/DB/DA) 디지타이저는 3만 달러급 장비(VIDAR NDT PRO 리셀러 가격 기준[8]) → 조직 공용 장비 또는 국내 RT 필름 스캔 서비스로 확보</a:t>
             </a:r>
           </a:p>
         </p:txBody>
@@ -10733,7 +10755,7 @@
                 <a:ea typeface="Pretendard"/>
                 <a:cs typeface="Pretendard"/>
               </a:rPr>
-              <a:t>RIAWELC 사전학습 + GDXray W0001·W0002(결함 641개 bbox+GT) 탐지 검증</a:t>
+              <a:t>RIAWELC 사전학습 + GDXray W0001·W0002(결함 641개 박스+GT) 탐지 검증</a:t>
             </a:r>
             <a:r>
               <a:rPr sz="1250" b="0" i="0">
@@ -10744,7 +10766,7 @@
                 <a:ea typeface="Pretendard"/>
                 <a:cs typeface="Pretendard"/>
               </a:rPr>
-              <a:t>으로 대체 — 분류→탐지 전이의 한계는 수치로 공개. 폴리곤 라벨 공개 데이터 SWRD(2025, 3,600장 이상)도 후보(라이선스 확인 후)</a:t>
+              <a:t>으로 대체 — 분류→탐지 전이의 한계는 수치로 공개. 폴리곤 라벨 공개 데이터 SWRD(2025, 3,600장 이상)[7]도 후보(라이선스 확인 후)</a:t>
             </a:r>
           </a:p>
           <a:p>
@@ -10770,7 +10792,7 @@
                 <a:ea typeface="Pretendard"/>
                 <a:cs typeface="Pretendard"/>
               </a:rPr>
-              <a:t>실 조선소 필름은 보안 통제로 기간 내 확보 곤란 → 공개 데이터 + 합성 필름으로 시연하고 </a:t>
+              <a:t>실제 조선소 필름은 보안 통제로 기간 내 확보 곤란 → 공개 데이터 + 합성 필름으로 시연하고 </a:t>
             </a:r>
             <a:r>
               <a:rPr sz="1250" b="1" i="0">
@@ -10818,7 +10840,7 @@
                 <a:ea typeface="Pretendard"/>
                 <a:cs typeface="Pretendard"/>
               </a:rPr>
-              <a:t>재현율 우선</a:t>
+              <a:t>검출률(재현율) 우선</a:t>
             </a:r>
             <a:r>
               <a:rPr sz="1250" b="0" i="0">
@@ -10829,7 +10851,7 @@
                 <a:ea typeface="Pretendard"/>
                 <a:cs typeface="Pretendard"/>
               </a:rPr>
-              <a:t>: 채택 운영점에서 재현율 ≥ 95%·장당 오탐 ≤ 5건(AI Hub RT 테스트셋), mAP는 보조 지표. 문헌은 정제셋 mAP@0.5 약 93~97%(Lu 2025·MGDR-YOLO 2026), 강관 X-ray 세트는 99%(DSF-YOLO 2025)까지 보고하지만 데이터셋 간 제로샷 전이는 macro-F1 약 64%로 급락(WeldVGG, Sensors 2025) → </a:t>
+              <a:t>: 채택 운영점에서 검출률 ≥ 95%·장당 오탐 ≤ 5건(AI Hub RT 테스트셋), mAP는 보조 지표. 문헌은 정제셋 mAP@0.5 약 93~97%[6][7], 강관 X-ray 세트는 99%[7]까지 보고하지만 데이터셋 간 제로샷 전이는 macro-F1 약 64%로 급락[4] → </a:t>
             </a:r>
             <a:r>
               <a:rPr sz="1250" b="1" i="0">
@@ -10881,7 +10903,7 @@
                 <a:ea typeface="Pretendard"/>
                 <a:cs typeface="Pretendard"/>
               </a:rPr>
-              <a:t>출처: Mery et al., J Nondestruct Eval 34:42(2015) 본문·표 5 · RIAWELC GitHub README, Totino·Spagnolo·Perri ICMECE 2022/IJECER 2023 · AI Hub 71761(활용 신청 시 확인 자료·검색 요약 — 페이지 자동 조회 미검증)·이용정책 · WeldVGG, Sensors 25(19):6183(2025) · Heliyon 2024 e30590(ResNet50 정확도 98.75/90.3/75.8%) · Lu et al., J Nondestruct Eval 44:91(2025, 개선 YOLOv8, GDXray mAP@0.5 97.2%) · MGDR-YOLO, Sensors 2026 · DSF-YOLO, Sci Rep 2025 · SWRD, J Nondestruct Eval 2025 · ISO 14096-2, VIDAR NDT PRO 리셀러 가격(검색 요약 기준)</a:t>
+              <a:t>참고  [1] Mery 외, J Nondestruct Eval 34:42(2015)  ·  [2] RIAWELC GitHub README · Totino·Spagnolo·Perri 2022/2023  ·  [3] AI Hub 71761 활용 신청 확인 자료·이용정책†  ·  [4] WeldVGG, Sensors 25(19):6183(2025)  ·  [5] Palma-Ramírez 외, Heliyon 2024 e30590(정확도 98.75/90.3/75.8%)  ·  [6] Lu 외, J Nondestruct Eval 44:91(2025, GDXray mAP@0.5 97.2%)  ·  [7] MGDR-YOLO, Sensors 2026 · DSF-YOLO, Sci Rep 2025 · SWRD, J Nondestruct Eval 2025  ·  [8] ISO 14096-2 · VIDAR NDT PRO 리셀러 가격†  ·  † 검색 요약 기준</a:t>
             </a:r>
           </a:p>
         </p:txBody>
@@ -11471,7 +11493,7 @@
         <p:spPr>
           <a:xfrm>
             <a:off x="4800600" y="1371600"/>
-            <a:ext cx="6903720" cy="4389120"/>
+            <a:ext cx="6903720" cy="4160520"/>
           </a:xfrm>
           <a:prstGeom prst="roundRect">
             <a:avLst>
@@ -11572,7 +11594,7 @@
         <p:spPr>
           <a:xfrm>
             <a:off x="5120640" y="2240280"/>
-            <a:ext cx="6263640" cy="3383279"/>
+            <a:ext cx="6263640" cy="3154679"/>
           </a:xfrm>
           <a:prstGeom prst="rect">
             <a:avLst/>
@@ -11618,7 +11640,7 @@
                 <a:ea typeface="Pretendard"/>
                 <a:cs typeface="Pretendard"/>
               </a:rPr>
-              <a:t>문서·이력 검색 노동 제거</a:t>
+              <a:t>문서·서류 검색 노동 제거</a:t>
             </a:r>
             <a:r>
               <a:rPr sz="1320" b="0" i="0">
@@ -11629,7 +11651,7 @@
                 <a:ea typeface="Pretendard"/>
                 <a:cs typeface="Pretendard"/>
               </a:rPr>
-              <a:t> → 자격자가 판독에 집중. 인력 감소 국면(두산에너빌리티 2026, 가스신문 2025.09)에서 1인당 처리량 향상 — 앱이 기록하는 소요시간과 수기 기준선으로 실측</a:t>
+              <a:t> → 자격자가 판독에 집중. 인력이 줄어드는 국면[2][3]에서 1인당 처리량 향상 — 앱이 기록하는 소요시간과 수기 기준선으로 실측</a:t>
             </a:r>
           </a:p>
           <a:p>
@@ -11677,7 +11699,7 @@
                 <a:ea typeface="Pretendard"/>
                 <a:cs typeface="Pretendard"/>
               </a:rPr>
-              <a:t>: IACS UR W33 §8.2 일반 보고 항목 13개 중 7개(일자·부재·용접부·이음·두께·판정 기준·결과·판정자)를 이미 구조화 저장, 나머지와 RT 특정 12개 항목은 본선에서 필드 추가 → 선주·선급 요청 시 서류 수색을 조회로 대체</a:t>
+              <a:t>: 선급 규칙(IACS UR W33 §8)의 보고 항목(일반 13·RT 12)을 검사 컨텍스트 필드와 전용 입력 필드 25개로 모두 수용해 구조화 저장·PDF 기재(입력 커버리지 n/25 표시, W33 원문 항목명 병기). 조건 검색(블록·용접부·유형·합부·기간)과 CSV 반출은 요약 열 기준 → 선주·선급 요청 시 서류 수색을 조회로 대체</a:t>
             </a:r>
           </a:p>
           <a:p>
@@ -11714,7 +11736,7 @@
                 <a:ea typeface="Pretendard"/>
                 <a:cs typeface="Pretendard"/>
               </a:rPr>
-              <a:t> — 규칙이 바뀌기 전에 준비된 판정 엔진. 스캔 필름과 CR/DR 이미지가 같은 파이프라인이라 필름→디지털 과도기 양쪽에 적용</a:t>
+              <a:t>[1] — 규칙이 바뀌기 전에 준비된 판정 엔진. 필름 스캔과 디지털 사진이 같은 파이프라인이라 과도기 양쪽에 적용</a:t>
             </a:r>
           </a:p>
           <a:p>
@@ -11740,7 +11762,7 @@
                 <a:ea typeface="Pretendard"/>
                 <a:cs typeface="Pretendard"/>
               </a:rPr>
-              <a:t>도입 2경로: ① 검사업체의 생산성 도구 ② 조선소 QC의 리포트 표준화·아카이브 발주 — 어느 쪽도 클라우드 반출 없이 온프레미스</a:t>
+              <a:t>도입 2경로: ① 검사업체의 생산성 도구 ② 조선소 품질부서의 보고서 표준화·기록 발주 — 어느 쪽도 클라우드 반출 없이 사내 설치</a:t>
             </a:r>
           </a:p>
         </p:txBody>
@@ -11754,7 +11776,7 @@
         <p:spPr>
           <a:xfrm>
             <a:off x="11978640" y="1371600"/>
-            <a:ext cx="5696711" cy="4389120"/>
+            <a:ext cx="5696711" cy="4160520"/>
           </a:xfrm>
           <a:prstGeom prst="roundRect">
             <a:avLst>
@@ -11855,7 +11877,7 @@
         <p:spPr>
           <a:xfrm>
             <a:off x="12298680" y="2240280"/>
-            <a:ext cx="5056631" cy="3383279"/>
+            <a:ext cx="5056631" cy="3154679"/>
           </a:xfrm>
           <a:prstGeom prst="rect">
             <a:avLst/>
@@ -11890,7 +11912,7 @@
                 <a:ea typeface="Pretendard"/>
                 <a:cs typeface="Pretendard"/>
               </a:rPr>
-              <a:t>기준표는 데이터 주도 JSON — </a:t>
+              <a:t>기준표는 데이터(JSON) — </a:t>
             </a:r>
             <a:r>
               <a:rPr sz="1320" b="1" i="0">
@@ -11901,7 +11923,7 @@
                 <a:ea typeface="Pretendard"/>
                 <a:cs typeface="Pretendard"/>
               </a:rPr>
-              <a:t>판정식 3종(단일 치수·누적 길이·투영 면적률)</a:t>
+              <a:t>판정식 3종 구조 안에서는 수치 교체만으로 전환</a:t>
             </a:r>
             <a:r>
               <a:rPr sz="1320" b="0" i="0">
@@ -11912,7 +11934,7 @@
                 <a:ea typeface="Pretendard"/>
                 <a:cs typeface="Pretendard"/>
               </a:rPr>
-              <a:t> 구조 안에서는 수치 교체만으로 전환(룰 엔진 코드 무변경)</a:t>
+              <a:t>(규칙 엔진 코드 무변경), 규격 판본별 JSON을 화면에서 선택</a:t>
             </a:r>
           </a:p>
           <a:p>
@@ -11938,7 +11960,7 @@
                 <a:ea typeface="Pretendard"/>
                 <a:cs typeface="Pretendard"/>
               </a:rPr>
-              <a:t>디지털 RT(CR/DR) 이미지</a:t>
+              <a:t>디지털 RT 사진</a:t>
             </a:r>
             <a:r>
               <a:rPr sz="1320" b="0" i="0">
@@ -11949,7 +11971,7 @@
                 <a:ea typeface="Pretendard"/>
                 <a:cs typeface="Pretendard"/>
               </a:rPr>
-              <a:t>는 동일 파이프라인으로 즉시 적용 — IACS UR W34 적용 선박(2021.07 이후 계약)의 검사 흐름에 그대로 편입. KR도 2026.06 AI 기반 디지털 선급 협력에 착수(검색 요약 기준). UT 판독은 신호 기반이라 범위 밖</a:t>
+              <a:t>은 같은 파이프라인으로 즉시 적용 — IACS UR W34 적용 선박(2021.07 이후 계약)의 검사 흐름에 편입. KR도 2026.06 AI 기반 디지털 선급 협력에 착수[4]. 초음파(UT) 판독은 신호 기반이라 범위 밖</a:t>
             </a:r>
           </a:p>
           <a:p>
@@ -12023,7 +12045,7 @@
                 <a:ea typeface="Pretendard"/>
                 <a:cs typeface="Pretendard"/>
               </a:rPr>
-              <a:t>로드맵: 야드 파일럿, 재학습 파이프라인(라벨 검수 큐 포함), DNV-RP-0671(2023) 등 AI 보증 프레임워크 기준의 검증 문서화, 설치형 패키징</a:t>
+              <a:t>로드맵: 야드 파일럿, 재학습 파이프라인(라벨 검수 큐 포함), DNV-RP-0671(2023)[5] 등 AI 보증 프레임워크 기준의 검증 문서화, 설치형 패키징</a:t>
             </a:r>
           </a:p>
         </p:txBody>
@@ -12036,7 +12058,7 @@
         </p:nvSpPr>
         <p:spPr>
           <a:xfrm>
-            <a:off x="4800600" y="6181344"/>
+            <a:off x="4800600" y="5952744"/>
             <a:ext cx="146304" cy="146304"/>
           </a:xfrm>
           <a:prstGeom prst="ellipse">
@@ -12065,7 +12087,7 @@
         </p:nvSpPr>
         <p:spPr>
           <a:xfrm>
-            <a:off x="5047488" y="6080759"/>
+            <a:off x="5047488" y="5852159"/>
             <a:ext cx="12627864" cy="384048"/>
           </a:xfrm>
           <a:prstGeom prst="rect">
@@ -12106,8 +12128,8 @@
         </p:nvSpPr>
         <p:spPr>
           <a:xfrm>
-            <a:off x="4800600" y="6583679"/>
-            <a:ext cx="3026664" cy="2167128"/>
+            <a:off x="4800600" y="6355079"/>
+            <a:ext cx="3026664" cy="2212848"/>
           </a:xfrm>
           <a:prstGeom prst="roundRect">
             <a:avLst>
@@ -12137,7 +12159,7 @@
         </p:nvSpPr>
         <p:spPr>
           <a:xfrm>
-            <a:off x="5074920" y="6839712"/>
+            <a:off x="5074920" y="6611112"/>
             <a:ext cx="2478024" cy="274320"/>
           </a:xfrm>
           <a:prstGeom prst="rect">
@@ -12165,7 +12187,7 @@
                 <a:ea typeface="Pretendard"/>
                 <a:cs typeface="Pretendard"/>
               </a:rPr>
-              <a:t>효과① 리포트 작성 시간</a:t>
+              <a:t>효과① 보고서 작성 시간</a:t>
             </a:r>
           </a:p>
         </p:txBody>
@@ -12178,7 +12200,7 @@
         </p:nvSpPr>
         <p:spPr>
           <a:xfrm>
-            <a:off x="5074920" y="7187183"/>
+            <a:off x="5074920" y="6958583"/>
             <a:ext cx="2478024" cy="566928"/>
           </a:xfrm>
           <a:prstGeom prst="rect">
@@ -12219,8 +12241,8 @@
         </p:nvSpPr>
         <p:spPr>
           <a:xfrm>
-            <a:off x="5074920" y="7845551"/>
-            <a:ext cx="2478024" cy="795528"/>
+            <a:off x="5074920" y="7616951"/>
+            <a:ext cx="2478024" cy="841247"/>
           </a:xfrm>
           <a:prstGeom prst="rect">
             <a:avLst/>
@@ -12247,7 +12269,7 @@
                 <a:ea typeface="Pretendard"/>
                 <a:cs typeface="Pretendard"/>
               </a:rPr>
-              <a:t>앱이 이미지 로드→승인 소요시간을 자동 기록(구현 완료). 수기 기준선은 현직 판독원 확인 후 비교 — 미확정 수치는 기재하지 않음</a:t>
+              <a:t>앱이 사진 열기→승인 소요시간을 자동 기록(구현 완료). 수기 기준선은 현직 판독원 확인 후 비교 — 미확정 수치는 기재하지 않음</a:t>
             </a:r>
           </a:p>
         </p:txBody>
@@ -12260,8 +12282,8 @@
         </p:nvSpPr>
         <p:spPr>
           <a:xfrm>
-            <a:off x="8083296" y="6583679"/>
-            <a:ext cx="3026664" cy="2167128"/>
+            <a:off x="8083296" y="6355079"/>
+            <a:ext cx="3026664" cy="2212848"/>
           </a:xfrm>
           <a:prstGeom prst="roundRect">
             <a:avLst>
@@ -12291,7 +12313,7 @@
         </p:nvSpPr>
         <p:spPr>
           <a:xfrm>
-            <a:off x="8357616" y="6839712"/>
+            <a:off x="8357616" y="6611112"/>
             <a:ext cx="2478024" cy="274320"/>
           </a:xfrm>
           <a:prstGeom prst="rect">
@@ -12332,7 +12354,7 @@
         </p:nvSpPr>
         <p:spPr>
           <a:xfrm>
-            <a:off x="8357616" y="7187183"/>
+            <a:off x="8357616" y="6958583"/>
             <a:ext cx="2478024" cy="566928"/>
           </a:xfrm>
           <a:prstGeom prst="rect">
@@ -12373,8 +12395,8 @@
         </p:nvSpPr>
         <p:spPr>
           <a:xfrm>
-            <a:off x="8357616" y="7845551"/>
-            <a:ext cx="2478024" cy="795528"/>
+            <a:off x="8357616" y="7616951"/>
+            <a:ext cx="2478024" cy="841247"/>
           </a:xfrm>
           <a:prstGeom prst="rect">
             <a:avLst/>
@@ -12401,7 +12423,7 @@
                 <a:ea typeface="Pretendard"/>
                 <a:cs typeface="Pretendard"/>
               </a:rPr>
-              <a:t>블록·용접부·유형·합부·기간 조건 검색 + 자연어 검색·요약. 목표: 과거 이력 조회를 서류 수색에서 화면 조회로 — 시연에서 실측</a:t>
+              <a:t>블록·용접부·종류·합부·기간 조건 검색 + 말로 검색·요약. 목표: 과거 이력 조회를 서류 수색에서 화면 조회로 — 시연에서 실측</a:t>
             </a:r>
           </a:p>
         </p:txBody>
@@ -12414,8 +12436,8 @@
         </p:nvSpPr>
         <p:spPr>
           <a:xfrm>
-            <a:off x="11365992" y="6583679"/>
-            <a:ext cx="3026664" cy="2167128"/>
+            <a:off x="11365992" y="6355079"/>
+            <a:ext cx="3026664" cy="2212848"/>
           </a:xfrm>
           <a:prstGeom prst="roundRect">
             <a:avLst>
@@ -12445,7 +12467,7 @@
         </p:nvSpPr>
         <p:spPr>
           <a:xfrm>
-            <a:off x="11640312" y="6839712"/>
+            <a:off x="11640312" y="6611112"/>
             <a:ext cx="2478024" cy="274320"/>
           </a:xfrm>
           <a:prstGeom prst="rect">
@@ -12486,7 +12508,7 @@
         </p:nvSpPr>
         <p:spPr>
           <a:xfrm>
-            <a:off x="11640312" y="7187183"/>
+            <a:off x="11640312" y="6958583"/>
             <a:ext cx="2478024" cy="566928"/>
           </a:xfrm>
           <a:prstGeom prst="rect">
@@ -12514,7 +12536,7 @@
                 <a:ea typeface="Pretendard"/>
                 <a:cs typeface="Pretendard"/>
               </a:rPr>
-              <a:t>재현율 ≥ 95%</a:t>
+              <a:t>검출률 ≥ 95%</a:t>
             </a:r>
           </a:p>
         </p:txBody>
@@ -12527,8 +12549,8 @@
         </p:nvSpPr>
         <p:spPr>
           <a:xfrm>
-            <a:off x="11640312" y="7845551"/>
-            <a:ext cx="2478024" cy="795528"/>
+            <a:off x="11640312" y="7616951"/>
+            <a:ext cx="2478024" cy="841247"/>
           </a:xfrm>
           <a:prstGeom prst="rect">
             <a:avLst/>
@@ -12555,7 +12577,7 @@
                 <a:ea typeface="Pretendard"/>
                 <a:cs typeface="Pretendard"/>
               </a:rPr>
-              <a:t>채택 운영점의 재현율·장당 오탐을 함께 공개(AI Hub RT 테스트셋 + GDXray 교차). 현재 폴백 탐지기: 합성 필름 재현율 14/14, 장당 오탐 3.8</a:t>
+              <a:t>채택 운영점의 검출률·장당 오탐을 함께 공개(AI Hub RT 테스트셋 + GDXray 교차). 현재 폴백 탐지기: 합성 필름 14/14, 장당 오탐 3.8</a:t>
             </a:r>
           </a:p>
         </p:txBody>
@@ -12568,8 +12590,8 @@
         </p:nvSpPr>
         <p:spPr>
           <a:xfrm>
-            <a:off x="14648688" y="6583679"/>
-            <a:ext cx="3026664" cy="2167128"/>
+            <a:off x="14648688" y="6355079"/>
+            <a:ext cx="3026664" cy="2212848"/>
           </a:xfrm>
           <a:prstGeom prst="roundRect">
             <a:avLst>
@@ -12599,7 +12621,7 @@
         </p:nvSpPr>
         <p:spPr>
           <a:xfrm>
-            <a:off x="14923008" y="6839712"/>
+            <a:off x="14923008" y="6611112"/>
             <a:ext cx="2478024" cy="274320"/>
           </a:xfrm>
           <a:prstGeom prst="rect">
@@ -12640,7 +12662,7 @@
         </p:nvSpPr>
         <p:spPr>
           <a:xfrm>
-            <a:off x="14923008" y="7187183"/>
+            <a:off x="14923008" y="6958583"/>
             <a:ext cx="2478024" cy="566928"/>
           </a:xfrm>
           <a:prstGeom prst="rect">
@@ -12668,7 +12690,7 @@
                 <a:ea typeface="Pretendard"/>
                 <a:cs typeface="Pretendard"/>
               </a:rPr>
-              <a:t>테스트 195건</a:t>
+              <a:t>테스트 235건</a:t>
             </a:r>
           </a:p>
         </p:txBody>
@@ -12681,8 +12703,8 @@
         </p:nvSpPr>
         <p:spPr>
           <a:xfrm>
-            <a:off x="14923008" y="7845551"/>
-            <a:ext cx="2478024" cy="795528"/>
+            <a:off x="14923008" y="7616951"/>
+            <a:ext cx="2478024" cy="841247"/>
           </a:xfrm>
           <a:prstGeom prst="rect">
             <a:avLst/>
@@ -12709,7 +12731,7 @@
                 <a:ea typeface="Pretendard"/>
                 <a:cs typeface="Pretendard"/>
               </a:rPr>
-              <a:t>자동 테스트 195건 · 합성 필름 E2E 헤드리스 검증 · 판정 3종·PDF·DB·라벨 export 회귀 테스트. 운영 시 채택률·직접 추가(미탐) 건수 자동 집계</a:t>
+              <a:t>자동 테스트 235건 · 합성 필름 전 과정 자동 검증 · 판정 3종·PDF·DB·라벨 내보내기 회귀 테스트. 운영 시 채택률·직접 추가(미탐) 건수 자동 집계</a:t>
             </a:r>
           </a:p>
         </p:txBody>
@@ -12722,8 +12744,8 @@
         </p:nvSpPr>
         <p:spPr>
           <a:xfrm>
-            <a:off x="4800600" y="8887967"/>
-            <a:ext cx="12874752" cy="329184"/>
+            <a:off x="4800600" y="8686800"/>
+            <a:ext cx="12874752" cy="457200"/>
           </a:xfrm>
           <a:prstGeom prst="rect">
             <a:avLst/>
@@ -12738,11 +12760,11 @@
           <a:p>
             <a:pPr algn="l">
               <a:lnSpc>
-                <a:spcPct val="112000"/>
-              </a:lnSpc>
-            </a:pPr>
-            <a:r>
-              <a:rPr sz="1250" b="0" i="0">
+                <a:spcPct val="110000"/>
+              </a:lnSpc>
+            </a:pPr>
+            <a:r>
+              <a:rPr sz="1200" b="0" i="0">
                 <a:solidFill>
                   <a:srgbClr val="5B6B8C"/>
                 </a:solidFill>
@@ -12750,7 +12772,29 @@
                 <a:ea typeface="Pretendard"/>
                 <a:cs typeface="Pretendard"/>
               </a:rPr>
-              <a:t>판정 항목마다 허용 한계·근거 조항 ID가 자동 기재되어 리포트의 판정 근거 누락을 구조적으로 방지 — 현재는 데모 기준표, 선급 지침 확정 후 JSON 교체</a:t>
+              <a:t>판정 항목마다 허용 한계·근거 조항 번호와 </a:t>
+            </a:r>
+            <a:r>
+              <a:rPr sz="1200" b="1" i="0">
+                <a:solidFill>
+                  <a:srgbClr val="5B6B8C"/>
+                </a:solidFill>
+                <a:latin typeface="Pretendard"/>
+                <a:ea typeface="Pretendard"/>
+                <a:cs typeface="Pretendard"/>
+              </a:rPr>
+              <a:t>적용 기준표 이름·판본</a:t>
+            </a:r>
+            <a:r>
+              <a:rPr sz="1200" b="0" i="0">
+                <a:solidFill>
+                  <a:srgbClr val="5B6B8C"/>
+                </a:solidFill>
+                <a:latin typeface="Pretendard"/>
+                <a:ea typeface="Pretendard"/>
+                <a:cs typeface="Pretendard"/>
+              </a:rPr>
+              <a:t>이 판정표·PDF·기록에 자동 기재되고, 판본을 바꾸면 재판정이 강제된다 → 판정 근거 누락을 구조적으로 방지(현재는 데모 기준표, 선급 지침 확정 후 JSON 교체)</a:t>
             </a:r>
           </a:p>
         </p:txBody>
@@ -12791,7 +12835,7 @@
                 <a:ea typeface="Pretendard"/>
                 <a:cs typeface="Pretendard"/>
               </a:rPr>
-              <a:t>출처: IACS UR W33 Rev.2·W34 Rev.1(2026.07.15 승인, 2028.01.01 시행 — 100mm 해석 길이 지침) · UR W33 §8.2·8.5 보고 항목(자체 대조) · KR×Microsoft AI 협력 보도(2026.06, 검색 요약 기준) · 두산에너빌리티 2026 스마트공장·자동화산업전 발언(위키리크스한국, 검색 요약 기준) · 가스신문 2025.09.18(검색 요약 기준) · DNV-RP-0671(2023.09) · 앱 자체 측정(합성 필름) — 효과 지표는 측정 설계이며 확정 수치가 아님</a:t>
+              <a:t>참고  [1] IACS UR W33 Rev.2·W34 Rev.1(2026.07.15 승인, 2028.01.01 이후 건조계약분)  ·  [2] 두산에너빌리티 2026.03 전시 인터뷰(위키리크스한국)†  ·  [3] 가스신문 2025.09.18†  ·  [4] KR×Microsoft AI 협력 보도(2026.06)†  ·  [5] DNV-RP-0671(2023.09)  ·  효과 지표는 측정 설계이며 확정 수치 아님  ·  † 검색 요약 기준</a:t>
             </a:r>
           </a:p>
         </p:txBody>

--- a/rt-workbench/docs/2026_K조선해커톤_계획서_RT판독워크벤치.pptx
+++ b/rt-workbench/docs/2026_K조선해커톤_계획서_RT판독워크벤치.pptx
@@ -2423,12 +2423,12 @@
           </a:bodyPr>
           <a:lstStyle/>
           <a:p>
-            <a:pPr marL="201549" indent="-201549">
-              <a:lnSpc>
-                <a:spcPct val="116000"/>
+            <a:pPr marL="186944" indent="-186944">
+              <a:lnSpc>
+                <a:spcPct val="114000"/>
               </a:lnSpc>
               <a:spcAft>
-                <a:spcPts val="1000"/>
+                <a:spcPts val="700"/>
               </a:spcAft>
               <a:buClr>
                 <a:srgbClr val="4FD0F5"/>
@@ -2437,7 +2437,7 @@
               <a:buChar char="•"/>
             </a:pPr>
             <a:r>
-              <a:rPr sz="1380" b="0" i="0">
+              <a:rPr sz="1280" b="0" i="0">
                 <a:solidFill>
                   <a:srgbClr val="1F2A44"/>
                 </a:solidFill>
@@ -2448,7 +2448,7 @@
               <a:t>RT(방사선투과검사)는 용접부를 X선으로 찍어 속에 숨은 결함을 찾는 검사다. 국내 조선소는 2021년 기준 대부분 </a:t>
             </a:r>
             <a:r>
-              <a:rPr sz="1380" b="1" i="0">
+              <a:rPr sz="1280" b="1" i="0">
                 <a:solidFill>
                   <a:srgbClr val="1F2A44"/>
                 </a:solidFill>
@@ -2459,46 +2459,24 @@
               <a:t>필름</a:t>
             </a:r>
             <a:r>
-              <a:rPr sz="1380" b="0" i="0">
-                <a:solidFill>
-                  <a:srgbClr val="1F2A44"/>
-                </a:solidFill>
-                <a:latin typeface="Pretendard"/>
-                <a:ea typeface="Pretendard"/>
-                <a:cs typeface="Pretendard"/>
-              </a:rPr>
-              <a:t>으로 찍는다[1][2]. 한화오션이 2021.07 필름 없는 디지털 RT를 개발하고 5대 선급과 승인 체계 개발 MOU를 맺었지만[2], 이후 얼마나 바뀌었는지는 공개 자료로 확인되지 않는다 → </a:t>
-            </a:r>
-            <a:r>
-              <a:rPr sz="1380" b="1" i="0">
-                <a:solidFill>
-                  <a:srgbClr val="1F2A44"/>
-                </a:solidFill>
-                <a:latin typeface="Pretendard"/>
-                <a:ea typeface="Pretendard"/>
-                <a:cs typeface="Pretendard"/>
-              </a:rPr>
-              <a:t>필름과 디지털이 함께 쓰이는 과도기</a:t>
-            </a:r>
-            <a:r>
-              <a:rPr sz="1380" b="0" i="0">
-                <a:solidFill>
-                  <a:srgbClr val="1F2A44"/>
-                </a:solidFill>
-                <a:latin typeface="Pretendard"/>
-                <a:ea typeface="Pretendard"/>
-                <a:cs typeface="Pretendard"/>
-              </a:rPr>
-              <a:t>로 본다</a:t>
-            </a:r>
-          </a:p>
-          <a:p>
-            <a:pPr marL="201549" indent="-201549">
-              <a:lnSpc>
-                <a:spcPct val="116000"/>
+              <a:rPr sz="1280" b="0" i="0">
+                <a:solidFill>
+                  <a:srgbClr val="1F2A44"/>
+                </a:solidFill>
+                <a:latin typeface="Pretendard"/>
+                <a:ea typeface="Pretendard"/>
+                <a:cs typeface="Pretendard"/>
+              </a:rPr>
+              <a:t>으로 찍는다[1][2]</a:t>
+            </a:r>
+          </a:p>
+          <a:p>
+            <a:pPr marL="186944" indent="-186944">
+              <a:lnSpc>
+                <a:spcPct val="114000"/>
               </a:lnSpc>
               <a:spcAft>
-                <a:spcPts val="1000"/>
+                <a:spcPts val="700"/>
               </a:spcAft>
               <a:buClr>
                 <a:srgbClr val="4FD0F5"/>
@@ -2507,68 +2485,46 @@
               <a:buChar char="•"/>
             </a:pPr>
             <a:r>
-              <a:rPr sz="1380" b="0" i="0">
-                <a:solidFill>
-                  <a:srgbClr val="1F2A44"/>
-                </a:solidFill>
-                <a:latin typeface="Pretendard"/>
-                <a:ea typeface="Pretendard"/>
-                <a:cs typeface="Pretendard"/>
-              </a:rPr>
-              <a:t>선급(배의 안전 기준을 정하고 검사하는 기관: KR·DNV·ABS 등)의 국제 협회 IACS는 2021.07부터 디지털 RT를 규칙에 넣었고[3], 2026.07.15 승인한 개정판(2028.01 이후 계약 선박)은 </a:t>
-            </a:r>
-            <a:r>
-              <a:rPr sz="1380" b="1" i="0">
-                <a:solidFill>
-                  <a:srgbClr val="1F2A44"/>
-                </a:solidFill>
-                <a:latin typeface="Pretendard"/>
-                <a:ea typeface="Pretendard"/>
-                <a:cs typeface="Pretendard"/>
-              </a:rPr>
-              <a:t>사진 전체를 100mm 구간 단위로 판독</a:t>
-            </a:r>
-            <a:r>
-              <a:rPr sz="1380" b="0" i="0">
-                <a:solidFill>
-                  <a:srgbClr val="1F2A44"/>
-                </a:solidFill>
-                <a:latin typeface="Pretendard"/>
-                <a:ea typeface="Pretendard"/>
-                <a:cs typeface="Pretendard"/>
-              </a:rPr>
-              <a:t>하도록 정했다[4]. 찍는 방법이 바뀌어도 </a:t>
-            </a:r>
-            <a:r>
-              <a:rPr sz="1380" b="1" i="0">
-                <a:solidFill>
-                  <a:srgbClr val="1F2A44"/>
-                </a:solidFill>
-                <a:latin typeface="Pretendard"/>
-                <a:ea typeface="Pretendard"/>
-                <a:cs typeface="Pretendard"/>
-              </a:rPr>
-              <a:t>판독·판정·기록은 여전히 사람의 일</a:t>
-            </a:r>
-            <a:r>
-              <a:rPr sz="1380" b="0" i="0">
-                <a:solidFill>
-                  <a:srgbClr val="1F2A44"/>
-                </a:solidFill>
-                <a:latin typeface="Pretendard"/>
-                <a:ea typeface="Pretendard"/>
-                <a:cs typeface="Pretendard"/>
-              </a:rPr>
-              <a:t>이다</a:t>
-            </a:r>
-          </a:p>
-          <a:p>
-            <a:pPr marL="201549" indent="-201549">
-              <a:lnSpc>
-                <a:spcPct val="116000"/>
+              <a:rPr sz="1280" b="0" i="0">
+                <a:solidFill>
+                  <a:srgbClr val="1F2A44"/>
+                </a:solidFill>
+                <a:latin typeface="Pretendard"/>
+                <a:ea typeface="Pretendard"/>
+                <a:cs typeface="Pretendard"/>
+              </a:rPr>
+              <a:t>한화오션(당시 대우조선해양)이 2021.07 필름 없는 디지털 RT를 개발하고 5대 선급(배의 안전 기준을 정하고 검사하는 기관: ABS·BV·DNV·KR·LR)과 승인 체계 개발 협약을 맺었지만[2], 그 뒤 얼마나 바뀌었는지는 공개 자료로 확인되지 않는다 → </a:t>
+            </a:r>
+            <a:r>
+              <a:rPr sz="1280" b="1" i="0">
+                <a:solidFill>
+                  <a:srgbClr val="1F2A44"/>
+                </a:solidFill>
+                <a:latin typeface="Pretendard"/>
+                <a:ea typeface="Pretendard"/>
+                <a:cs typeface="Pretendard"/>
+              </a:rPr>
+              <a:t>필름과 디지털이 함께 쓰이는 과도기</a:t>
+            </a:r>
+            <a:r>
+              <a:rPr sz="1280" b="0" i="0">
+                <a:solidFill>
+                  <a:srgbClr val="1F2A44"/>
+                </a:solidFill>
+                <a:latin typeface="Pretendard"/>
+                <a:ea typeface="Pretendard"/>
+                <a:cs typeface="Pretendard"/>
+              </a:rPr>
+              <a:t>로 본다</a:t>
+            </a:r>
+          </a:p>
+          <a:p>
+            <a:pPr marL="186944" indent="-186944">
+              <a:lnSpc>
+                <a:spcPct val="114000"/>
               </a:lnSpc>
               <a:spcAft>
-                <a:spcPts val="1000"/>
+                <a:spcPts val="700"/>
               </a:spcAft>
               <a:buClr>
                 <a:srgbClr val="4FD0F5"/>
@@ -2577,68 +2533,57 @@
               <a:buChar char="•"/>
             </a:pPr>
             <a:r>
-              <a:rPr sz="1380" b="0" i="0">
-                <a:solidFill>
-                  <a:srgbClr val="1F2A44"/>
-                </a:solidFill>
-                <a:latin typeface="Pretendard"/>
-                <a:ea typeface="Pretendard"/>
-                <a:cs typeface="Pretendard"/>
-              </a:rPr>
-              <a:t>판독원(자격을 가진 사람)의 하루: 사진에서 결함을 찾고 → 크기를 재서 기준과 대조하고 → 합격/불합격을 정하고 → </a:t>
-            </a:r>
-            <a:r>
-              <a:rPr sz="1380" b="1" i="0">
-                <a:solidFill>
-                  <a:srgbClr val="1F2A44"/>
-                </a:solidFill>
-                <a:latin typeface="Pretendard"/>
-                <a:ea typeface="Pretendard"/>
-                <a:cs typeface="Pretendard"/>
-              </a:rPr>
-              <a:t>보고서를 손으로 쓴다</a:t>
-            </a:r>
-            <a:r>
-              <a:rPr sz="1380" b="0" i="0">
-                <a:solidFill>
-                  <a:srgbClr val="1F2A44"/>
-                </a:solidFill>
-                <a:latin typeface="Pretendard"/>
-                <a:ea typeface="Pretendard"/>
-                <a:cs typeface="Pretendard"/>
-              </a:rPr>
-              <a:t>(선급 규칙 필수 항목 25개[3]) → 보관 → 선주·선급이 물으면 </a:t>
-            </a:r>
-            <a:r>
-              <a:rPr sz="1380" b="1" i="0">
-                <a:solidFill>
-                  <a:srgbClr val="1F2A44"/>
-                </a:solidFill>
-                <a:latin typeface="Pretendard"/>
-                <a:ea typeface="Pretendard"/>
-                <a:cs typeface="Pretendard"/>
-              </a:rPr>
-              <a:t>서류 더미를 뒤진다</a:t>
-            </a:r>
-            <a:r>
-              <a:rPr sz="1380" b="0" i="0">
-                <a:solidFill>
-                  <a:srgbClr val="1F2A44"/>
-                </a:solidFill>
-                <a:latin typeface="Pretendard"/>
-                <a:ea typeface="Pretendard"/>
-                <a:cs typeface="Pretendard"/>
-              </a:rPr>
-              <a:t>. 불합격이 나오면 같은 용접선을 더 찍어 다시 판독한다[3]</a:t>
-            </a:r>
-          </a:p>
-          <a:p>
-            <a:pPr marL="201549" indent="-201549">
-              <a:lnSpc>
-                <a:spcPct val="116000"/>
+              <a:rPr sz="1280" b="0" i="0">
+                <a:solidFill>
+                  <a:srgbClr val="1F2A44"/>
+                </a:solidFill>
+                <a:latin typeface="Pretendard"/>
+                <a:ea typeface="Pretendard"/>
+                <a:cs typeface="Pretendard"/>
+              </a:rPr>
+              <a:t>선급의 국제 협회 IACS는 2021.07.01 이후 건조계약 선박부터 디지털 RT를 규칙에 넣었다[3]. 2026.07.15 승인한 개정 규칙(2028.01.01 이후 건조계약 선박)은 </a:t>
+            </a:r>
+            <a:r>
+              <a:rPr sz="1280" b="1" i="0">
+                <a:solidFill>
+                  <a:srgbClr val="1F2A44"/>
+                </a:solidFill>
+                <a:latin typeface="Pretendard"/>
+                <a:ea typeface="Pretendard"/>
+                <a:cs typeface="Pretendard"/>
+              </a:rPr>
+              <a:t>사진 전체를 100mm 구간 단위로 판독</a:t>
+            </a:r>
+            <a:r>
+              <a:rPr sz="1280" b="0" i="0">
+                <a:solidFill>
+                  <a:srgbClr val="1F2A44"/>
+                </a:solidFill>
+                <a:latin typeface="Pretendard"/>
+                <a:ea typeface="Pretendard"/>
+                <a:cs typeface="Pretendard"/>
+              </a:rPr>
+              <a:t>하도록 지침으로 명시했다[5] — 찍는 방법이 바뀌어도 </a:t>
+            </a:r>
+            <a:r>
+              <a:rPr sz="1280" b="1" i="0">
+                <a:solidFill>
+                  <a:srgbClr val="1F2A44"/>
+                </a:solidFill>
+                <a:latin typeface="Pretendard"/>
+                <a:ea typeface="Pretendard"/>
+                <a:cs typeface="Pretendard"/>
+              </a:rPr>
+              <a:t>판독·판정·기록은 사람의 일</a:t>
+            </a:r>
+          </a:p>
+          <a:p>
+            <a:pPr marL="186944" indent="-186944">
+              <a:lnSpc>
+                <a:spcPct val="114000"/>
               </a:lnSpc>
               <a:spcAft>
-                <a:spcPts val="1000"/>
+                <a:spcPts val="700"/>
               </a:spcAft>
               <a:buClr>
                 <a:srgbClr val="4FD0F5"/>
@@ -2647,46 +2592,57 @@
               <a:buChar char="•"/>
             </a:pPr>
             <a:r>
-              <a:rPr sz="1380" b="0" i="0">
-                <a:solidFill>
-                  <a:srgbClr val="1F2A44"/>
-                </a:solidFill>
-                <a:latin typeface="Pretendard"/>
-                <a:ea typeface="Pretendard"/>
-                <a:cs typeface="Pretendard"/>
-              </a:rPr>
-              <a:t>조선 3사의 AI 투자는 용접 ‘작업’과 카메라 검사에 몰려 있다(한화오션×NC AI 2026.06[5], HD현대중공업 AI 조선소 2026.06[6]). </a:t>
-            </a:r>
-            <a:r>
-              <a:rPr sz="1380" b="1" i="0">
-                <a:solidFill>
-                  <a:srgbClr val="1F2A44"/>
-                </a:solidFill>
-                <a:latin typeface="Pretendard"/>
-                <a:ea typeface="Pretendard"/>
-                <a:cs typeface="Pretendard"/>
-              </a:rPr>
-              <a:t>판독 이후 단계(판정 근거·보고서·이력)에 대한 공개 투자 사례는 찾지 못했다</a:t>
-            </a:r>
-            <a:r>
-              <a:rPr sz="1380" b="0" i="0">
-                <a:solidFill>
-                  <a:srgbClr val="1F2A44"/>
-                </a:solidFill>
-                <a:latin typeface="Pretendard"/>
-                <a:ea typeface="Pretendard"/>
-                <a:cs typeface="Pretendard"/>
-              </a:rPr>
-              <a:t>(2026.09 검색 기준)</a:t>
-            </a:r>
-          </a:p>
-          <a:p>
-            <a:pPr marL="201549" indent="-201549">
-              <a:lnSpc>
-                <a:spcPct val="116000"/>
+              <a:rPr sz="1280" b="0" i="0">
+                <a:solidFill>
+                  <a:srgbClr val="1F2A44"/>
+                </a:solidFill>
+                <a:latin typeface="Pretendard"/>
+                <a:ea typeface="Pretendard"/>
+                <a:cs typeface="Pretendard"/>
+              </a:rPr>
+              <a:t>판독원(RT 사진을 판독할 자격을 가진 검사자)의 하루: 결함을 찾고 → 크기를 재서 기준과 대조하고 → 합격·불합격을 정하고 → </a:t>
+            </a:r>
+            <a:r>
+              <a:rPr sz="1280" b="1" i="0">
+                <a:solidFill>
+                  <a:srgbClr val="1F2A44"/>
+                </a:solidFill>
+                <a:latin typeface="Pretendard"/>
+                <a:ea typeface="Pretendard"/>
+                <a:cs typeface="Pretendard"/>
+              </a:rPr>
+              <a:t>보고서를 손으로 쓴다</a:t>
+            </a:r>
+            <a:r>
+              <a:rPr sz="1280" b="0" i="0">
+                <a:solidFill>
+                  <a:srgbClr val="1F2A44"/>
+                </a:solidFill>
+                <a:latin typeface="Pretendard"/>
+                <a:ea typeface="Pretendard"/>
+                <a:cs typeface="Pretendard"/>
+              </a:rPr>
+              <a:t>(선급 규칙 필수 항목 25개[4]) → 보관 → 선주·선급이 물으면 </a:t>
+            </a:r>
+            <a:r>
+              <a:rPr sz="1280" b="1" i="0">
+                <a:solidFill>
+                  <a:srgbClr val="1F2A44"/>
+                </a:solidFill>
+                <a:latin typeface="Pretendard"/>
+                <a:ea typeface="Pretendard"/>
+                <a:cs typeface="Pretendard"/>
+              </a:rPr>
+              <a:t>서류 더미를 뒤진다</a:t>
+            </a:r>
+          </a:p>
+          <a:p>
+            <a:pPr marL="186944" indent="-186944">
+              <a:lnSpc>
+                <a:spcPct val="114000"/>
               </a:lnSpc>
               <a:spcAft>
-                <a:spcPts val="1000"/>
+                <a:spcPts val="700"/>
               </a:spcAft>
               <a:buClr>
                 <a:srgbClr val="4FD0F5"/>
@@ -2695,46 +2651,24 @@
               <a:buChar char="•"/>
             </a:pPr>
             <a:r>
-              <a:rPr sz="1380" b="0" i="0">
-                <a:solidFill>
-                  <a:srgbClr val="1F2A44"/>
-                </a:solidFill>
-                <a:latin typeface="Pretendard"/>
-                <a:ea typeface="Pretendard"/>
-                <a:cs typeface="Pretendard"/>
-              </a:rPr>
-              <a:t>두산에너빌리티 D-Vision(RT 사진 AI 판독)은 2019년 말 자사 시범 → 2024.03 출시 → 2024.11 에너지공단 MOU[7] — </a:t>
-            </a:r>
-            <a:r>
-              <a:rPr sz="1380" b="1" i="0">
-                <a:solidFill>
-                  <a:srgbClr val="1F2A44"/>
-                </a:solidFill>
-                <a:latin typeface="Pretendard"/>
-                <a:ea typeface="Pretendard"/>
-                <a:cs typeface="Pretendard"/>
-              </a:rPr>
-              <a:t>자사 적용·외부 확산 시도 단계</a:t>
-            </a:r>
-            <a:r>
-              <a:rPr sz="1380" b="0" i="0">
-                <a:solidFill>
-                  <a:srgbClr val="1F2A44"/>
-                </a:solidFill>
-                <a:latin typeface="Pretendard"/>
-                <a:ea typeface="Pretendard"/>
-                <a:cs typeface="Pretendard"/>
-              </a:rPr>
-              <a:t>이며 외부 유료 고객은 공개 확인되지 않는다 → 문제는 실재하지만 시장의 지불 의사는 아직 미검증</a:t>
-            </a:r>
-          </a:p>
-          <a:p>
-            <a:pPr marL="201549" indent="-201549">
-              <a:lnSpc>
-                <a:spcPct val="116000"/>
+              <a:rPr sz="1280" b="0" i="0">
+                <a:solidFill>
+                  <a:srgbClr val="1F2A44"/>
+                </a:solidFill>
+                <a:latin typeface="Pretendard"/>
+                <a:ea typeface="Pretendard"/>
+                <a:cs typeface="Pretendard"/>
+              </a:rPr>
+              <a:t>불합격이 나오면 같은 용접선의 다른 구간을 더 찍어 다시 판독해야 한다[4] — 불합격 1건이 촬영·판독·보고서로 다시 이어진다</a:t>
+            </a:r>
+          </a:p>
+          <a:p>
+            <a:pPr marL="186944" indent="-186944">
+              <a:lnSpc>
+                <a:spcPct val="114000"/>
               </a:lnSpc>
               <a:spcAft>
-                <a:spcPts val="1000"/>
+                <a:spcPts val="700"/>
               </a:spcAft>
               <a:buClr>
                 <a:srgbClr val="4FD0F5"/>
@@ -2743,18 +2677,114 @@
               <a:buChar char="•"/>
             </a:pPr>
             <a:r>
-              <a:rPr sz="1380" b="0" i="0">
-                <a:solidFill>
-                  <a:srgbClr val="1F2A44"/>
-                </a:solidFill>
-                <a:latin typeface="Pretendard"/>
-                <a:ea typeface="Pretendard"/>
-                <a:cs typeface="Pretendard"/>
-              </a:rPr>
-              <a:t>판독 인력은 고령화로 줄고 있고(두산에너빌리티 2024·2026 인터뷰[7]), 최저가 입찰로 숙련자 확보가 어렵다[8]. 국내 비파괴검사 물량의 </a:t>
-            </a:r>
-            <a:r>
-              <a:rPr sz="1380" b="1" i="0">
+              <a:rPr sz="1280" b="0" i="0">
+                <a:solidFill>
+                  <a:srgbClr val="1F2A44"/>
+                </a:solidFill>
+                <a:latin typeface="Pretendard"/>
+                <a:ea typeface="Pretendard"/>
+                <a:cs typeface="Pretendard"/>
+              </a:rPr>
+              <a:t>조선 3사(HD현대중공업·삼성중공업·한화오션)의 2024~2026 AI 발표는 용접 ‘작업’과 카메라 검사에 몰려 있다[6][7]. </a:t>
+            </a:r>
+            <a:r>
+              <a:rPr sz="1280" b="1" i="0">
+                <a:solidFill>
+                  <a:srgbClr val="1F2A44"/>
+                </a:solidFill>
+                <a:latin typeface="Pretendard"/>
+                <a:ea typeface="Pretendard"/>
+                <a:cs typeface="Pretendard"/>
+              </a:rPr>
+              <a:t>판독 이후 단계(판정 근거·보고서·기록)에 대한 투자 사례는 찾지 못했다</a:t>
+            </a:r>
+            <a:r>
+              <a:rPr sz="1280" b="0" i="0">
+                <a:solidFill>
+                  <a:srgbClr val="1F2A44"/>
+                </a:solidFill>
+                <a:latin typeface="Pretendard"/>
+                <a:ea typeface="Pretendard"/>
+                <a:cs typeface="Pretendard"/>
+              </a:rPr>
+              <a:t>(2026.09 검색 기준)</a:t>
+            </a:r>
+          </a:p>
+          <a:p>
+            <a:pPr marL="186944" indent="-186944">
+              <a:lnSpc>
+                <a:spcPct val="114000"/>
+              </a:lnSpc>
+              <a:spcAft>
+                <a:spcPts val="700"/>
+              </a:spcAft>
+              <a:buClr>
+                <a:srgbClr val="4FD0F5"/>
+              </a:buClr>
+              <a:buFont typeface="Arial"/>
+              <a:buChar char="•"/>
+            </a:pPr>
+            <a:r>
+              <a:rPr sz="1280" b="0" i="0">
+                <a:solidFill>
+                  <a:srgbClr val="1F2A44"/>
+                </a:solidFill>
+                <a:latin typeface="Pretendard"/>
+                <a:ea typeface="Pretendard"/>
+                <a:cs typeface="Pretendard"/>
+              </a:rPr>
+              <a:t>두산에너빌리티 D-Vision(RT 사진 AI 판독)은 2019년 말 자사 시범, 2024.03 출시, 2024.11 에너지공단 협약으로 이어졌다[8] — </a:t>
+            </a:r>
+            <a:r>
+              <a:rPr sz="1280" b="1" i="0">
+                <a:solidFill>
+                  <a:srgbClr val="1F2A44"/>
+                </a:solidFill>
+                <a:latin typeface="Pretendard"/>
+                <a:ea typeface="Pretendard"/>
+                <a:cs typeface="Pretendard"/>
+              </a:rPr>
+              <a:t>자사 적용·외부 확산 시도 단계</a:t>
+            </a:r>
+            <a:r>
+              <a:rPr sz="1280" b="0" i="0">
+                <a:solidFill>
+                  <a:srgbClr val="1F2A44"/>
+                </a:solidFill>
+                <a:latin typeface="Pretendard"/>
+                <a:ea typeface="Pretendard"/>
+                <a:cs typeface="Pretendard"/>
+              </a:rPr>
+              <a:t>이며 외부 유료 고객은 공개 확인되지 않는다. 문제는 실재하나 지불 의사는 미검증</a:t>
+            </a:r>
+          </a:p>
+          <a:p>
+            <a:pPr marL="186944" indent="-186944">
+              <a:lnSpc>
+                <a:spcPct val="114000"/>
+              </a:lnSpc>
+              <a:spcAft>
+                <a:spcPts val="700"/>
+              </a:spcAft>
+              <a:buClr>
+                <a:srgbClr val="4FD0F5"/>
+              </a:buClr>
+              <a:buFont typeface="Arial"/>
+              <a:buChar char="•"/>
+            </a:pPr>
+            <a:r>
+              <a:rPr sz="1280" b="0" i="0">
+                <a:solidFill>
+                  <a:srgbClr val="1F2A44"/>
+                </a:solidFill>
+                <a:latin typeface="Pretendard"/>
+                <a:ea typeface="Pretendard"/>
+                <a:cs typeface="Pretendard"/>
+              </a:rPr>
+              <a:t>판독 인력은 고령화로 줄고 있고[8], 최저가 입찰로 숙련자 확보가 어렵다[9]. 국내 비파괴검사(부수지 않고 속을 검사하는 방법의 총칭) 물량의 </a:t>
+            </a:r>
+            <a:r>
+              <a:rPr sz="1280" b="1" i="0">
                 <a:solidFill>
                   <a:srgbClr val="1F2A44"/>
                 </a:solidFill>
@@ -2765,15 +2795,15 @@
               <a:t>약 80%가 방사선 방식 용접부 검사</a:t>
             </a:r>
             <a:r>
-              <a:rPr sz="1380" b="0" i="0">
-                <a:solidFill>
-                  <a:srgbClr val="1F2A44"/>
-                </a:solidFill>
-                <a:latin typeface="Pretendard"/>
-                <a:ea typeface="Pretendard"/>
-                <a:cs typeface="Pretendard"/>
-              </a:rPr>
-              <a:t>[9] → 판독 부담이 RT에 집중된다</a:t>
+              <a:rPr sz="1280" b="0" i="0">
+                <a:solidFill>
+                  <a:srgbClr val="1F2A44"/>
+                </a:solidFill>
+                <a:latin typeface="Pretendard"/>
+                <a:ea typeface="Pretendard"/>
+                <a:cs typeface="Pretendard"/>
+              </a:rPr>
+              <a:t>[10] → 부담이 RT에 집중된다</a:t>
             </a:r>
           </a:p>
         </p:txBody>
@@ -2901,12 +2931,12 @@
           </a:bodyPr>
           <a:lstStyle/>
           <a:p>
-            <a:pPr marL="189865" indent="-189865">
+            <a:pPr marL="192785" indent="-192785">
               <a:lnSpc>
                 <a:spcPct val="114000"/>
               </a:lnSpc>
               <a:spcAft>
-                <a:spcPts val="600"/>
+                <a:spcPts val="700"/>
               </a:spcAft>
               <a:buClr>
                 <a:srgbClr val="4FD0F5"/>
@@ -2915,7 +2945,7 @@
               <a:buChar char="•"/>
             </a:pPr>
             <a:r>
-              <a:rPr sz="1300" b="1" i="0">
+              <a:rPr sz="1320" b="1" i="0">
                 <a:solidFill>
                   <a:srgbClr val="1F2A44"/>
                 </a:solidFill>
@@ -2926,24 +2956,24 @@
               <a:t>판독원의 하루에서 문서 작업과 서류 검색을 없앤다</a:t>
             </a:r>
             <a:r>
-              <a:rPr sz="1300" b="0" i="0">
-                <a:solidFill>
-                  <a:srgbClr val="1F2A44"/>
-                </a:solidFill>
-                <a:latin typeface="Pretendard"/>
-                <a:ea typeface="Pretendard"/>
-                <a:cs typeface="Pretendard"/>
-              </a:rPr>
-              <a:t> — 합격/불합격은 자격자(ISO 9712 Level 2 이상[3])가 정하고, 서류는 AI가 만든다</a:t>
-            </a:r>
-          </a:p>
-          <a:p>
-            <a:pPr marL="189865" indent="-189865">
+              <a:rPr sz="1320" b="0" i="0">
+                <a:solidFill>
+                  <a:srgbClr val="1F2A44"/>
+                </a:solidFill>
+                <a:latin typeface="Pretendard"/>
+                <a:ea typeface="Pretendard"/>
+                <a:cs typeface="Pretendard"/>
+              </a:rPr>
+              <a:t> — 합격·불합격은 자격자(국제 자격 ISO 9712의 Level 2 이상, 결과 해석·판정이 허용되는 등급[4])가 정하고, 서류는 AI가 만든다</a:t>
+            </a:r>
+          </a:p>
+          <a:p>
+            <a:pPr marL="192785" indent="-192785">
               <a:lnSpc>
                 <a:spcPct val="114000"/>
               </a:lnSpc>
               <a:spcAft>
-                <a:spcPts val="600"/>
+                <a:spcPts val="700"/>
               </a:spcAft>
               <a:buClr>
                 <a:srgbClr val="4FD0F5"/>
@@ -2952,18 +2982,18 @@
               <a:buChar char="•"/>
             </a:pPr>
             <a:r>
-              <a:rPr sz="1300" b="0" i="0">
-                <a:solidFill>
-                  <a:srgbClr val="1F2A44"/>
-                </a:solidFill>
-                <a:latin typeface="Pretendard"/>
-                <a:ea typeface="Pretendard"/>
-                <a:cs typeface="Pretendard"/>
-              </a:rPr>
-              <a:t>목표 화면: 사진 열기 → AI가 놓칠 만한 곳 표시 → 클릭 두 번으로 크기 측정 → 규칙 엔진이 100mm 구간 기준으로 판정 → 소견서 초안 → 승인·PDF → 검색 가능한 기록 보관, </a:t>
-            </a:r>
-            <a:r>
-              <a:rPr sz="1300" b="1" i="0">
+              <a:rPr sz="1320" b="0" i="0">
+                <a:solidFill>
+                  <a:srgbClr val="1F2A44"/>
+                </a:solidFill>
+                <a:latin typeface="Pretendard"/>
+                <a:ea typeface="Pretendard"/>
+                <a:cs typeface="Pretendard"/>
+              </a:rPr>
+              <a:t>목표 화면: 사진 열기 → 사람이 놓칠 만한 곳을 AI가 표시 → 클릭 두 번으로 크기 측정 → 규칙 엔진(기준표의 허용치와 대조해 합격·불합격을 내는 프로그램, AI 아님)이 판정 → 소견서(판독 결과 보고서) 초안 → 승인·PDF → 검색 가능한 기록까지 </a:t>
+            </a:r>
+            <a:r>
+              <a:rPr sz="1320" b="1" i="0">
                 <a:solidFill>
                   <a:srgbClr val="1F2A44"/>
                 </a:solidFill>
@@ -2975,12 +3005,12 @@
             </a:r>
           </a:p>
           <a:p>
-            <a:pPr marL="189865" indent="-189865">
+            <a:pPr marL="192785" indent="-192785">
               <a:lnSpc>
                 <a:spcPct val="114000"/>
               </a:lnSpc>
               <a:spcAft>
-                <a:spcPts val="600"/>
+                <a:spcPts val="700"/>
               </a:spcAft>
               <a:buClr>
                 <a:srgbClr val="4FD0F5"/>
@@ -2989,7 +3019,7 @@
               <a:buChar char="•"/>
             </a:pPr>
             <a:r>
-              <a:rPr sz="1300" b="0" i="0">
+              <a:rPr sz="1320" b="0" i="0">
                 <a:solidFill>
                   <a:srgbClr val="1F2A44"/>
                 </a:solidFill>
@@ -3000,7 +3030,7 @@
               <a:t>입력은 </a:t>
             </a:r>
             <a:r>
-              <a:rPr sz="1300" b="1" i="0">
+              <a:rPr sz="1320" b="1" i="0">
                 <a:solidFill>
                   <a:srgbClr val="1F2A44"/>
                 </a:solidFill>
@@ -3011,18 +3041,18 @@
               <a:t>스캔한 필름 사진 또는 디지털 RT 사진</a:t>
             </a:r>
             <a:r>
-              <a:rPr sz="1300" b="0" i="0">
-                <a:solidFill>
-                  <a:srgbClr val="1F2A44"/>
-                </a:solidFill>
-                <a:latin typeface="Pretendard"/>
-                <a:ea typeface="Pretendard"/>
-                <a:cs typeface="Pretendard"/>
-              </a:rPr>
-              <a:t> — 판독원에게 새 장비나 새 촬영 절차를 요구하지 않는다. 단, 필름을 스캔하는 장비(ISO 14096-2 등급 디지타이저 또는 스캔 서비스)는 </a:t>
-            </a:r>
-            <a:r>
-              <a:rPr sz="1300" b="1" i="0">
+              <a:rPr sz="1320" b="0" i="0">
+                <a:solidFill>
+                  <a:srgbClr val="1F2A44"/>
+                </a:solidFill>
+                <a:latin typeface="Pretendard"/>
+                <a:ea typeface="Pretendard"/>
+                <a:cs typeface="Pretendard"/>
+              </a:rPr>
+              <a:t> — 판독원에게 새 장비나 새 촬영 절차를 요구하지 않는다. 단, 필름을 스캔하는 장비(스캔 화질 규격 ISO 14096-2 등급의 디지타이저 또는 스캔 서비스)는 </a:t>
+            </a:r>
+            <a:r>
+              <a:rPr sz="1320" b="1" i="0">
                 <a:solidFill>
                   <a:srgbClr val="1F2A44"/>
                 </a:solidFill>
@@ -3195,7 +3225,7 @@
                 <a:ea typeface="Pretendard"/>
                 <a:cs typeface="Pretendard"/>
               </a:rPr>
-              <a:t>합격/불합격 = 규칙 엔진 + 판독원, LLM = 글쓰기·검색 보조</a:t>
+              <a:t>합격·불합격 = 규칙 엔진 + 판독원, LLM = 글쓰기·검색 보조</a:t>
             </a:r>
           </a:p>
         </p:txBody>
@@ -3319,7 +3349,7 @@
                 <a:ea typeface="Pretendard"/>
                 <a:cs typeface="Pretendard"/>
               </a:rPr>
-              <a:t>스캔 필름이든 디지털 사진이든 같은 파이프라인</a:t>
+              <a:t>스캔 필름이든 디지털 사진이든 같은 처리 흐름</a:t>
             </a:r>
           </a:p>
         </p:txBody>
@@ -3596,7 +3626,7 @@
                 <a:ea typeface="Pretendard"/>
                 <a:cs typeface="Pretendard"/>
               </a:rPr>
-              <a:t>선체 블록 용접부 RT 사진의 판독·판정·보고서·이력 관리 — 생산 공정 뒤쪽의 용접 품질 확인 업무</a:t>
+              <a:t>선체 블록(배를 나눠 만든 뒤 붙이는 큰 구조물) 용접부 RT 사진의 판독·판정·보고서·기록 관리 — 생산 공정 뒤쪽의 용접 품질 확인 업무</a:t>
             </a:r>
           </a:p>
         </p:txBody>
@@ -3637,7 +3667,7 @@
                 <a:ea typeface="Pretendard"/>
                 <a:cs typeface="Pretendard"/>
               </a:rPr>
-              <a:t>참고  [1] 황훈규 외, 한국정보통신학회논문지 25(2), 2021.02  ·  [2] 데일리안·CCTV뉴스 2021.07.02†  ·  [3] IACS UR W33 Rev.1/Corr.1(2021) §3.3·§8·§9.2  ·  [4] IACS UR W33 Rev.2·W34 Rev.1(2026.07.15 승인)  ·  [5] 뉴스핌 2026.06.04†  ·  [6] 아시아투데이 2026.06†  ·  [7] 두산에너빌리티 통합보고서 2024·2026, 팍스경제TV 2024, 이투데이 2024.11.14, 위키리크스한국 2026.03†  ·  [8] 가스신문 2025.09.18†  ·  [9] 가스신문 기고 ‘비파괴검사 시장 현황’†  ·  † 검색 요약 기준(제출 전 원문 확인)</a:t>
+              <a:t>참고  [1] 황훈규 외, 한국정보통신학회논문지 25(2), 2021.02†  ·  [2] 데일리안·CCTV뉴스 2021.07.02†  ·  [3] IACS UR W34(2019.12; 2021.07.01 이후 건조계약분)  ·  [4] IACS UR W33 Rev.1/Corr.1(2021) §3.3·§8·§9.2  ·  [5] IACS UR W33 Rev.2·W34 Rev.1(2026.07.15 승인)  ·  [6] 뉴스핌 2026.06.04(한화오션×NC AI)†  ·  [7] 아시아투데이 2026.06(HD현대)†  ·  [8] 두산에너빌리티 통합보고서 2024·2026, 팍스경제TV 2024, 이투데이 2024.11.14, 위키리크스한국 2026.03†  ·  [9] 가스신문 2025.09.18†  ·  [10] 가스신문 기고 ‘비파괴검사 시장 현황’†  ·  † 검색 요약 기준(제출 전 원문 확인)</a:t>
             </a:r>
           </a:p>
         </p:txBody>
@@ -4279,7 +4309,7 @@
         <p:spPr>
           <a:xfrm>
             <a:off x="4800600" y="1371600"/>
-            <a:ext cx="12874752" cy="3429000"/>
+            <a:ext cx="12874752" cy="3246120"/>
           </a:xfrm>
           <a:prstGeom prst="roundRect">
             <a:avLst>
@@ -4418,7 +4448,7 @@
                 <a:ea typeface="Pretendard"/>
                 <a:cs typeface="Pretendard"/>
               </a:rPr>
-              <a:t> — 사진을 열면 AI가 놓칠 만한 곳을 표시하고, 판독원이 결함 종류를 확정하고 클릭 두 번으로 잰 크기를 규칙 엔진이 100mm 구간 기준으로 판정하며, 소견서·PDF·기록 보관까지 한 화면에서 끝나는 </a:t>
+              <a:t> — 사진을 열면 사람이 놓칠 만한 곳을 AI가 표시한다. 판독원이 결함 종류를 확정하고 클릭 두 번으로 크기를 재면, 규칙 엔진이 100mm 구간 기준으로 합격·불합격을 낸다. 소견서·PDF·기록까지 한 화면에서 끝나는 </a:t>
             </a:r>
             <a:r>
               <a:rPr sz="1300" b="1" i="0">
@@ -4440,7 +4470,7 @@
                 <a:ea typeface="Pretendard"/>
                 <a:cs typeface="Pretendard"/>
               </a:rPr>
-              <a:t>(Streamlit — 브라우저로 표시, 같은 와이파이의 태블릿에서도 접속)</a:t>
+              <a:t>(Streamlit: 브라우저로 표시, 같은 와이파이의 태블릿에서도 접속)</a:t>
             </a:r>
           </a:p>
         </p:txBody>
@@ -4495,7 +4525,7 @@
         <p:spPr>
           <a:xfrm>
             <a:off x="5120640" y="3218688"/>
-            <a:ext cx="2894076" cy="1399031"/>
+            <a:ext cx="2894076" cy="1216151"/>
           </a:xfrm>
           <a:prstGeom prst="roundRect">
             <a:avLst>
@@ -4565,7 +4595,7 @@
         <p:spPr>
           <a:xfrm>
             <a:off x="5285231" y="3611880"/>
-            <a:ext cx="2564892" cy="941831"/>
+            <a:ext cx="2564892" cy="758951"/>
           </a:xfrm>
           <a:prstGeom prst="rect">
             <a:avLst/>
@@ -4580,41 +4610,30 @@
           <a:p>
             <a:pPr algn="l">
               <a:lnSpc>
-                <a:spcPct val="108000"/>
-              </a:lnSpc>
-            </a:pPr>
-            <a:r>
-              <a:rPr sz="950" b="0" i="0">
-                <a:solidFill>
-                  <a:srgbClr val="1F2A44"/>
-                </a:solidFill>
-                <a:latin typeface="Pretendard"/>
-                <a:ea typeface="Pretendard"/>
-                <a:cs typeface="Pretendard"/>
-              </a:rPr>
-              <a:t>판독원이 먼저 보고, AI가 놓칠 만한 후보를 표시한다. 놓침을 줄이는 쪽으로 조정(오탐은 클릭 한 번으로 지우면 되지만, 놓친 결함은 배에 남는다). 후보의 결함 종류는 </a:t>
-            </a:r>
-            <a:r>
-              <a:rPr sz="950" b="1" i="0">
-                <a:solidFill>
-                  <a:srgbClr val="1F2A44"/>
-                </a:solidFill>
-                <a:latin typeface="Pretendard"/>
-                <a:ea typeface="Pretendard"/>
-                <a:cs typeface="Pretendard"/>
-              </a:rPr>
-              <a:t>판독원이 고쳐서 확정한 뒤 채택</a:t>
-            </a:r>
-            <a:r>
-              <a:rPr sz="950" b="0" i="0">
-                <a:solidFill>
-                  <a:srgbClr val="1F2A44"/>
-                </a:solidFill>
-                <a:latin typeface="Pretendard"/>
-                <a:ea typeface="Pretendard"/>
-                <a:cs typeface="Pretendard"/>
-              </a:rPr>
-              <a:t> — 균열 같은 허용 불가 판정은 확정된 종류에만 적용</a:t>
+                <a:spcPct val="110000"/>
+              </a:lnSpc>
+            </a:pPr>
+            <a:r>
+              <a:rPr sz="1100" b="0" i="0">
+                <a:solidFill>
+                  <a:srgbClr val="1F2A44"/>
+                </a:solidFill>
+                <a:latin typeface="Pretendard"/>
+                <a:ea typeface="Pretendard"/>
+                <a:cs typeface="Pretendard"/>
+              </a:rPr>
+              <a:t>판독원이 먼저 보고, 사람이 놓칠 만한 후보를 AI가 표시한다. 미탐(놓침)을 줄이는 쪽으로 조정 — 오탐은 클릭 한 번으로 지우지만 놓친 결함은 배에 남는다. 결함 종류는 </a:t>
+            </a:r>
+            <a:r>
+              <a:rPr sz="1100" b="1" i="0">
+                <a:solidFill>
+                  <a:srgbClr val="1F2A44"/>
+                </a:solidFill>
+                <a:latin typeface="Pretendard"/>
+                <a:ea typeface="Pretendard"/>
+                <a:cs typeface="Pretendard"/>
+              </a:rPr>
+              <a:t>판독원이 확정한 뒤 채택</a:t>
             </a:r>
           </a:p>
         </p:txBody>
@@ -4628,7 +4647,7 @@
         <p:spPr>
           <a:xfrm>
             <a:off x="8234171" y="3218688"/>
-            <a:ext cx="2894076" cy="1399031"/>
+            <a:ext cx="2894076" cy="1216151"/>
           </a:xfrm>
           <a:prstGeom prst="roundRect">
             <a:avLst>
@@ -4698,7 +4717,7 @@
         <p:spPr>
           <a:xfrm>
             <a:off x="8398763" y="3611880"/>
-            <a:ext cx="2564892" cy="941831"/>
+            <a:ext cx="2564892" cy="758951"/>
           </a:xfrm>
           <a:prstGeom prst="rect">
             <a:avLst/>
@@ -4713,22 +4732,22 @@
           <a:p>
             <a:pPr algn="l">
               <a:lnSpc>
-                <a:spcPct val="108000"/>
-              </a:lnSpc>
-            </a:pPr>
-            <a:r>
-              <a:rPr sz="950" b="0" i="0">
-                <a:solidFill>
-                  <a:srgbClr val="1F2A44"/>
-                </a:solidFill>
-                <a:latin typeface="Pretendard"/>
-                <a:ea typeface="Pretendard"/>
-                <a:cs typeface="Pretendard"/>
-              </a:rPr>
-              <a:t>기준물(IQI·납마커: 화질·크기 확인용 표준 지시계) 양 끝을 두 번 클릭해 mm/픽셀을 정하고, 결함 양 끝을 두 번 클릭해 크기 확정 → 규칙 엔진이 </a:t>
-            </a:r>
-            <a:r>
-              <a:rPr sz="950" b="1" i="0">
+                <a:spcPct val="110000"/>
+              </a:lnSpc>
+            </a:pPr>
+            <a:r>
+              <a:rPr sz="1100" b="0" i="0">
+                <a:solidFill>
+                  <a:srgbClr val="1F2A44"/>
+                </a:solidFill>
+                <a:latin typeface="Pretendard"/>
+                <a:ea typeface="Pretendard"/>
+                <a:cs typeface="Pretendard"/>
+              </a:rPr>
+              <a:t>기준물(IQI·납마커: 화질·크기 확인용 표준 지시계) 양 끝을 두 번 클릭해 mm/픽셀을 정하고, 결함 양 끝을 두 번 클릭해 크기를 확정한다 → 규칙 엔진(앱 표기: 룰 엔진)이 </a:t>
+            </a:r>
+            <a:r>
+              <a:rPr sz="1100" b="1" i="0">
                 <a:solidFill>
                   <a:srgbClr val="1F2A44"/>
                 </a:solidFill>
@@ -4739,15 +4758,15 @@
               <a:t>단일 크기·누적 길이·기공 면적률(%)</a:t>
             </a:r>
             <a:r>
-              <a:rPr sz="950" b="0" i="0">
-                <a:solidFill>
-                  <a:srgbClr val="1F2A44"/>
-                </a:solidFill>
-                <a:latin typeface="Pretendard"/>
-                <a:ea typeface="Pretendard"/>
-                <a:cs typeface="Pretendard"/>
-              </a:rPr>
-              <a:t> 3가지 방식으로 합격/불합격과 근거 조항을 제시(100mm 평가 구간·용접부 폭 입력, 기준표 판본 선택)</a:t>
+              <a:rPr sz="1100" b="0" i="0">
+                <a:solidFill>
+                  <a:srgbClr val="1F2A44"/>
+                </a:solidFill>
+                <a:latin typeface="Pretendard"/>
+                <a:ea typeface="Pretendard"/>
+                <a:cs typeface="Pretendard"/>
+              </a:rPr>
+              <a:t> 3가지로 판정하고 근거 조항을 함께 제시</a:t>
             </a:r>
           </a:p>
         </p:txBody>
@@ -4761,7 +4780,7 @@
         <p:spPr>
           <a:xfrm>
             <a:off x="11347704" y="3218688"/>
-            <a:ext cx="2894076" cy="1399031"/>
+            <a:ext cx="2894076" cy="1216151"/>
           </a:xfrm>
           <a:prstGeom prst="roundRect">
             <a:avLst>
@@ -4831,7 +4850,7 @@
         <p:spPr>
           <a:xfrm>
             <a:off x="11512296" y="3611880"/>
-            <a:ext cx="2564892" cy="941831"/>
+            <a:ext cx="2564892" cy="758951"/>
           </a:xfrm>
           <a:prstGeom prst="rect">
             <a:avLst/>
@@ -4846,19 +4865,19 @@
           <a:p>
             <a:pPr algn="l">
               <a:lnSpc>
-                <a:spcPct val="108000"/>
-              </a:lnSpc>
-            </a:pPr>
-            <a:r>
-              <a:rPr sz="950" b="0" i="0">
-                <a:solidFill>
-                  <a:srgbClr val="1F2A44"/>
-                </a:solidFill>
-                <a:latin typeface="Pretendard"/>
-                <a:ea typeface="Pretendard"/>
-                <a:cs typeface="Pretendard"/>
-              </a:rPr>
-              <a:t>확정된 판정 결과(이미지·개인정보 제외)를 LLM이 보고서 문체로 작성 → 판독원 수정·승인 → PDF. 기록에서는 ‘3번 블록 지난달 기공 불합격’처럼 말로 검색하고 요약 — LLM이 없어도 규칙 파서·템플릿으로 동작</a:t>
+                <a:spcPct val="110000"/>
+              </a:lnSpc>
+            </a:pPr>
+            <a:r>
+              <a:rPr sz="1100" b="0" i="0">
+                <a:solidFill>
+                  <a:srgbClr val="1F2A44"/>
+                </a:solidFill>
+                <a:latin typeface="Pretendard"/>
+                <a:ea typeface="Pretendard"/>
+                <a:cs typeface="Pretendard"/>
+              </a:rPr>
+              <a:t>확정된 판정 결과(사진·개인정보 제외)를 LLM이 보고서 문체로 작성 → 판독원 수정·승인 → PDF. 기록에서는 ‘3번 블록 지난달 기공 불합격’처럼 말로 검색·요약 — LLM이 없어도 규칙 파서·템플릿으로 동작</a:t>
             </a:r>
           </a:p>
         </p:txBody>
@@ -4872,7 +4891,7 @@
         <p:spPr>
           <a:xfrm>
             <a:off x="14461236" y="3218688"/>
-            <a:ext cx="2894076" cy="1399031"/>
+            <a:ext cx="2894076" cy="1216151"/>
           </a:xfrm>
           <a:prstGeom prst="roundRect">
             <a:avLst>
@@ -4942,7 +4961,7 @@
         <p:spPr>
           <a:xfrm>
             <a:off x="14625828" y="3611880"/>
-            <a:ext cx="2564892" cy="941831"/>
+            <a:ext cx="2564892" cy="758951"/>
           </a:xfrm>
           <a:prstGeom prst="rect">
             <a:avLst/>
@@ -4957,19 +4976,19 @@
           <a:p>
             <a:pPr algn="l">
               <a:lnSpc>
-                <a:spcPct val="108000"/>
-              </a:lnSpc>
-            </a:pPr>
-            <a:r>
-              <a:rPr sz="950" b="0" i="0">
-                <a:solidFill>
-                  <a:srgbClr val="1F2A44"/>
-                </a:solidFill>
-                <a:latin typeface="Pretendard"/>
-                <a:ea typeface="Pretendard"/>
-                <a:cs typeface="Pretendard"/>
-              </a:rPr>
-              <a:t>승인 기록 DB·조건 검색·CSV. 채택하거나 직접 추가한 결함 박스는 학습용 라벨로 내보내고, 기각은 오탐 신호로 집계만 — 재학습은 별도 프로젝트, 데이터는 반출 없이 조직 소유</a:t>
+                <a:spcPct val="110000"/>
+              </a:lnSpc>
+            </a:pPr>
+            <a:r>
+              <a:rPr sz="1100" b="0" i="0">
+                <a:solidFill>
+                  <a:srgbClr val="1F2A44"/>
+                </a:solidFill>
+                <a:latin typeface="Pretendard"/>
+                <a:ea typeface="Pretendard"/>
+                <a:cs typeface="Pretendard"/>
+              </a:rPr>
+              <a:t>승인 기록 DB·조건 검색·CSV(앱 탭: 아카이브 검색·자기개선 루프). 채택·직접 추가한 결함 박스는 학습 라벨로 내보내고, 기각은 오탐 신호로 집계만 — 재학습은 별도 프로젝트, 데이터는 반출 없이 조직 소유</a:t>
             </a:r>
           </a:p>
         </p:txBody>
@@ -4982,8 +5001,8 @@
         </p:nvSpPr>
         <p:spPr>
           <a:xfrm>
-            <a:off x="4800600" y="5074920"/>
-            <a:ext cx="7452360" cy="4178807"/>
+            <a:off x="4800600" y="4892040"/>
+            <a:ext cx="7452360" cy="4361688"/>
           </a:xfrm>
           <a:prstGeom prst="roundRect">
             <a:avLst>
@@ -5013,7 +5032,7 @@
         </p:nvSpPr>
         <p:spPr>
           <a:xfrm>
-            <a:off x="5120640" y="5431536"/>
+            <a:off x="5120640" y="5248656"/>
             <a:ext cx="146304" cy="146304"/>
           </a:xfrm>
           <a:prstGeom prst="ellipse">
@@ -5042,7 +5061,7 @@
         </p:nvSpPr>
         <p:spPr>
           <a:xfrm>
-            <a:off x="5367527" y="5330952"/>
+            <a:off x="5367527" y="5148072"/>
             <a:ext cx="6565392" cy="384048"/>
           </a:xfrm>
           <a:prstGeom prst="rect">
@@ -5083,8 +5102,8 @@
         </p:nvSpPr>
         <p:spPr>
           <a:xfrm>
-            <a:off x="5120640" y="5824728"/>
-            <a:ext cx="3305556" cy="1444752"/>
+            <a:off x="5120640" y="5641848"/>
+            <a:ext cx="3305556" cy="1591056"/>
           </a:xfrm>
           <a:prstGeom prst="roundRect">
             <a:avLst>
@@ -5112,7 +5131,7 @@
         </p:nvSpPr>
         <p:spPr>
           <a:xfrm>
-            <a:off x="5276088" y="5925312"/>
+            <a:off x="5276088" y="5742432"/>
             <a:ext cx="2994660" cy="274320"/>
           </a:xfrm>
           <a:prstGeom prst="rect">
@@ -5153,8 +5172,8 @@
         </p:nvSpPr>
         <p:spPr>
           <a:xfrm>
-            <a:off x="5276088" y="6208776"/>
-            <a:ext cx="2994660" cy="987552"/>
+            <a:off x="5276088" y="6025896"/>
+            <a:ext cx="2994660" cy="1133856"/>
           </a:xfrm>
           <a:prstGeom prst="rect">
             <a:avLst/>
@@ -5169,11 +5188,11 @@
           <a:p>
             <a:pPr algn="l">
               <a:lnSpc>
-                <a:spcPct val="108000"/>
-              </a:lnSpc>
-            </a:pPr>
-            <a:r>
-              <a:rPr sz="950" b="0" i="0">
+                <a:spcPct val="110000"/>
+              </a:lnSpc>
+            </a:pPr>
+            <a:r>
+              <a:rPr sz="1100" b="0" i="0">
                 <a:solidFill>
                   <a:srgbClr val="1F2A44"/>
                 </a:solidFill>
@@ -5184,7 +5203,7 @@
               <a:t>Ultralytics YOLO(</a:t>
             </a:r>
             <a:r>
-              <a:rPr sz="950" b="1" i="0">
+              <a:rPr sz="1100" b="1" i="0">
                 <a:solidFill>
                   <a:srgbClr val="1F2A44"/>
                 </a:solidFill>
@@ -5195,37 +5214,37 @@
               <a:t>YOLO26s</a:t>
             </a:r>
             <a:r>
-              <a:rPr sz="950" b="0" i="0">
-                <a:solidFill>
-                  <a:srgbClr val="1F2A44"/>
-                </a:solidFill>
-                <a:latin typeface="Pretendard"/>
-                <a:ea typeface="Pretendard"/>
-                <a:cs typeface="Pretendard"/>
-              </a:rPr>
-              <a:t> 권장, 2026.01 공개[1]; YOLOv8/11 가중치도 같은 방식) + CLAHE(대비 향상)로 AI Hub·RIAWELC 학습 예정. </a:t>
-            </a:r>
-            <a:r>
-              <a:rPr sz="950" b="1" i="0">
-                <a:solidFill>
-                  <a:srgbClr val="1F2A44"/>
-                </a:solidFill>
-                <a:latin typeface="Pretendard"/>
-                <a:ea typeface="Pretendard"/>
-                <a:cs typeface="Pretendard"/>
-              </a:rPr>
-              <a:t>지금 프로토타입은 학습 모델이 아닌 OpenCV 규칙 기반 폴백 탐지기</a:t>
-            </a:r>
-            <a:r>
-              <a:rPr sz="950" b="0" i="0">
-                <a:solidFill>
-                  <a:srgbClr val="1F2A44"/>
-                </a:solidFill>
-                <a:latin typeface="Pretendard"/>
-                <a:ea typeface="Pretendard"/>
-                <a:cs typeface="Pretendard"/>
-              </a:rPr>
-              <a:t>: 합성 필름 결함 14개 중 14개 검출, 장당 오탐 3.8건(임계 0.5). 가중치 파일을 두면 자동 전환. AGPL-3.0(사내 배포 시 Enterprise 라이선스)</a:t>
+              <a:rPr sz="1100" b="0" i="0">
+                <a:solidFill>
+                  <a:srgbClr val="1F2A44"/>
+                </a:solidFill>
+                <a:latin typeface="Pretendard"/>
+                <a:ea typeface="Pretendard"/>
+                <a:cs typeface="Pretendard"/>
+              </a:rPr>
+              <a:t> 권장, 2026.01 공개[1]; v8·11 가중치 호환) + CLAHE(대비 향상)로 공개 데이터 학습 예정. </a:t>
+            </a:r>
+            <a:r>
+              <a:rPr sz="1100" b="1" i="0">
+                <a:solidFill>
+                  <a:srgbClr val="1F2A44"/>
+                </a:solidFill>
+                <a:latin typeface="Pretendard"/>
+                <a:ea typeface="Pretendard"/>
+                <a:cs typeface="Pretendard"/>
+              </a:rPr>
+              <a:t>지금은 학습 모델이 아닌 대체용(폴백) OpenCV 규칙 탐지기</a:t>
+            </a:r>
+            <a:r>
+              <a:rPr sz="1100" b="0" i="0">
+                <a:solidFill>
+                  <a:srgbClr val="1F2A44"/>
+                </a:solidFill>
+                <a:latin typeface="Pretendard"/>
+                <a:ea typeface="Pretendard"/>
+                <a:cs typeface="Pretendard"/>
+              </a:rPr>
+              <a:t>: 합성 필름 6장의 결함 14개 중 14개 탐지, 장당 오탐 3.8건(신뢰도 기준 0.5). 가중치 + ultralytics≥8.4 설치 시 자동 전환</a:t>
             </a:r>
           </a:p>
         </p:txBody>
@@ -5238,8 +5257,8 @@
         </p:nvSpPr>
         <p:spPr>
           <a:xfrm>
-            <a:off x="8627364" y="5824728"/>
-            <a:ext cx="3305556" cy="1444752"/>
+            <a:off x="8627364" y="5641848"/>
+            <a:ext cx="3305556" cy="1591056"/>
           </a:xfrm>
           <a:prstGeom prst="roundRect">
             <a:avLst>
@@ -5267,7 +5286,7 @@
         </p:nvSpPr>
         <p:spPr>
           <a:xfrm>
-            <a:off x="8782812" y="5925312"/>
+            <a:off x="8782812" y="5742432"/>
             <a:ext cx="2994660" cy="274320"/>
           </a:xfrm>
           <a:prstGeom prst="rect">
@@ -5308,8 +5327,8 @@
         </p:nvSpPr>
         <p:spPr>
           <a:xfrm>
-            <a:off x="8782812" y="6208776"/>
-            <a:ext cx="2994660" cy="987552"/>
+            <a:off x="8782812" y="6025896"/>
+            <a:ext cx="2994660" cy="1133856"/>
           </a:xfrm>
           <a:prstGeom prst="rect">
             <a:avLst/>
@@ -5324,11 +5343,11 @@
           <a:p>
             <a:pPr algn="l">
               <a:lnSpc>
-                <a:spcPct val="108000"/>
-              </a:lnSpc>
-            </a:pPr>
-            <a:r>
-              <a:rPr sz="950" b="0" i="0">
+                <a:spcPct val="110000"/>
+              </a:lnSpc>
+            </a:pPr>
+            <a:r>
+              <a:rPr sz="1100" b="0" i="0">
                 <a:solidFill>
                   <a:srgbClr val="1F2A44"/>
                 </a:solidFill>
@@ -5339,7 +5358,7 @@
               <a:t>기본은 </a:t>
             </a:r>
             <a:r>
-              <a:rPr sz="950" b="1" i="0">
+              <a:rPr sz="1100" b="1" i="0">
                 <a:solidFill>
                   <a:srgbClr val="1F2A44"/>
                 </a:solidFill>
@@ -5350,18 +5369,18 @@
               <a:t>사내 PC의 로컬 LLM</a:t>
             </a:r>
             <a:r>
-              <a:rPr sz="950" b="0" i="0">
-                <a:solidFill>
-                  <a:srgbClr val="1F2A44"/>
-                </a:solidFill>
-                <a:latin typeface="Pretendard"/>
-                <a:ea typeface="Pretendard"/>
-                <a:cs typeface="Pretendard"/>
-              </a:rPr>
-              <a:t>(Ollama·vLLM — EXAONE 3.5 기본값·4.x, HyperCLOVA X SEED 등 한국어 모델[4][5]) 또는 오프라인 템플릿. 클라우드(Claude Sonnet 5 → Gemini; 코드 기본값 gemini-2.0-flash는 본선 전 교체)는 </a:t>
-            </a:r>
-            <a:r>
-              <a:rPr sz="950" b="1" i="0">
+              <a:rPr sz="1100" b="0" i="0">
+                <a:solidFill>
+                  <a:srgbClr val="1F2A44"/>
+                </a:solidFill>
+                <a:latin typeface="Pretendard"/>
+                <a:ea typeface="Pretendard"/>
+                <a:cs typeface="Pretendard"/>
+              </a:rPr>
+              <a:t>(Ollama·vLLM[3]) 또는 오프라인 템플릿. 한국어 모델: EXAONE(코드 기본값 3.5)[4]·HyperCLOVA X SEED[5]. 클라우드(Claude Sonnet 5 → Gemini)[3]는 </a:t>
+            </a:r>
+            <a:r>
+              <a:rPr sz="1100" b="1" i="0">
                 <a:solidFill>
                   <a:srgbClr val="1F2A44"/>
                 </a:solidFill>
@@ -5372,15 +5391,15 @@
               <a:t>명시 허용 시에만</a:t>
             </a:r>
             <a:r>
-              <a:rPr sz="950" b="0" i="0">
-                <a:solidFill>
-                  <a:srgbClr val="1F2A44"/>
-                </a:solidFill>
-                <a:latin typeface="Pretendard"/>
-                <a:ea typeface="Pretendard"/>
-                <a:cs typeface="Pretendard"/>
-              </a:rPr>
-              <a:t>. 이미지·실명·파일 경로는 어떤 경우에도 보내지 않는다(전송 내용 미리보기 제공)</a:t>
+              <a:rPr sz="1100" b="0" i="0">
+                <a:solidFill>
+                  <a:srgbClr val="1F2A44"/>
+                </a:solidFill>
+                <a:latin typeface="Pretendard"/>
+                <a:ea typeface="Pretendard"/>
+                <a:cs typeface="Pretendard"/>
+              </a:rPr>
+              <a:t> 쓴다. 사진·실명·파일 경로는 절대 보내지 않는다(소견서 전송 내용 미리보기 제공)</a:t>
             </a:r>
           </a:p>
         </p:txBody>
@@ -5393,8 +5412,8 @@
         </p:nvSpPr>
         <p:spPr>
           <a:xfrm>
-            <a:off x="5120640" y="7415783"/>
-            <a:ext cx="3305556" cy="1133856"/>
+            <a:off x="5120640" y="7379208"/>
+            <a:ext cx="3305556" cy="1243584"/>
           </a:xfrm>
           <a:prstGeom prst="roundRect">
             <a:avLst>
@@ -5422,7 +5441,7 @@
         </p:nvSpPr>
         <p:spPr>
           <a:xfrm>
-            <a:off x="5276088" y="7516367"/>
+            <a:off x="5276088" y="7479792"/>
             <a:ext cx="2994660" cy="274320"/>
           </a:xfrm>
           <a:prstGeom prst="rect">
@@ -5450,7 +5469,7 @@
                 <a:ea typeface="Pretendard"/>
                 <a:cs typeface="Pretendard"/>
               </a:rPr>
-              <a:t>합부 판정(일부러 AI 미사용)</a:t>
+              <a:t>합격·불합격 판정(일부러 AI 미사용)</a:t>
             </a:r>
           </a:p>
         </p:txBody>
@@ -5463,8 +5482,8 @@
         </p:nvSpPr>
         <p:spPr>
           <a:xfrm>
-            <a:off x="5276088" y="7799831"/>
-            <a:ext cx="2994660" cy="676656"/>
+            <a:off x="5276088" y="7763256"/>
+            <a:ext cx="2994660" cy="786384"/>
           </a:xfrm>
           <a:prstGeom prst="rect">
             <a:avLst/>
@@ -5479,19 +5498,19 @@
           <a:p>
             <a:pPr algn="l">
               <a:lnSpc>
-                <a:spcPct val="108000"/>
-              </a:lnSpc>
-            </a:pPr>
-            <a:r>
-              <a:rPr sz="950" b="0" i="0">
-                <a:solidFill>
-                  <a:srgbClr val="1F2A44"/>
-                </a:solidFill>
-                <a:latin typeface="Pretendard"/>
-                <a:ea typeface="Pretendard"/>
-                <a:cs typeface="Pretendard"/>
-              </a:rPr>
-              <a:t>규칙 엔진 — ISO 10675-1·5817 구조(품질등급 B·C·D ↔ 허용 레벨 1·2·3, 100mm 평가 길이, 기공 면적률)를 본뜬 기준표 JSON 2종(2021/2023판·2016/2014판 구조, 데모 수치)을 화면에서 선택. 실제 수치는 선급 지침·멘토링으로 확정 후 JSON만 교체</a:t>
+                <a:spcPct val="110000"/>
+              </a:lnSpc>
+            </a:pPr>
+            <a:r>
+              <a:rPr sz="1100" b="0" i="0">
+                <a:solidFill>
+                  <a:srgbClr val="1F2A44"/>
+                </a:solidFill>
+                <a:latin typeface="Pretendard"/>
+                <a:ea typeface="Pretendard"/>
+                <a:cs typeface="Pretendard"/>
+              </a:rPr>
+              <a:t>규칙 엔진 — ISO 10675-1(RT 합격 기준)·ISO 5817(용접 품질 등급)의 틀(등급 B·C·D ↔ 허용 레벨 1·2·3, 100mm 구간, 기공 면적률)을 본뜬 기준표 JSON 2종(신판·구판 구조, 데모 수치)을 화면에서 선택. 실제 수치는 선급 지침 확정 후 교체</a:t>
             </a:r>
           </a:p>
         </p:txBody>
@@ -5504,8 +5523,8 @@
         </p:nvSpPr>
         <p:spPr>
           <a:xfrm>
-            <a:off x="8627364" y="7415783"/>
-            <a:ext cx="3305556" cy="1133856"/>
+            <a:off x="8627364" y="7379208"/>
+            <a:ext cx="3305556" cy="1243584"/>
           </a:xfrm>
           <a:prstGeom prst="roundRect">
             <a:avLst>
@@ -5533,7 +5552,7 @@
         </p:nvSpPr>
         <p:spPr>
           <a:xfrm>
-            <a:off x="8782812" y="7516367"/>
+            <a:off x="8782812" y="7479792"/>
             <a:ext cx="2994660" cy="274320"/>
           </a:xfrm>
           <a:prstGeom prst="rect">
@@ -5574,8 +5593,8 @@
         </p:nvSpPr>
         <p:spPr>
           <a:xfrm>
-            <a:off x="8782812" y="7799831"/>
-            <a:ext cx="2994660" cy="676656"/>
+            <a:off x="8782812" y="7763256"/>
+            <a:ext cx="2994660" cy="786384"/>
           </a:xfrm>
           <a:prstGeom prst="rect">
             <a:avLst/>
@@ -5590,11 +5609,11 @@
           <a:p>
             <a:pPr algn="l">
               <a:lnSpc>
-                <a:spcPct val="108000"/>
-              </a:lnSpc>
-            </a:pPr>
-            <a:r>
-              <a:rPr sz="950" b="1" i="0">
+                <a:spcPct val="110000"/>
+              </a:lnSpc>
+            </a:pPr>
+            <a:r>
+              <a:rPr sz="1100" b="1" i="0">
                 <a:solidFill>
                   <a:srgbClr val="1F2A44"/>
                 </a:solidFill>
@@ -5605,15 +5624,15 @@
               <a:t>Claude Code</a:t>
             </a:r>
             <a:r>
-              <a:rPr sz="950" b="0" i="0">
-                <a:solidFill>
-                  <a:srgbClr val="1F2A44"/>
-                </a:solidFill>
-                <a:latin typeface="Pretendard"/>
-                <a:ea typeface="Pretendard"/>
-                <a:cs typeface="Pretendard"/>
-              </a:rPr>
-              <a:t>로 설계·구현·적대적 코드 리뷰(자동 테스트 235건). 본선에서는 해커톤 지원 항목인 Claude Max 플랜(공고 기준)으로 고도화</a:t>
+              <a:rPr sz="1100" b="0" i="0">
+                <a:solidFill>
+                  <a:srgbClr val="1F2A44"/>
+                </a:solidFill>
+                <a:latin typeface="Pretendard"/>
+                <a:ea typeface="Pretendard"/>
+                <a:cs typeface="Pretendard"/>
+              </a:rPr>
+              <a:t>로 설계·구현·적대적 코드 리뷰(자동 테스트 281건). 본선에서는 해커톤 지원 항목인 Claude Max 플랜(공고 기준)으로 고도화</a:t>
             </a:r>
           </a:p>
         </p:txBody>
@@ -5626,8 +5645,8 @@
         </p:nvSpPr>
         <p:spPr>
           <a:xfrm>
-            <a:off x="5120640" y="8695944"/>
-            <a:ext cx="6812280" cy="512064"/>
+            <a:off x="5120640" y="8769096"/>
+            <a:ext cx="6812280" cy="402336"/>
           </a:xfrm>
           <a:prstGeom prst="roundRect">
             <a:avLst>
@@ -5655,8 +5674,8 @@
         </p:nvSpPr>
         <p:spPr>
           <a:xfrm>
-            <a:off x="5276088" y="8787384"/>
-            <a:ext cx="6501384" cy="374904"/>
+            <a:off x="5276088" y="8860536"/>
+            <a:ext cx="6501384" cy="265176"/>
           </a:xfrm>
           <a:prstGeom prst="rect">
             <a:avLst/>
@@ -5707,8 +5726,8 @@
         </p:nvSpPr>
         <p:spPr>
           <a:xfrm>
-            <a:off x="12527280" y="5074920"/>
-            <a:ext cx="5148071" cy="4178807"/>
+            <a:off x="12527280" y="4892040"/>
+            <a:ext cx="5148071" cy="4361688"/>
           </a:xfrm>
           <a:prstGeom prst="roundRect">
             <a:avLst>
@@ -5738,7 +5757,7 @@
         </p:nvSpPr>
         <p:spPr>
           <a:xfrm>
-            <a:off x="12847320" y="5431536"/>
+            <a:off x="12847320" y="5248656"/>
             <a:ext cx="146304" cy="146304"/>
           </a:xfrm>
           <a:prstGeom prst="ellipse">
@@ -5767,7 +5786,7 @@
         </p:nvSpPr>
         <p:spPr>
           <a:xfrm>
-            <a:off x="13094208" y="5330952"/>
+            <a:off x="13094208" y="5148072"/>
             <a:ext cx="4261103" cy="384048"/>
           </a:xfrm>
           <a:prstGeom prst="rect">
@@ -5808,8 +5827,8 @@
         </p:nvSpPr>
         <p:spPr>
           <a:xfrm>
-            <a:off x="12847320" y="5824728"/>
-            <a:ext cx="4507991" cy="3264407"/>
+            <a:off x="12847320" y="5641848"/>
+            <a:ext cx="4507991" cy="3447287"/>
           </a:xfrm>
           <a:prstGeom prst="rect">
             <a:avLst/>
@@ -5822,12 +5841,12 @@
           </a:bodyPr>
           <a:lstStyle/>
           <a:p>
-            <a:pPr marL="153352" indent="-153352">
+            <a:pPr marL="148970" indent="-148970">
               <a:lnSpc>
                 <a:spcPct val="114000"/>
               </a:lnSpc>
               <a:spcAft>
-                <a:spcPts val="400"/>
+                <a:spcPts val="300"/>
               </a:spcAft>
               <a:buClr>
                 <a:srgbClr val="4FD0F5"/>
@@ -5836,7 +5855,7 @@
               <a:buChar char="•"/>
             </a:pPr>
             <a:r>
-              <a:rPr sz="1050" b="1" i="0">
+              <a:rPr sz="1019" b="1" i="0">
                 <a:solidFill>
                   <a:srgbClr val="1F2A44"/>
                 </a:solidFill>
@@ -5847,18 +5866,18 @@
               <a:t>결함 찾기(탐지) 하나만으로는 새롭지 않다</a:t>
             </a:r>
             <a:r>
-              <a:rPr sz="1050" b="0" i="0">
-                <a:solidFill>
-                  <a:srgbClr val="1F2A44"/>
-                </a:solidFill>
-                <a:latin typeface="Pretendard"/>
-                <a:ea typeface="Pretendard"/>
-                <a:cs typeface="Pretendard"/>
-              </a:rPr>
-              <a:t> — D-Vision(자사 적용), 코드비전 RT AI 판독 플랫폼(2024.10 전시)[6], Trueflaw FlawML(핀란드; Meyer Turku 조선소·DEKRA와 협업 2022)[7], DNV×GSI 공동개발(2019)[8] 등 → 새로움은 판독원의 하루 전체(2차 눈+판정+소견서+기록)를 </a:t>
-            </a:r>
-            <a:r>
-              <a:rPr sz="1050" b="1" i="0">
+              <a:rPr sz="1019" b="0" i="0">
+                <a:solidFill>
+                  <a:srgbClr val="1F2A44"/>
+                </a:solidFill>
+                <a:latin typeface="Pretendard"/>
+                <a:ea typeface="Pretendard"/>
+                <a:cs typeface="Pretendard"/>
+              </a:rPr>
+              <a:t> — D-Vision(자사 적용), 코드비전 RT AI 판독 플랫폼(2024.10 전시)[6], Trueflaw(핀란드; Meyer Turku 조선소·DEKRA와 협업 2022.02)[7], DNV×GSI(광저우조선) 공동개발(2019.12)[8] → 새로움은 판독원의 하루 전체를 </a:t>
+            </a:r>
+            <a:r>
+              <a:rPr sz="1019" b="1" i="0">
                 <a:solidFill>
                   <a:srgbClr val="1F2A44"/>
                 </a:solidFill>
@@ -5870,12 +5889,12 @@
             </a:r>
           </a:p>
           <a:p>
-            <a:pPr marL="153352" indent="-153352">
+            <a:pPr marL="148970" indent="-148970">
               <a:lnSpc>
                 <a:spcPct val="114000"/>
               </a:lnSpc>
               <a:spcAft>
-                <a:spcPts val="400"/>
+                <a:spcPts val="300"/>
               </a:spcAft>
               <a:buClr>
                 <a:srgbClr val="4FD0F5"/>
@@ -5884,57 +5903,35 @@
               <a:buChar char="•"/>
             </a:pPr>
             <a:r>
-              <a:rPr sz="1050" b="1" i="0">
-                <a:solidFill>
-                  <a:srgbClr val="1F2A44"/>
-                </a:solidFill>
-                <a:latin typeface="Pretendard"/>
-                <a:ea typeface="Pretendard"/>
-                <a:cs typeface="Pretendard"/>
-              </a:rPr>
-              <a:t>한화오션 디지털 RT(2020~2021)와의 관계</a:t>
-            </a:r>
-            <a:r>
-              <a:rPr sz="1050" b="0" i="0">
-                <a:solidFill>
-                  <a:srgbClr val="1F2A44"/>
-                </a:solidFill>
-                <a:latin typeface="Pretendard"/>
-                <a:ea typeface="Pretendard"/>
-                <a:cs typeface="Pretendard"/>
-              </a:rPr>
-              <a:t>: 그쪽은 촬영 장비와 선급 승인 체계의 디지털화. 본 안은 그 다음 단계(판독·판정·문서·이력)이고 </a:t>
-            </a:r>
-            <a:r>
-              <a:rPr sz="1050" b="1" i="0">
-                <a:solidFill>
-                  <a:srgbClr val="1F2A44"/>
-                </a:solidFill>
-                <a:latin typeface="Pretendard"/>
-                <a:ea typeface="Pretendard"/>
-                <a:cs typeface="Pretendard"/>
-              </a:rPr>
-              <a:t>필름 스캔과 디지털 사진 모두 입력</a:t>
-            </a:r>
-            <a:r>
-              <a:rPr sz="1050" b="0" i="0">
-                <a:solidFill>
-                  <a:srgbClr val="1F2A44"/>
-                </a:solidFill>
-                <a:latin typeface="Pretendard"/>
-                <a:ea typeface="Pretendard"/>
-                <a:cs typeface="Pretendard"/>
-              </a:rPr>
-              <a:t> — 대체가 아닌 보완</a:t>
-            </a:r>
-          </a:p>
-          <a:p>
-            <a:pPr marL="153352" indent="-153352">
+              <a:rPr sz="1019" b="1" i="0">
+                <a:solidFill>
+                  <a:srgbClr val="1F2A44"/>
+                </a:solidFill>
+                <a:latin typeface="Pretendard"/>
+                <a:ea typeface="Pretendard"/>
+                <a:cs typeface="Pretendard"/>
+              </a:rPr>
+              <a:t>한화오션(당시 대우조선해양) 디지털 RT(2020.11~2021.07)와의 관계</a:t>
+            </a:r>
+            <a:r>
+              <a:rPr sz="1019" b="0" i="0">
+                <a:solidFill>
+                  <a:srgbClr val="1F2A44"/>
+                </a:solidFill>
+                <a:latin typeface="Pretendard"/>
+                <a:ea typeface="Pretendard"/>
+                <a:cs typeface="Pretendard"/>
+              </a:rPr>
+              <a:t>: 그 시스템은 필름 스캐너·AI 자동 판독·통합관리 플랫폼·선급 비대면 승인을 묶은 특정 조선소 사내 체계였다[2]. 본 안의 차이는 ① 검사업체·조선소가 공용으로 쓰는 설치형 ② 판정을 규칙 엔진+자격자에 두고 조항 번호·100mm 구간을 기록 ③ 소견서 LLM·자연어 검색</a:t>
+            </a:r>
+          </a:p>
+          <a:p>
+            <a:pPr marL="148970" indent="-148970">
               <a:lnSpc>
                 <a:spcPct val="114000"/>
               </a:lnSpc>
               <a:spcAft>
-                <a:spcPts val="400"/>
+                <a:spcPts val="300"/>
               </a:spcAft>
               <a:buClr>
                 <a:srgbClr val="4FD0F5"/>
@@ -5943,7 +5940,7 @@
               <a:buChar char="•"/>
             </a:pPr>
             <a:r>
-              <a:rPr sz="1050" b="1" i="0">
+              <a:rPr sz="1019" b="1" i="0">
                 <a:solidFill>
                   <a:srgbClr val="1F2A44"/>
                 </a:solidFill>
@@ -5954,35 +5951,24 @@
               <a:t>AI는 판정하지 않는다</a:t>
             </a:r>
             <a:r>
-              <a:rPr sz="1050" b="0" i="0">
-                <a:solidFill>
-                  <a:srgbClr val="1F2A44"/>
-                </a:solidFill>
-                <a:latin typeface="Pretendard"/>
-                <a:ea typeface="Pretendard"/>
-                <a:cs typeface="Pretendard"/>
-              </a:rPr>
-              <a:t> — DNV도 2019년 ‘AI는 검출, 사람은 최종 승인’으로 역할을 나눴고[8], AI 판독을 선급이 규칙으로 승인한 공개 사례는 2026.09 기준 확인되지 않는다. 본 안은 판정을 규칙 엔진(조항 번호 자동 기재)에, 글쓰기·검색을 LLM에 맡긴다 → </a:t>
-            </a:r>
-            <a:r>
-              <a:rPr sz="1050" b="1" i="0">
-                <a:solidFill>
-                  <a:srgbClr val="1F2A44"/>
-                </a:solidFill>
-                <a:latin typeface="Pretendard"/>
-                <a:ea typeface="Pretendard"/>
-                <a:cs typeface="Pretendard"/>
-              </a:rPr>
-              <a:t>선급 승인이 필요 없는 영역에서 바로 도입 가능</a:t>
-            </a:r>
-          </a:p>
-          <a:p>
-            <a:pPr marL="153352" indent="-153352">
+              <a:rPr sz="1019" b="0" i="0">
+                <a:solidFill>
+                  <a:srgbClr val="1F2A44"/>
+                </a:solidFill>
+                <a:latin typeface="Pretendard"/>
+                <a:ea typeface="Pretendard"/>
+                <a:cs typeface="Pretendard"/>
+              </a:rPr>
+              <a:t> — DNV도 2019.12 ‘AI는 탐지, 사람은 최종 승인’으로 역할을 나눴고[8], AI 판독을 선급이 규칙으로 승인한 공개 사례는 2026.09 기준 확인되지 않는다</a:t>
+            </a:r>
+          </a:p>
+          <a:p>
+            <a:pPr marL="148970" indent="-148970">
               <a:lnSpc>
                 <a:spcPct val="114000"/>
               </a:lnSpc>
               <a:spcAft>
-                <a:spcPts val="400"/>
+                <a:spcPts val="300"/>
               </a:spcAft>
               <a:buClr>
                 <a:srgbClr val="4FD0F5"/>
@@ -5991,46 +5977,46 @@
               <a:buChar char="•"/>
             </a:pPr>
             <a:r>
-              <a:rPr sz="1050" b="0" i="0">
-                <a:solidFill>
-                  <a:srgbClr val="1F2A44"/>
-                </a:solidFill>
-                <a:latin typeface="Pretendard"/>
-                <a:ea typeface="Pretendard"/>
-                <a:cs typeface="Pretendard"/>
-              </a:rPr>
-              <a:t>픽셀→mm 환산은 </a:t>
-            </a:r>
-            <a:r>
-              <a:rPr sz="1050" b="1" i="0">
-                <a:solidFill>
-                  <a:srgbClr val="1F2A44"/>
-                </a:solidFill>
-                <a:latin typeface="Pretendard"/>
-                <a:ea typeface="Pretendard"/>
-                <a:cs typeface="Pretendard"/>
-              </a:rPr>
-              <a:t>판독원의 클릭 두 번</a:t>
-            </a:r>
-            <a:r>
-              <a:rPr sz="1050" b="0" i="0">
-                <a:solidFill>
-                  <a:srgbClr val="1F2A44"/>
-                </a:solidFill>
-                <a:latin typeface="Pretendard"/>
-                <a:ea typeface="Pretendard"/>
-                <a:cs typeface="Pretendard"/>
-              </a:rPr>
-              <a:t>으로 확정 — AI가 추정하지 않는다</a:t>
-            </a:r>
-          </a:p>
-          <a:p>
-            <a:pPr marL="153352" indent="-153352">
+              <a:rPr sz="1019" b="0" i="0">
+                <a:solidFill>
+                  <a:srgbClr val="1F2A44"/>
+                </a:solidFill>
+                <a:latin typeface="Pretendard"/>
+                <a:ea typeface="Pretendard"/>
+                <a:cs typeface="Pretendard"/>
+              </a:rPr>
+              <a:t>본 안은 판정을 규칙 엔진(조항 번호 자동 기재)에, 글쓰기·검색을 LLM에 맡긴다 → AI 판독에 대한 규칙 개정을 기다리지 않고, </a:t>
+            </a:r>
+            <a:r>
+              <a:rPr sz="1019" b="1" i="0">
+                <a:solidFill>
+                  <a:srgbClr val="1F2A44"/>
+                </a:solidFill>
+                <a:latin typeface="Pretendard"/>
+                <a:ea typeface="Pretendard"/>
+                <a:cs typeface="Pretendard"/>
+              </a:rPr>
+              <a:t>자격자 판정·서면 절차·기록 관리 요건(UR W33 §3.2·§6.1.2·§8.5) 안에서 보조 도구로 도입 가능</a:t>
+            </a:r>
+            <a:r>
+              <a:rPr sz="1019" b="0" i="0">
+                <a:solidFill>
+                  <a:srgbClr val="1F2A44"/>
+                </a:solidFill>
+                <a:latin typeface="Pretendard"/>
+                <a:ea typeface="Pretendard"/>
+                <a:cs typeface="Pretendard"/>
+              </a:rPr>
+              <a:t>[9]</a:t>
+            </a:r>
+          </a:p>
+          <a:p>
+            <a:pPr marL="148970" indent="-148970">
               <a:lnSpc>
                 <a:spcPct val="114000"/>
               </a:lnSpc>
               <a:spcAft>
-                <a:spcPts val="400"/>
+                <a:spcPts val="300"/>
               </a:spcAft>
               <a:buClr>
                 <a:srgbClr val="4FD0F5"/>
@@ -6039,26 +6025,37 @@
               <a:buChar char="•"/>
             </a:pPr>
             <a:r>
-              <a:rPr sz="1050" b="1" i="0">
-                <a:solidFill>
-                  <a:srgbClr val="1F2A44"/>
-                </a:solidFill>
-                <a:latin typeface="Pretendard"/>
-                <a:ea typeface="Pretendard"/>
-                <a:cs typeface="Pretendard"/>
-              </a:rPr>
-              <a:t>보안 기본값이 로컬</a:t>
-            </a:r>
-            <a:r>
-              <a:rPr sz="1050" b="0" i="0">
-                <a:solidFill>
-                  <a:srgbClr val="1F2A44"/>
-                </a:solidFill>
-                <a:latin typeface="Pretendard"/>
-                <a:ea typeface="Pretendard"/>
-                <a:cs typeface="Pretendard"/>
-              </a:rPr>
-              <a:t> — 조선·방산 현장의 반출 금지를 전제로 로컬 LLM/템플릿이 기본, 클라우드는 옵트인. 국산 모델: EXAONE 4.5(2026.04, 상용은 별도 계약)[4], HyperCLOVA X SEED Think 32B(2025.12, 조건부 상용 허용)[5]</a:t>
+              <a:rPr sz="1019" b="0" i="0">
+                <a:solidFill>
+                  <a:srgbClr val="1F2A44"/>
+                </a:solidFill>
+                <a:latin typeface="Pretendard"/>
+                <a:ea typeface="Pretendard"/>
+                <a:cs typeface="Pretendard"/>
+              </a:rPr>
+              <a:t>픽셀→mm 환산은 </a:t>
+            </a:r>
+            <a:r>
+              <a:rPr sz="1019" b="1" i="0">
+                <a:solidFill>
+                  <a:srgbClr val="1F2A44"/>
+                </a:solidFill>
+                <a:latin typeface="Pretendard"/>
+                <a:ea typeface="Pretendard"/>
+                <a:cs typeface="Pretendard"/>
+              </a:rPr>
+              <a:t>판독원의 클릭 두 번</a:t>
+            </a:r>
+            <a:r>
+              <a:rPr sz="1019" b="0" i="0">
+                <a:solidFill>
+                  <a:srgbClr val="1F2A44"/>
+                </a:solidFill>
+                <a:latin typeface="Pretendard"/>
+                <a:ea typeface="Pretendard"/>
+                <a:cs typeface="Pretendard"/>
+              </a:rPr>
+              <a:t>으로 확정 — AI가 추정하지 않는다. 보안 기본값도 로컬(클라우드는 사용자가 켜야만 쓰는 선택 사항)</a:t>
             </a:r>
           </a:p>
         </p:txBody>
@@ -6099,7 +6096,7 @@
                 <a:ea typeface="Pretendard"/>
                 <a:cs typeface="Pretendard"/>
               </a:rPr>
-              <a:t>참고  [1] Ultralytics 8.4.0 릴리스·PyPI(2026.01.14, AGPL-3.0)  ·  [2] Streamlit 1.63.0 PyPI(2026.09.01)  ·  [3] Anthropic 모델 문서 · Ollama/vLLM API 문서  ·  [4] LG AI연구원 EXAONE 4.5 README(2026.04.09)  ·  [5] NAVER HyperCLOVA X SEED Think 보도자료(2025.12.26)†  ·  [6] 헬로티 2024.10†  ·  [7] Trueflaw LinkedIn 2022.02 · Pexraytech 협업 2024.12†  ·  [8] DNV GL×GSI 보도자료(2019.12)†  ·  탐지 수치는 합성 필름 자체 측정  ·  † 검색 요약 기준</a:t>
+              <a:t>참고  [1] Ultralytics 8.4.0 릴리스·PyPI(2026.01.14, AGPL-3.0)  ·  [2] 데일리안·CCTV뉴스 2021.07.02 · 황훈규 외 2021.02 · KISTI TRKO202200005836†  ·  [3] Anthropic 모델 문서 · Ollama/vLLM API 문서  ·  [4] LG AI연구원 EXAONE README(2026.04.09)  ·  [5] NAVER HyperCLOVA X SEED Think 보도자료(2025.12.26)†  ·  [6] 헬로티 2024.10(코드비전)†  ·  [7] Trueflaw LinkedIn 2022.02†  ·  [8] DNV GL×GSI 보도자료(2019.12)†  ·  [9] IACS UR W33 Rev.1/Corr.1(2021) §3.2·§6.1.2·§8.5  ·  탐지 수치는 합성 필름 6장 자체 측정(느슨한 매칭 기준)  ·  † 검색 요약 기준</a:t>
             </a:r>
           </a:p>
         </p:txBody>
@@ -6954,7 +6951,7 @@
                 <a:ea typeface="Pretendard"/>
                 <a:cs typeface="Pretendard"/>
               </a:rPr>
-              <a:t>내 PC에서 도는 웹앱 — 4대 기능 전 구간 동작(탐지→측정→판정→소견서→PDF→기록)</a:t>
+              <a:t>내 PC에서 도는 웹앱 — 4대 기능 전 구간 동작(탐지→측정→판정→소견서→PDF→기록) · 로컬 LLM 우선 · 자연어 검색</a:t>
             </a:r>
           </a:p>
           <a:p>
@@ -6980,7 +6977,7 @@
                 <a:ea typeface="Pretendard"/>
                 <a:cs typeface="Pretendard"/>
               </a:rPr>
-              <a:t>자동 테스트 235건 통과 · 합성 필름으로 전 과정 자동 검증</a:t>
+              <a:t>자동 테스트 281건 통과 · 합성 필름으로 전 과정 자동 검증[1]</a:t>
             </a:r>
           </a:p>
           <a:p>
@@ -7006,7 +7003,7 @@
                 <a:ea typeface="Pretendard"/>
                 <a:cs typeface="Pretendard"/>
               </a:rPr>
-              <a:t>판정식 3종 · 기준표 판본 선택(적용 판본을 판정표·PDF·기록에 기재) · 선급 보고 항목 25개 입력 필드(n/25 커버리지 표시·PDF에 W33 원문 병기·초안에 촬영 조건 반영) · 로컬 LLM 우선 · 자연어 검색</a:t>
+              <a:t>판정식 3종(누적 길이·기공 면적률은 100mm 구간을 옮겨가며 최악 구간 선택) · 기준표 판본 선택(적용 판본을 판정표·PDF·기록에 기재) · 선급 보고 항목 25개 충족률 n/25 표시(PDF에 원문 항목명 병기)</a:t>
             </a:r>
           </a:p>
         </p:txBody>
@@ -7149,7 +7146,7 @@
                 <a:ea typeface="Pretendard"/>
                 <a:cs typeface="Pretendard"/>
               </a:rPr>
-              <a:t>현직 판독원의 보고서 양식 검증 — 대체: IACS UR W33 §8 필수 항목으로 자체 검증</a:t>
+              <a:t>현직 판독원의 보고서 양식 검증 — 대체: IACS UR W33 §8 필수 항목[2]으로 자체 검증</a:t>
             </a:r>
           </a:p>
         </p:txBody>
@@ -7484,7 +7481,7 @@
                 <a:ea typeface="Pretendard"/>
                 <a:cs typeface="Pretendard"/>
               </a:rPr>
-              <a:t>취부 예방 모듈, 폰·ArUco 촬영 측정, AR 고글</a:t>
+              <a:t>취부(부재 맞대기 조립) 불량 예방 모듈, 폰 촬영 측정, AR 고글</a:t>
             </a:r>
           </a:p>
           <a:p>
@@ -7536,7 +7533,7 @@
                 <a:ea typeface="Pretendard"/>
                 <a:cs typeface="Pretendard"/>
               </a:rPr>
-              <a:t>재학습 파이프라인·초음파(UT) 판독·야드 파일럿 → 로드맵</a:t>
+              <a:t>재학습 파이프라인·초음파(UT) 판독·조선소 현장 파일럿 → 로드맵</a:t>
             </a:r>
           </a:p>
         </p:txBody>
@@ -8787,7 +8784,7 @@
                 <a:ea typeface="Pretendard"/>
                 <a:cs typeface="Pretendard"/>
               </a:rPr>
-              <a:t>균열 포함 불합격 1건 + 무결함 합격 1건을 합성 RT 필름으로 시연(실제 필름은 현장 보안 통제로 기간 내 확보 곤란). 화면의 후보 박스는 OpenCV 폴백 탐지기 출력(탐지 임계 0.5는 내부값, 화면 슬라이더는 표시 필터)</a:t>
+              <a:t>균열 포함 불합격 1건 + 무결함 합격 1건을 합성 RT 필름으로 시연(실제 필름은 현장 보안 통제로 기간 내 확보 곤란). 화면의 후보 박스는 폴백 탐지기 출력이며, 측정에 쓴 신뢰도 기준 0.5는 프로그램 내부값(화면 슬라이더는 표시 필터)</a:t>
             </a:r>
           </a:p>
         </p:txBody>
@@ -8881,7 +8878,7 @@
         <p:spPr>
           <a:xfrm>
             <a:off x="13213080" y="5193792"/>
-            <a:ext cx="4142231" cy="2816717"/>
+            <a:ext cx="4142231" cy="3447287"/>
           </a:xfrm>
           <a:prstGeom prst="rect">
             <a:avLst/>
@@ -8929,7 +8926,7 @@
                 <a:ea typeface="Pretendard"/>
                 <a:cs typeface="Pretendard"/>
               </a:rPr>
-              <a:t>합성 RT 필름 · AI 후보 오버레이(주황) · 클릭 도구 · 스케일 확정 — Streamlit 앱 실제 화면</a:t>
+              <a:t>앱 실제 화면(2026.09.09판) — 합성 RT 필름 · AI 후보 오버레이(주황) · 클릭 도구. 사이드바: 기준표 판본·100mm 구간·보고 항목 충족률</a:t>
             </a:r>
           </a:p>
         </p:txBody>
@@ -8970,7 +8967,7 @@
                 <a:ea typeface="Pretendard"/>
                 <a:cs typeface="Pretendard"/>
               </a:rPr>
-              <a:t>참고  [1] rt-workbench 저장소(2026.09 — 자동 테스트 tests/ · E2E scripts/demo_e2e.py · 탐지 측정 scripts/eval_detector.py)  ·  [2] IACS UR W33 Rev.1/Corr.1(2021) §8.2·8.5  ·  화면은 앱 실제 캡처(합성 필름)</a:t>
+              <a:t>참고  [1] rt-workbench 저장소(2026.09 — 자동 테스트 tests/ · E2E scripts/demo_e2e.py · 탐지 측정 scripts/eval_detector.py)  ·  [2] IACS UR W33 Rev.1/Corr.1(2021) §8.2·§8.5  ·  화면은 앱 실제 캡처(2026.09.09판: 사이드바에 기준표 판본·100mm 평가 구간·선급 보고 항목 충족률)</a:t>
             </a:r>
           </a:p>
         </p:txBody>
@@ -9782,7 +9779,7 @@
                 <a:ea typeface="Pretendard"/>
                 <a:cs typeface="Pretendard"/>
               </a:rPr>
-              <a:t>AI Hub 71761 · NIA 2023</a:t>
+              <a:t>AI Hub 71761 · NIA 2023[3]</a:t>
             </a:r>
           </a:p>
         </p:txBody>
@@ -9795,8 +9792,8 @@
         </p:nvSpPr>
         <p:spPr>
           <a:xfrm>
-            <a:off x="5074920" y="2971800"/>
-            <a:ext cx="3560064" cy="1097280"/>
+            <a:off x="5074920" y="2953511"/>
+            <a:ext cx="3560064" cy="1280160"/>
           </a:xfrm>
           <a:prstGeom prst="rect">
             <a:avLst/>
@@ -9811,19 +9808,19 @@
           <a:p>
             <a:pPr algn="l">
               <a:lnSpc>
-                <a:spcPct val="108000"/>
-              </a:lnSpc>
-            </a:pPr>
-            <a:r>
-              <a:rPr sz="1050" b="0" i="0">
-                <a:solidFill>
-                  <a:srgbClr val="1F2A44"/>
-                </a:solidFill>
-                <a:latin typeface="Pretendard"/>
-                <a:ea typeface="Pretendard"/>
-                <a:cs typeface="Pretendard"/>
-              </a:rPr>
-              <a:t>「창원 지역 특화산업 고도화 및 디지털 전환 촉진을 위한 용접 AI 학습 데이터」 — 강재(RT·VT)·알루미늄(RT) 용접 사진 144,019장(RT 70,000장; 활용 신청 시 페이지에서 확인한 수치), 결함 영역 폴리곤 라벨(JSON), 공식 예시 모델 YOLOv5x-seg</a:t>
+                <a:spcPct val="106000"/>
+              </a:lnSpc>
+            </a:pPr>
+            <a:r>
+              <a:rPr sz="1000" b="0" i="0">
+                <a:solidFill>
+                  <a:srgbClr val="1F2A44"/>
+                </a:solidFill>
+                <a:latin typeface="Pretendard"/>
+                <a:ea typeface="Pretendard"/>
+                <a:cs typeface="Pretendard"/>
+              </a:rPr>
+              <a:t>「창원 지역 특화산업 고도화 및 디지털 전환 촉진을 위한 용접 AI 학습 데이터」 — 강재(RT·VT=육안검사)·알루미늄(RT) 용접 사진 144,019장(이 중 RT 70,000장; 활용 신청 시 페이지에서 확인한 수치), 결함 영역 폴리곤 라벨(JSON), 공식 예시 모델 YOLOv5x-seg</a:t>
             </a:r>
           </a:p>
         </p:txBody>
@@ -9979,7 +9976,7 @@
                 <a:ea typeface="Pretendard"/>
                 <a:cs typeface="Pretendard"/>
               </a:rPr>
-              <a:t>GitHub 공개 · Perri 외 2022</a:t>
+              <a:t>GitHub 공개 · Totino 외 2022[2]</a:t>
             </a:r>
           </a:p>
         </p:txBody>
@@ -9992,8 +9989,8 @@
         </p:nvSpPr>
         <p:spPr>
           <a:xfrm>
-            <a:off x="9457944" y="2971800"/>
-            <a:ext cx="3560064" cy="1097280"/>
+            <a:off x="9457944" y="2953511"/>
+            <a:ext cx="3560064" cy="1280160"/>
           </a:xfrm>
           <a:prstGeom prst="rect">
             <a:avLst/>
@@ -10008,19 +10005,19 @@
           <a:p>
             <a:pPr algn="l">
               <a:lnSpc>
-                <a:spcPct val="108000"/>
-              </a:lnSpc>
-            </a:pPr>
-            <a:r>
-              <a:rPr sz="1050" b="0" i="0">
-                <a:solidFill>
-                  <a:srgbClr val="1F2A44"/>
-                </a:solidFill>
-                <a:latin typeface="Pretendard"/>
-                <a:ea typeface="Pretendard"/>
-                <a:cs typeface="Pretendard"/>
-              </a:rPr>
-              <a:t>224×224(공칭) 조각 사진 24,407장 · 4종 분류(균열 7,635 · 기공 6,320 · 용입부족 4,452 · 정상 6,000 — 종류 이름 대응은 문헌 기준, 원저자 확인 예정) — 결함 위치 박스 없음, 2000×8640 산업 원본에서 잘라낸 조각, 라이선스 파일 없음(논문 인용 의무)</a:t>
+                <a:spcPct val="106000"/>
+              </a:lnSpc>
+            </a:pPr>
+            <a:r>
+              <a:rPr sz="1000" b="0" i="0">
+                <a:solidFill>
+                  <a:srgbClr val="1F2A44"/>
+                </a:solidFill>
+                <a:latin typeface="Pretendard"/>
+                <a:ea typeface="Pretendard"/>
+                <a:cs typeface="Pretendard"/>
+              </a:rPr>
+              <a:t>224×224(문서상 규격) 조각 사진 24,407장. 4종 분류: 균열 7,635 · 기공(용접 속 기포 구멍) 6,320 · 용입부족 4,452 · 정상 6,000(종류 이름 대응은 문헌 기준, 원저자 확인 예정). 결함 위치 박스 없음, 2000×8640 산업 원본에서 잘라낸 조각</a:t>
             </a:r>
           </a:p>
         </p:txBody>
@@ -10176,7 +10173,7 @@
                 <a:ea typeface="Pretendard"/>
                 <a:cs typeface="Pretendard"/>
               </a:rPr>
-              <a:t>Mery 외 2015 · BAM 제공</a:t>
+              <a:t>Mery 외 2015[1] · BAM 제공</a:t>
             </a:r>
           </a:p>
         </p:txBody>
@@ -10189,8 +10186,8 @@
         </p:nvSpPr>
         <p:spPr>
           <a:xfrm>
-            <a:off x="13840968" y="2971800"/>
-            <a:ext cx="3560064" cy="1097280"/>
+            <a:off x="13840968" y="2953511"/>
+            <a:ext cx="3560064" cy="1280160"/>
           </a:xfrm>
           <a:prstGeom prst="rect">
             <a:avLst/>
@@ -10205,19 +10202,19 @@
           <a:p>
             <a:pPr algn="l">
               <a:lnSpc>
-                <a:spcPct val="108000"/>
-              </a:lnSpc>
-            </a:pPr>
-            <a:r>
-              <a:rPr sz="1050" b="0" i="0">
-                <a:solidFill>
-                  <a:srgbClr val="1F2A44"/>
-                </a:solidFill>
-                <a:latin typeface="Pretendard"/>
-                <a:ea typeface="Pretendard"/>
-                <a:cs typeface="Pretendard"/>
-              </a:rPr>
-              <a:t>3시리즈 88장 — W0001 10장 + W0002 정답 마스크(결함 641개 박스·이진 GT), W0003 BAM 라운드로빈 필름 68장(논문 표 기준, 본문은 67장; ISO 17636-1 A급 촬영, ISO 14096-2 DB급 스캔) · 연구·교육 목적만</a:t>
+                <a:spcPct val="106000"/>
+              </a:lnSpc>
+            </a:pPr>
+            <a:r>
+              <a:rPr sz="1000" b="0" i="0">
+                <a:solidFill>
+                  <a:srgbClr val="1F2A44"/>
+                </a:solidFill>
+                <a:latin typeface="Pretendard"/>
+                <a:ea typeface="Pretendard"/>
+                <a:cs typeface="Pretendard"/>
+              </a:rPr>
+              <a:t>3시리즈 88장 — W0001 원본 10장 + W0002 정답 마스크 10장(결함 641개의 박스·흑백 정답 이미지), W0003 독일 BAM 연구소의 기관 간 비교시험 필름 68장(논문 표 기준, 본문은 67장; 촬영 규격 ISO 17636-1 A급, 스캔 규격 ISO 14096-2 DB급) · 연구·교육 목적만</a:t>
             </a:r>
           </a:p>
         </p:txBody>
@@ -10300,7 +10297,7 @@
                 <a:ea typeface="Pretendard"/>
                 <a:cs typeface="Pretendard"/>
               </a:rPr>
-              <a:t>3종 모두 실존 확인(수치는 논문·README·신청 확인 기준). AI Hub 폴리곤 라벨은 YOLO 박스로 변환, RIAWELC는 위치 정보가 없어 분류 사전학습에만 사용. AI Hub는 내국인 활용 신청·승인 필요·국외 반출 금지·NIA 출처 표기 의무, GDXray는 상업 이용 금지, RIAWELC는 공개 분할에 학습·테스트 중복이 있어 자체 재분할</a:t>
+              <a:t>3종 모두 실존 확인(수치는 논문·README·신청 확인 기준). AI Hub 폴리곤 라벨은 YOLO 박스로 변환, RIAWELC는 위치 정보가 없어 분류 사전학습에만 사용. AI Hub는 내국인 활용 신청·승인 필요·국외 반출 금지·출처 표기 의무[3], GDXray는 상업 이용 금지[1], RIAWELC는 공개된 학습·테스트 나눔에 같은 원본의 조각이 섞여 있어 원본 단위로 다시 나눠 쓴다[2]</a:t>
             </a:r>
           </a:p>
         </p:txBody>
@@ -10428,12 +10425,12 @@
           </a:bodyPr>
           <a:lstStyle/>
           <a:p>
-            <a:pPr marL="182562" indent="-182562">
-              <a:lnSpc>
-                <a:spcPct val="114000"/>
+            <a:pPr marL="169417" indent="-169417">
+              <a:lnSpc>
+                <a:spcPct val="112000"/>
               </a:lnSpc>
               <a:spcAft>
-                <a:spcPts val="800"/>
+                <a:spcPts val="600"/>
               </a:spcAft>
               <a:buClr>
                 <a:srgbClr val="4FD0F5"/>
@@ -10442,7 +10439,7 @@
               <a:buChar char="•"/>
             </a:pPr>
             <a:r>
-              <a:rPr sz="1250" b="1" i="0">
+              <a:rPr sz="1160" b="1" i="0">
                 <a:solidFill>
                   <a:srgbClr val="1F2A44"/>
                 </a:solidFill>
@@ -10453,46 +10450,46 @@
               <a:t>공개 데이터</a:t>
             </a:r>
             <a:r>
-              <a:rPr sz="1250" b="0" i="0">
-                <a:solidFill>
-                  <a:srgbClr val="1F2A44"/>
-                </a:solidFill>
-                <a:latin typeface="Pretendard"/>
-                <a:ea typeface="Pretendard"/>
-                <a:cs typeface="Pretendard"/>
-              </a:rPr>
-              <a:t>: AI Hub 활용 신청(내국인·승인 수일) — 일부 검색 결과는 이 데이터셋을 국방데이터로 분류해 군 담당자 별도 승인이 필요하다고 언급하므로 </a:t>
-            </a:r>
-            <a:r>
-              <a:rPr sz="1250" b="1" i="0">
-                <a:solidFill>
-                  <a:srgbClr val="1F2A44"/>
-                </a:solidFill>
-                <a:latin typeface="Pretendard"/>
-                <a:ea typeface="Pretendard"/>
-                <a:cs typeface="Pretendard"/>
-              </a:rPr>
-              <a:t>신청 시 접근 가능 여부를 최우선 확인</a:t>
-            </a:r>
-            <a:r>
-              <a:rPr sz="1250" b="0" i="0">
-                <a:solidFill>
-                  <a:srgbClr val="1F2A44"/>
-                </a:solidFill>
-                <a:latin typeface="Pretendard"/>
-                <a:ea typeface="Pretendard"/>
-                <a:cs typeface="Pretendard"/>
-              </a:rPr>
-              <a:t>(불가 시 RIAWELC+GDXray+SWRD로 전환). RIAWELC·GDXray는 직접 다운로드</a:t>
-            </a:r>
-          </a:p>
-          <a:p>
-            <a:pPr marL="182562" indent="-182562">
-              <a:lnSpc>
-                <a:spcPct val="114000"/>
+              <a:rPr sz="1160" b="0" i="0">
+                <a:solidFill>
+                  <a:srgbClr val="1F2A44"/>
+                </a:solidFill>
+                <a:latin typeface="Pretendard"/>
+                <a:ea typeface="Pretendard"/>
+                <a:cs typeface="Pretendard"/>
+              </a:rPr>
+              <a:t>: AI Hub는 내국인 활용 신청(승인 수일). 단, 일부 검색 결과는 이 데이터셋을 국방데이터로 분류해 군 담당자의 별도 승인이 필요하다고 하므로 </a:t>
+            </a:r>
+            <a:r>
+              <a:rPr sz="1160" b="1" i="0">
+                <a:solidFill>
+                  <a:srgbClr val="1F2A44"/>
+                </a:solidFill>
+                <a:latin typeface="Pretendard"/>
+                <a:ea typeface="Pretendard"/>
+                <a:cs typeface="Pretendard"/>
+              </a:rPr>
+              <a:t>신청 시 접근 가능 여부를 먼저 확인</a:t>
+            </a:r>
+            <a:r>
+              <a:rPr sz="1160" b="0" i="0">
+                <a:solidFill>
+                  <a:srgbClr val="1F2A44"/>
+                </a:solidFill>
+                <a:latin typeface="Pretendard"/>
+                <a:ea typeface="Pretendard"/>
+                <a:cs typeface="Pretendard"/>
+              </a:rPr>
+              <a:t>한다. RIAWELC·GDXray는 직접 내려받는다</a:t>
+            </a:r>
+          </a:p>
+          <a:p>
+            <a:pPr marL="169417" indent="-169417">
+              <a:lnSpc>
+                <a:spcPct val="112000"/>
               </a:lnSpc>
               <a:spcAft>
-                <a:spcPts val="800"/>
+                <a:spcPts val="600"/>
               </a:spcAft>
               <a:buClr>
                 <a:srgbClr val="4FD0F5"/>
@@ -10501,7 +10498,7 @@
               <a:buChar char="•"/>
             </a:pPr>
             <a:r>
-              <a:rPr sz="1250" b="1" i="0">
+              <a:rPr sz="1160" b="1" i="0">
                 <a:solidFill>
                   <a:srgbClr val="1F2A44"/>
                 </a:solidFill>
@@ -10512,24 +10509,24 @@
               <a:t>합성 데이터</a:t>
             </a:r>
             <a:r>
-              <a:rPr sz="1250" b="0" i="0">
-                <a:solidFill>
-                  <a:srgbClr val="1F2A44"/>
-                </a:solidFill>
-                <a:latin typeface="Pretendard"/>
-                <a:ea typeface="Pretendard"/>
-                <a:cs typeface="Pretendard"/>
-              </a:rPr>
-              <a:t>: 개발·시연용 합성 RT 필름 생성기(IQI·납마커·결함 심기) — 프로토타입에 포함, 검출률·오탐 측정에 사용</a:t>
-            </a:r>
-          </a:p>
-          <a:p>
-            <a:pPr marL="182562" indent="-182562">
-              <a:lnSpc>
-                <a:spcPct val="114000"/>
+              <a:rPr sz="1160" b="0" i="0">
+                <a:solidFill>
+                  <a:srgbClr val="1F2A44"/>
+                </a:solidFill>
+                <a:latin typeface="Pretendard"/>
+                <a:ea typeface="Pretendard"/>
+                <a:cs typeface="Pretendard"/>
+              </a:rPr>
+              <a:t>: 개발·시연용 합성 RT 필름 생성기(기준물·결함 심기) — 프로토타입에 포함, 탐지 성능 측정에 사용</a:t>
+            </a:r>
+          </a:p>
+          <a:p>
+            <a:pPr marL="169417" indent="-169417">
+              <a:lnSpc>
+                <a:spcPct val="112000"/>
               </a:lnSpc>
               <a:spcAft>
-                <a:spcPts val="800"/>
+                <a:spcPts val="600"/>
               </a:spcAft>
               <a:buClr>
                 <a:srgbClr val="4FD0F5"/>
@@ -10538,7 +10535,7 @@
               <a:buChar char="•"/>
             </a:pPr>
             <a:r>
-              <a:rPr sz="1250" b="1" i="0">
+              <a:rPr sz="1160" b="1" i="0">
                 <a:solidFill>
                   <a:srgbClr val="1F2A44"/>
                 </a:solidFill>
@@ -10549,7 +10546,7 @@
               <a:t>자체 축적</a:t>
             </a:r>
             <a:r>
-              <a:rPr sz="1250" b="0" i="0">
+              <a:rPr sz="1160" b="0" i="0">
                 <a:solidFill>
                   <a:srgbClr val="1F2A44"/>
                 </a:solidFill>
@@ -10561,12 +10558,12 @@
             </a:r>
           </a:p>
           <a:p>
-            <a:pPr marL="182562" indent="-182562">
-              <a:lnSpc>
-                <a:spcPct val="114000"/>
+            <a:pPr marL="169417" indent="-169417">
+              <a:lnSpc>
+                <a:spcPct val="112000"/>
               </a:lnSpc>
               <a:spcAft>
-                <a:spcPts val="800"/>
+                <a:spcPts val="600"/>
               </a:spcAft>
               <a:buClr>
                 <a:srgbClr val="4FD0F5"/>
@@ -10575,7 +10572,7 @@
               <a:buChar char="•"/>
             </a:pPr>
             <a:r>
-              <a:rPr sz="1250" b="1" i="0">
+              <a:rPr sz="1160" b="1" i="0">
                 <a:solidFill>
                   <a:srgbClr val="1F2A44"/>
                 </a:solidFill>
@@ -10586,15 +10583,15 @@
               <a:t>필름 스캔 전제</a:t>
             </a:r>
             <a:r>
-              <a:rPr sz="1250" b="0" i="0">
-                <a:solidFill>
-                  <a:srgbClr val="1F2A44"/>
-                </a:solidFill>
-                <a:latin typeface="Pretendard"/>
-                <a:ea typeface="Pretendard"/>
-                <a:cs typeface="Pretendard"/>
-              </a:rPr>
-              <a:t>: ISO 14096-2 등급(DS/DB/DA) 디지타이저는 3만 달러급 장비(VIDAR NDT PRO 리셀러 가격 기준[8]) → 조직 공용 장비 또는 국내 RT 필름 스캔 서비스로 확보</a:t>
+              <a:rPr sz="1160" b="0" i="0">
+                <a:solidFill>
+                  <a:srgbClr val="1F2A44"/>
+                </a:solidFill>
+                <a:latin typeface="Pretendard"/>
+                <a:ea typeface="Pretendard"/>
+                <a:cs typeface="Pretendard"/>
+              </a:rPr>
+              <a:t>: 필름 스캐너(디지타이저; 스캔 화질 규격 ISO 14096-2의 DS/DB/DA 등급)는 3만 달러급 장비(판매점 가격 기준[8]) → 조직 공용 장비 또는 국내 RT 필름 스캔 서비스로 확보</a:t>
             </a:r>
           </a:p>
         </p:txBody>
@@ -10722,12 +10719,12 @@
           </a:bodyPr>
           <a:lstStyle/>
           <a:p>
-            <a:pPr marL="182562" indent="-182562">
-              <a:lnSpc>
-                <a:spcPct val="114000"/>
+            <a:pPr marL="169417" indent="-169417">
+              <a:lnSpc>
+                <a:spcPct val="112000"/>
               </a:lnSpc>
               <a:spcAft>
-                <a:spcPts val="800"/>
+                <a:spcPts val="600"/>
               </a:spcAft>
               <a:buClr>
                 <a:srgbClr val="4FD0F5"/>
@@ -10736,7 +10733,7 @@
               <a:buChar char="•"/>
             </a:pPr>
             <a:r>
-              <a:rPr sz="1250" b="0" i="0">
+              <a:rPr sz="1160" b="0" i="0">
                 <a:solidFill>
                   <a:srgbClr val="1F2A44"/>
                 </a:solidFill>
@@ -10747,35 +10744,35 @@
               <a:t>AI Hub 승인 지연·제공 제한 시 </a:t>
             </a:r>
             <a:r>
-              <a:rPr sz="1250" b="1" i="0">
-                <a:solidFill>
-                  <a:srgbClr val="1F2A44"/>
-                </a:solidFill>
-                <a:latin typeface="Pretendard"/>
-                <a:ea typeface="Pretendard"/>
-                <a:cs typeface="Pretendard"/>
-              </a:rPr>
-              <a:t>RIAWELC 사전학습 + GDXray W0001·W0002(결함 641개 박스+GT) 탐지 검증</a:t>
-            </a:r>
-            <a:r>
-              <a:rPr sz="1250" b="0" i="0">
-                <a:solidFill>
-                  <a:srgbClr val="1F2A44"/>
-                </a:solidFill>
-                <a:latin typeface="Pretendard"/>
-                <a:ea typeface="Pretendard"/>
-                <a:cs typeface="Pretendard"/>
-              </a:rPr>
-              <a:t>으로 대체 — 분류→탐지 전이의 한계는 수치로 공개. 폴리곤 라벨 공개 데이터 SWRD(2025, 3,600장 이상)[7]도 후보(라이선스 확인 후)</a:t>
-            </a:r>
-          </a:p>
-          <a:p>
-            <a:pPr marL="182562" indent="-182562">
-              <a:lnSpc>
-                <a:spcPct val="114000"/>
+              <a:rPr sz="1160" b="1" i="0">
+                <a:solidFill>
+                  <a:srgbClr val="1F2A44"/>
+                </a:solidFill>
+                <a:latin typeface="Pretendard"/>
+                <a:ea typeface="Pretendard"/>
+                <a:cs typeface="Pretendard"/>
+              </a:rPr>
+              <a:t>RIAWELC 사전학습 + GDXray W0001·W0002(결함 641개 박스+정답) 탐지 검증</a:t>
+            </a:r>
+            <a:r>
+              <a:rPr sz="1160" b="0" i="0">
+                <a:solidFill>
+                  <a:srgbClr val="1F2A44"/>
+                </a:solidFill>
+                <a:latin typeface="Pretendard"/>
+                <a:ea typeface="Pretendard"/>
+                <a:cs typeface="Pretendard"/>
+              </a:rPr>
+              <a:t>으로 대체. 폴리곤 라벨 공개 데이터 SWRD(2025, 3,600장 이상)[7]도 후보(라이선스 확인 후)</a:t>
+            </a:r>
+          </a:p>
+          <a:p>
+            <a:pPr marL="169417" indent="-169417">
+              <a:lnSpc>
+                <a:spcPct val="112000"/>
               </a:lnSpc>
               <a:spcAft>
-                <a:spcPts val="800"/>
+                <a:spcPts val="600"/>
               </a:spcAft>
               <a:buClr>
                 <a:srgbClr val="4FD0F5"/>
@@ -10784,7 +10781,7 @@
               <a:buChar char="•"/>
             </a:pPr>
             <a:r>
-              <a:rPr sz="1250" b="0" i="0">
+              <a:rPr sz="1160" b="0" i="0">
                 <a:solidFill>
                   <a:srgbClr val="1F2A44"/>
                 </a:solidFill>
@@ -10795,24 +10792,24 @@
               <a:t>실제 조선소 필름은 보안 통제로 기간 내 확보 곤란 → 공개 데이터 + 합성 필름으로 시연하고 </a:t>
             </a:r>
             <a:r>
-              <a:rPr sz="1250" b="1" i="0">
-                <a:solidFill>
-                  <a:srgbClr val="1F2A44"/>
-                </a:solidFill>
-                <a:latin typeface="Pretendard"/>
-                <a:ea typeface="Pretendard"/>
-                <a:cs typeface="Pretendard"/>
-              </a:rPr>
-              <a:t>야드 파일럿 필요를 명시</a:t>
-            </a:r>
-          </a:p>
-          <a:p>
-            <a:pPr marL="182562" indent="-182562">
-              <a:lnSpc>
-                <a:spcPct val="114000"/>
+              <a:rPr sz="1160" b="1" i="0">
+                <a:solidFill>
+                  <a:srgbClr val="1F2A44"/>
+                </a:solidFill>
+                <a:latin typeface="Pretendard"/>
+                <a:ea typeface="Pretendard"/>
+                <a:cs typeface="Pretendard"/>
+              </a:rPr>
+              <a:t>현장 파일럿 필요를 명시</a:t>
+            </a:r>
+          </a:p>
+          <a:p>
+            <a:pPr marL="169417" indent="-169417">
+              <a:lnSpc>
+                <a:spcPct val="112000"/>
               </a:lnSpc>
               <a:spcAft>
-                <a:spcPts val="800"/>
+                <a:spcPts val="600"/>
               </a:spcAft>
               <a:buClr>
                 <a:srgbClr val="4FD0F5"/>
@@ -10821,7 +10818,7 @@
               <a:buChar char="•"/>
             </a:pPr>
             <a:r>
-              <a:rPr sz="1250" b="0" i="0">
+              <a:rPr sz="1160" b="0" i="0">
                 <a:solidFill>
                   <a:srgbClr val="1F2A44"/>
                 </a:solidFill>
@@ -10832,7 +10829,7 @@
               <a:t>성능 목표는 </a:t>
             </a:r>
             <a:r>
-              <a:rPr sz="1250" b="1" i="0">
+              <a:rPr sz="1160" b="1" i="0">
                 <a:solidFill>
                   <a:srgbClr val="1F2A44"/>
                 </a:solidFill>
@@ -10843,18 +10840,44 @@
               <a:t>검출률(재현율) 우선</a:t>
             </a:r>
             <a:r>
-              <a:rPr sz="1250" b="0" i="0">
-                <a:solidFill>
-                  <a:srgbClr val="1F2A44"/>
-                </a:solidFill>
-                <a:latin typeface="Pretendard"/>
-                <a:ea typeface="Pretendard"/>
-                <a:cs typeface="Pretendard"/>
-              </a:rPr>
-              <a:t>: 채택 운영점에서 검출률 ≥ 95%·장당 오탐 ≤ 5건(AI Hub RT 테스트셋), mAP는 보조 지표. 문헌은 정제셋 mAP@0.5 약 93~97%[6][7], 강관 X-ray 세트는 99%[7]까지 보고하지만 데이터셋 간 제로샷 전이는 macro-F1 약 64%로 급락[4] → </a:t>
-            </a:r>
-            <a:r>
-              <a:rPr sz="1250" b="1" i="0">
+              <a:rPr sz="1160" b="0" i="0">
+                <a:solidFill>
+                  <a:srgbClr val="1F2A44"/>
+                </a:solidFill>
+                <a:latin typeface="Pretendard"/>
+                <a:ea typeface="Pretendard"/>
+                <a:cs typeface="Pretendard"/>
+              </a:rPr>
+              <a:t>: 실제로 쓸 신뢰도 기준에서 검출률 ≥ 95%, 장당 오탐 ≤ 5건(AI Hub RT 테스트셋). mAP(탐지 정확도 종합 지표)는 보조</a:t>
+            </a:r>
+          </a:p>
+          <a:p>
+            <a:pPr marL="169417" indent="-169417">
+              <a:lnSpc>
+                <a:spcPct val="112000"/>
+              </a:lnSpc>
+              <a:spcAft>
+                <a:spcPts val="600"/>
+              </a:spcAft>
+              <a:buClr>
+                <a:srgbClr val="4FD0F5"/>
+              </a:buClr>
+              <a:buFont typeface="Arial"/>
+              <a:buChar char="•"/>
+            </a:pPr>
+            <a:r>
+              <a:rPr sz="1160" b="0" i="0">
+                <a:solidFill>
+                  <a:srgbClr val="1F2A44"/>
+                </a:solidFill>
+                <a:latin typeface="Pretendard"/>
+                <a:ea typeface="Pretendard"/>
+                <a:cs typeface="Pretendard"/>
+              </a:rPr>
+              <a:t>문헌은 정제된 데이터셋에서 mAP@0.5 약 93~97%[6][7], 강관 X-ray 세트는 99%[7]까지 보고한다. 그러나 학습과 다른 데이터셋에 그대로 적용하면 분류 과제에서도 macro-F1 약 64%로 급락하고[4], 정확도도 98.75→90.3→75.8%로 떨어진 보고가 있다[5] → </a:t>
+            </a:r>
+            <a:r>
+              <a:rPr sz="1160" b="1" i="0">
                 <a:solidFill>
                   <a:srgbClr val="1F2A44"/>
                 </a:solidFill>
@@ -10903,7 +10926,7 @@
                 <a:ea typeface="Pretendard"/>
                 <a:cs typeface="Pretendard"/>
               </a:rPr>
-              <a:t>참고  [1] Mery 외, J Nondestruct Eval 34:42(2015)  ·  [2] RIAWELC GitHub README · Totino·Spagnolo·Perri 2022/2023  ·  [3] AI Hub 71761 활용 신청 확인 자료·이용정책†  ·  [4] WeldVGG, Sensors 25(19):6183(2025)  ·  [5] Palma-Ramírez 외, Heliyon 2024 e30590(정확도 98.75/90.3/75.8%)  ·  [6] Lu 외, J Nondestruct Eval 44:91(2025, GDXray mAP@0.5 97.2%)  ·  [7] MGDR-YOLO, Sensors 2026 · DSF-YOLO, Sci Rep 2025 · SWRD, J Nondestruct Eval 2025  ·  [8] ISO 14096-2 · VIDAR NDT PRO 리셀러 가격†  ·  † 검색 요약 기준</a:t>
+              <a:t>참고  [1] Mery 외, J Nondestruct Eval 34:42(2015)  ·  [2] RIAWELC GitHub README · Totino·Spagnolo·Perri 2022/2023†  ·  [3] AI Hub 71761 활용 신청 확인 자료·이용정책†  ·  [4] WeldVGG, Sensors 25(19):6183(2025)†  ·  [5] Palma-Ramírez 외, Heliyon 2024 e30590†  ·  [6] Lu 외, J Nondestruct Eval 44:91(2025, GDXray mAP@0.5 97.2%)†  ·  [7] MGDR-YOLO, Sensors 2026 · DSF-YOLO, Sci Rep 2025 · SWRD, J Nondestruct Eval 2025†  ·  [8] VIDAR NDT PRO 판매점 가격†  ·  † 검색 요약 기준</a:t>
             </a:r>
           </a:p>
         </p:txBody>
@@ -11607,12 +11630,12 @@
           </a:bodyPr>
           <a:lstStyle/>
           <a:p>
-            <a:pPr marL="192785" indent="-192785">
-              <a:lnSpc>
-                <a:spcPct val="114000"/>
+            <a:pPr marL="175260" indent="-175260">
+              <a:lnSpc>
+                <a:spcPct val="112000"/>
               </a:lnSpc>
               <a:spcAft>
-                <a:spcPts val="900"/>
+                <a:spcPts val="600"/>
               </a:spcAft>
               <a:buClr>
                 <a:srgbClr val="4FD0F5"/>
@@ -11621,7 +11644,7 @@
               <a:buChar char="•"/>
             </a:pPr>
             <a:r>
-              <a:rPr sz="1320" b="0" i="0">
+              <a:rPr sz="1200" b="0" i="0">
                 <a:solidFill>
                   <a:srgbClr val="1F2A44"/>
                 </a:solidFill>
@@ -11632,7 +11655,7 @@
               <a:t>판독원의 </a:t>
             </a:r>
             <a:r>
-              <a:rPr sz="1320" b="1" i="0">
+              <a:rPr sz="1200" b="1" i="0">
                 <a:solidFill>
                   <a:srgbClr val="1F2A44"/>
                 </a:solidFill>
@@ -11643,24 +11666,24 @@
               <a:t>문서·서류 검색 노동 제거</a:t>
             </a:r>
             <a:r>
-              <a:rPr sz="1320" b="0" i="0">
-                <a:solidFill>
-                  <a:srgbClr val="1F2A44"/>
-                </a:solidFill>
-                <a:latin typeface="Pretendard"/>
-                <a:ea typeface="Pretendard"/>
-                <a:cs typeface="Pretendard"/>
-              </a:rPr>
-              <a:t> → 자격자가 판독에 집중. 인력이 줄어드는 국면[2][3]에서 1인당 처리량 향상 — 앱이 기록하는 소요시간과 수기 기준선으로 실측</a:t>
-            </a:r>
-          </a:p>
-          <a:p>
-            <a:pPr marL="192785" indent="-192785">
-              <a:lnSpc>
-                <a:spcPct val="114000"/>
+              <a:rPr sz="1200" b="0" i="0">
+                <a:solidFill>
+                  <a:srgbClr val="1F2A44"/>
+                </a:solidFill>
+                <a:latin typeface="Pretendard"/>
+                <a:ea typeface="Pretendard"/>
+                <a:cs typeface="Pretendard"/>
+              </a:rPr>
+              <a:t> → 자격자가 판독에 집중. 인력이 줄고[2] 숙련자 확보가 어려운[3] 국면에서 1인당 처리량 향상(앱이 기록한 소요시간과 수기 기준선으로 실측)</a:t>
+            </a:r>
+          </a:p>
+          <a:p>
+            <a:pPr marL="175260" indent="-175260">
+              <a:lnSpc>
+                <a:spcPct val="112000"/>
               </a:lnSpc>
               <a:spcAft>
-                <a:spcPts val="900"/>
+                <a:spcPts val="600"/>
               </a:spcAft>
               <a:buClr>
                 <a:srgbClr val="4FD0F5"/>
@@ -11669,7 +11692,7 @@
               <a:buChar char="•"/>
             </a:pPr>
             <a:r>
-              <a:rPr sz="1320" b="0" i="0">
+              <a:rPr sz="1200" b="0" i="0">
                 <a:solidFill>
                   <a:srgbClr val="1F2A44"/>
                 </a:solidFill>
@@ -11680,7 +11703,7 @@
               <a:t>검사 기록의 </a:t>
             </a:r>
             <a:r>
-              <a:rPr sz="1320" b="1" i="0">
+              <a:rPr sz="1200" b="1" i="0">
                 <a:solidFill>
                   <a:srgbClr val="1F2A44"/>
                 </a:solidFill>
@@ -11691,24 +11714,24 @@
               <a:t>디지털 자산화</a:t>
             </a:r>
             <a:r>
-              <a:rPr sz="1320" b="0" i="0">
-                <a:solidFill>
-                  <a:srgbClr val="1F2A44"/>
-                </a:solidFill>
-                <a:latin typeface="Pretendard"/>
-                <a:ea typeface="Pretendard"/>
-                <a:cs typeface="Pretendard"/>
-              </a:rPr>
-              <a:t>: 선급 규칙(IACS UR W33 §8)의 보고 항목(일반 13·RT 12)을 검사 컨텍스트 필드와 전용 입력 필드 25개로 모두 수용해 구조화 저장·PDF 기재(입력 커버리지 n/25 표시, W33 원문 항목명 병기). 조건 검색(블록·용접부·유형·합부·기간)과 CSV 반출은 요약 열 기준 → 선주·선급 요청 시 서류 수색을 조회로 대체</a:t>
-            </a:r>
-          </a:p>
-          <a:p>
-            <a:pPr marL="192785" indent="-192785">
-              <a:lnSpc>
-                <a:spcPct val="114000"/>
+              <a:rPr sz="1200" b="0" i="0">
+                <a:solidFill>
+                  <a:srgbClr val="1F2A44"/>
+                </a:solidFill>
+                <a:latin typeface="Pretendard"/>
+                <a:ea typeface="Pretendard"/>
+                <a:cs typeface="Pretendard"/>
+              </a:rPr>
+              <a:t>: 선급 규칙(IACS UR W33 §8)의 보고 항목 25개(일반 13·RT 12)를 입력 필드로 갖추고 충족률 n/25를 표시, PDF에는 규칙 원문 항목명을 함께 적는다</a:t>
+            </a:r>
+          </a:p>
+          <a:p>
+            <a:pPr marL="175260" indent="-175260">
+              <a:lnSpc>
+                <a:spcPct val="112000"/>
               </a:lnSpc>
               <a:spcAft>
-                <a:spcPts val="900"/>
+                <a:spcPts val="600"/>
               </a:spcAft>
               <a:buClr>
                 <a:srgbClr val="4FD0F5"/>
@@ -11717,35 +11740,35 @@
               <a:buChar char="•"/>
             </a:pPr>
             <a:r>
-              <a:rPr sz="1320" b="1" i="0">
-                <a:solidFill>
-                  <a:srgbClr val="1F2A44"/>
-                </a:solidFill>
-                <a:latin typeface="Pretendard"/>
-                <a:ea typeface="Pretendard"/>
-                <a:cs typeface="Pretendard"/>
-              </a:rPr>
-              <a:t>2028.01 시행 IACS 신규칙의 100mm 판독 단위를 이미 기본값으로 구현</a:t>
-            </a:r>
-            <a:r>
-              <a:rPr sz="1320" b="0" i="0">
-                <a:solidFill>
-                  <a:srgbClr val="1F2A44"/>
-                </a:solidFill>
-                <a:latin typeface="Pretendard"/>
-                <a:ea typeface="Pretendard"/>
-                <a:cs typeface="Pretendard"/>
-              </a:rPr>
-              <a:t>[1] — 규칙이 바뀌기 전에 준비된 판정 엔진. 필름 스캔과 디지털 사진이 같은 파이프라인이라 과도기 양쪽에 적용</a:t>
-            </a:r>
-          </a:p>
-          <a:p>
-            <a:pPr marL="192785" indent="-192785">
-              <a:lnSpc>
-                <a:spcPct val="114000"/>
+              <a:rPr sz="1200" b="0" i="0">
+                <a:solidFill>
+                  <a:srgbClr val="1F2A44"/>
+                </a:solidFill>
+                <a:latin typeface="Pretendard"/>
+                <a:ea typeface="Pretendard"/>
+                <a:cs typeface="Pretendard"/>
+              </a:rPr>
+              <a:t>블록·용접부·종류·합격 여부·기간으로 조건 검색, CSV 반출 → 선주·선급 요청 시 </a:t>
+            </a:r>
+            <a:r>
+              <a:rPr sz="1200" b="1" i="0">
+                <a:solidFill>
+                  <a:srgbClr val="1F2A44"/>
+                </a:solidFill>
+                <a:latin typeface="Pretendard"/>
+                <a:ea typeface="Pretendard"/>
+                <a:cs typeface="Pretendard"/>
+              </a:rPr>
+              <a:t>서류 수색을 화면 조회로 대체</a:t>
+            </a:r>
+          </a:p>
+          <a:p>
+            <a:pPr marL="175260" indent="-175260">
+              <a:lnSpc>
+                <a:spcPct val="112000"/>
               </a:lnSpc>
               <a:spcAft>
-                <a:spcPts val="900"/>
+                <a:spcPts val="600"/>
               </a:spcAft>
               <a:buClr>
                 <a:srgbClr val="4FD0F5"/>
@@ -11754,15 +11777,52 @@
               <a:buChar char="•"/>
             </a:pPr>
             <a:r>
-              <a:rPr sz="1320" b="0" i="0">
-                <a:solidFill>
-                  <a:srgbClr val="1F2A44"/>
-                </a:solidFill>
-                <a:latin typeface="Pretendard"/>
-                <a:ea typeface="Pretendard"/>
-                <a:cs typeface="Pretendard"/>
-              </a:rPr>
-              <a:t>도입 2경로: ① 검사업체의 생산성 도구 ② 조선소 품질부서의 보고서 표준화·기록 발주 — 어느 쪽도 클라우드 반출 없이 사내 설치</a:t>
+              <a:rPr sz="1200" b="1" i="0">
+                <a:solidFill>
+                  <a:srgbClr val="1F2A44"/>
+                </a:solidFill>
+                <a:latin typeface="Pretendard"/>
+                <a:ea typeface="Pretendard"/>
+                <a:cs typeface="Pretendard"/>
+              </a:rPr>
+              <a:t>2028.01 이후 건조계약 선박에 적용되는 IACS 개정 규칙[1]의 100mm 구간 판독을 이미 구현</a:t>
+            </a:r>
+            <a:r>
+              <a:rPr sz="1200" b="0" i="0">
+                <a:solidFill>
+                  <a:srgbClr val="1F2A44"/>
+                </a:solidFill>
+                <a:latin typeface="Pretendard"/>
+                <a:ea typeface="Pretendard"/>
+                <a:cs typeface="Pretendard"/>
+              </a:rPr>
+              <a:t> — 결함 위치를 따라 100mm 구간을 옮겨가며 가장 나쁜 구간으로 판정(위치 정보가 없으면 사진 전체를 한 구간으로 합산해 더 엄격하게). 규칙이 바뀌기 전에 준비된 규칙 엔진</a:t>
+            </a:r>
+          </a:p>
+          <a:p>
+            <a:pPr marL="175260" indent="-175260">
+              <a:lnSpc>
+                <a:spcPct val="112000"/>
+              </a:lnSpc>
+              <a:spcAft>
+                <a:spcPts val="600"/>
+              </a:spcAft>
+              <a:buClr>
+                <a:srgbClr val="4FD0F5"/>
+              </a:buClr>
+              <a:buFont typeface="Arial"/>
+              <a:buChar char="•"/>
+            </a:pPr>
+            <a:r>
+              <a:rPr sz="1200" b="0" i="0">
+                <a:solidFill>
+                  <a:srgbClr val="1F2A44"/>
+                </a:solidFill>
+                <a:latin typeface="Pretendard"/>
+                <a:ea typeface="Pretendard"/>
+                <a:cs typeface="Pretendard"/>
+              </a:rPr>
+              <a:t>도입 2경로: ① 검사업체의 생산성 도구 ② 조선소 품질부서가 보고서 표준화·기록 관리 용도로 도입 — 어느 쪽도 클라우드 반출 없이 사내 설치</a:t>
             </a:r>
           </a:p>
         </p:txBody>
@@ -11890,12 +11950,12 @@
           </a:bodyPr>
           <a:lstStyle/>
           <a:p>
-            <a:pPr marL="192785" indent="-192785">
-              <a:lnSpc>
-                <a:spcPct val="114000"/>
+            <a:pPr marL="175260" indent="-175260">
+              <a:lnSpc>
+                <a:spcPct val="112000"/>
               </a:lnSpc>
               <a:spcAft>
-                <a:spcPts val="900"/>
+                <a:spcPts val="600"/>
               </a:spcAft>
               <a:buClr>
                 <a:srgbClr val="4FD0F5"/>
@@ -11904,7 +11964,7 @@
               <a:buChar char="•"/>
             </a:pPr>
             <a:r>
-              <a:rPr sz="1320" b="0" i="0">
+              <a:rPr sz="1200" b="0" i="0">
                 <a:solidFill>
                   <a:srgbClr val="1F2A44"/>
                 </a:solidFill>
@@ -11915,7 +11975,7 @@
               <a:t>기준표는 데이터(JSON) — </a:t>
             </a:r>
             <a:r>
-              <a:rPr sz="1320" b="1" i="0">
+              <a:rPr sz="1200" b="1" i="0">
                 <a:solidFill>
                   <a:srgbClr val="1F2A44"/>
                 </a:solidFill>
@@ -11926,7 +11986,7 @@
               <a:t>판정식 3종 구조 안에서는 수치 교체만으로 전환</a:t>
             </a:r>
             <a:r>
-              <a:rPr sz="1320" b="0" i="0">
+              <a:rPr sz="1200" b="0" i="0">
                 <a:solidFill>
                   <a:srgbClr val="1F2A44"/>
                 </a:solidFill>
@@ -11938,12 +11998,12 @@
             </a:r>
           </a:p>
           <a:p>
-            <a:pPr marL="192785" indent="-192785">
-              <a:lnSpc>
-                <a:spcPct val="114000"/>
+            <a:pPr marL="175260" indent="-175260">
+              <a:lnSpc>
+                <a:spcPct val="112000"/>
               </a:lnSpc>
               <a:spcAft>
-                <a:spcPts val="900"/>
+                <a:spcPts val="600"/>
               </a:spcAft>
               <a:buClr>
                 <a:srgbClr val="4FD0F5"/>
@@ -11952,7 +12012,7 @@
               <a:buChar char="•"/>
             </a:pPr>
             <a:r>
-              <a:rPr sz="1320" b="1" i="0">
+              <a:rPr sz="1200" b="1" i="0">
                 <a:solidFill>
                   <a:srgbClr val="1F2A44"/>
                 </a:solidFill>
@@ -11963,24 +12023,24 @@
               <a:t>디지털 RT 사진</a:t>
             </a:r>
             <a:r>
-              <a:rPr sz="1320" b="0" i="0">
-                <a:solidFill>
-                  <a:srgbClr val="1F2A44"/>
-                </a:solidFill>
-                <a:latin typeface="Pretendard"/>
-                <a:ea typeface="Pretendard"/>
-                <a:cs typeface="Pretendard"/>
-              </a:rPr>
-              <a:t>은 같은 파이프라인으로 즉시 적용 — IACS UR W34 적용 선박(2021.07 이후 계약)의 검사 흐름에 편입. KR도 2026.06 AI 기반 디지털 선급 협력에 착수[4]. 초음파(UT) 판독은 신호 기반이라 범위 밖</a:t>
-            </a:r>
-          </a:p>
-          <a:p>
-            <a:pPr marL="192785" indent="-192785">
-              <a:lnSpc>
-                <a:spcPct val="114000"/>
+              <a:rPr sz="1200" b="0" i="0">
+                <a:solidFill>
+                  <a:srgbClr val="1F2A44"/>
+                </a:solidFill>
+                <a:latin typeface="Pretendard"/>
+                <a:ea typeface="Pretendard"/>
+                <a:cs typeface="Pretendard"/>
+              </a:rPr>
+              <a:t>도 같은 처리 흐름 — 현재 프로토타입은 8-bit PNG·JPG 입력 기준이며, 12/16-bit TIFF 등 원본 형식 지원은 본선 과제. IACS UR W34 적용 선박(2021.07 이후 건조계약)의 검사 흐름에 편입</a:t>
+            </a:r>
+          </a:p>
+          <a:p>
+            <a:pPr marL="175260" indent="-175260">
+              <a:lnSpc>
+                <a:spcPct val="112000"/>
               </a:lnSpc>
               <a:spcAft>
-                <a:spcPts val="900"/>
+                <a:spcPts val="600"/>
               </a:spcAft>
               <a:buClr>
                 <a:srgbClr val="4FD0F5"/>
@@ -11989,46 +12049,24 @@
               <a:buChar char="•"/>
             </a:pPr>
             <a:r>
-              <a:rPr sz="1320" b="0" i="0">
-                <a:solidFill>
-                  <a:srgbClr val="1F2A44"/>
-                </a:solidFill>
-                <a:latin typeface="Pretendard"/>
-                <a:ea typeface="Pretendard"/>
-                <a:cs typeface="Pretendard"/>
-              </a:rPr>
-              <a:t>발전 플랜트 배관·튜브 등 </a:t>
-            </a:r>
-            <a:r>
-              <a:rPr sz="1320" b="1" i="0">
-                <a:solidFill>
-                  <a:srgbClr val="1F2A44"/>
-                </a:solidFill>
-                <a:latin typeface="Pretendard"/>
-                <a:ea typeface="Pretendard"/>
-                <a:cs typeface="Pretendard"/>
-              </a:rPr>
-              <a:t>RT 판독 직군 공통</a:t>
-            </a:r>
-            <a:r>
-              <a:rPr sz="1320" b="0" i="0">
-                <a:solidFill>
-                  <a:srgbClr val="1F2A44"/>
-                </a:solidFill>
-                <a:latin typeface="Pretendard"/>
-                <a:ea typeface="Pretendard"/>
-                <a:cs typeface="Pretendard"/>
-              </a:rPr>
-              <a:t> 문제(두산에너빌리티 사례) → 타 산업 전개</a:t>
-            </a:r>
-          </a:p>
-          <a:p>
-            <a:pPr marL="192785" indent="-192785">
-              <a:lnSpc>
-                <a:spcPct val="114000"/>
+              <a:rPr sz="1200" b="0" i="0">
+                <a:solidFill>
+                  <a:srgbClr val="1F2A44"/>
+                </a:solidFill>
+                <a:latin typeface="Pretendard"/>
+                <a:ea typeface="Pretendard"/>
+                <a:cs typeface="Pretendard"/>
+              </a:rPr>
+              <a:t>KR도 2026.06 AI 기반 디지털 선급 협력에 착수했다(비파괴검사에 한정된 협력은 아님)[4]. 초음파(UT) 판독은 사진이 아닌 신호를 다루므로 범위 밖</a:t>
+            </a:r>
+          </a:p>
+          <a:p>
+            <a:pPr marL="175260" indent="-175260">
+              <a:lnSpc>
+                <a:spcPct val="112000"/>
               </a:lnSpc>
               <a:spcAft>
-                <a:spcPts val="900"/>
+                <a:spcPts val="600"/>
               </a:spcAft>
               <a:buClr>
                 <a:srgbClr val="4FD0F5"/>
@@ -12037,15 +12075,63 @@
               <a:buChar char="•"/>
             </a:pPr>
             <a:r>
-              <a:rPr sz="1320" b="0" i="0">
-                <a:solidFill>
-                  <a:srgbClr val="1F2A44"/>
-                </a:solidFill>
-                <a:latin typeface="Pretendard"/>
-                <a:ea typeface="Pretendard"/>
-                <a:cs typeface="Pretendard"/>
-              </a:rPr>
-              <a:t>로드맵: 야드 파일럿, 재학습 파이프라인(라벨 검수 큐 포함), DNV-RP-0671(2023)[5] 등 AI 보증 프레임워크 기준의 검증 문서화, 설치형 패키징</a:t>
+              <a:rPr sz="1200" b="0" i="0">
+                <a:solidFill>
+                  <a:srgbClr val="1F2A44"/>
+                </a:solidFill>
+                <a:latin typeface="Pretendard"/>
+                <a:ea typeface="Pretendard"/>
+                <a:cs typeface="Pretendard"/>
+              </a:rPr>
+              <a:t>발전 플랜트 배관·튜브 등 </a:t>
+            </a:r>
+            <a:r>
+              <a:rPr sz="1200" b="1" i="0">
+                <a:solidFill>
+                  <a:srgbClr val="1F2A44"/>
+                </a:solidFill>
+                <a:latin typeface="Pretendard"/>
+                <a:ea typeface="Pretendard"/>
+                <a:cs typeface="Pretendard"/>
+              </a:rPr>
+              <a:t>RT 판독 직군 공통</a:t>
+            </a:r>
+            <a:r>
+              <a:rPr sz="1200" b="0" i="0">
+                <a:solidFill>
+                  <a:srgbClr val="1F2A44"/>
+                </a:solidFill>
+                <a:latin typeface="Pretendard"/>
+                <a:ea typeface="Pretendard"/>
+                <a:cs typeface="Pretendard"/>
+              </a:rPr>
+              <a:t> 문제(두산에너빌리티 사례) → 타 산업 전개</a:t>
+            </a:r>
+          </a:p>
+          <a:p>
+            <a:pPr marL="175260" indent="-175260">
+              <a:lnSpc>
+                <a:spcPct val="112000"/>
+              </a:lnSpc>
+              <a:spcAft>
+                <a:spcPts val="600"/>
+              </a:spcAft>
+              <a:buClr>
+                <a:srgbClr val="4FD0F5"/>
+              </a:buClr>
+              <a:buFont typeface="Arial"/>
+              <a:buChar char="•"/>
+            </a:pPr>
+            <a:r>
+              <a:rPr sz="1200" b="0" i="0">
+                <a:solidFill>
+                  <a:srgbClr val="1F2A44"/>
+                </a:solidFill>
+                <a:latin typeface="Pretendard"/>
+                <a:ea typeface="Pretendard"/>
+                <a:cs typeface="Pretendard"/>
+              </a:rPr>
+              <a:t>로드맵: 조선소 현장 파일럿, 재학습 파이프라인(라벨 검수 대기열 포함), DNV-RP-0671(2023.09) 같은 AI 신뢰성 검증 지침에 따른 문서화[5], 설치형 패키징</a:t>
             </a:r>
           </a:p>
         </p:txBody>
@@ -12341,7 +12427,7 @@
                 <a:ea typeface="Pretendard"/>
                 <a:cs typeface="Pretendard"/>
               </a:rPr>
-              <a:t>효과② 이력 검색 시간</a:t>
+              <a:t>효과② 기록 검색 시간</a:t>
             </a:r>
           </a:p>
         </p:txBody>
@@ -12423,7 +12509,7 @@
                 <a:ea typeface="Pretendard"/>
                 <a:cs typeface="Pretendard"/>
               </a:rPr>
-              <a:t>블록·용접부·종류·합부·기간 조건 검색 + 말로 검색·요약. 목표: 과거 이력 조회를 서류 수색에서 화면 조회로 — 시연에서 실측</a:t>
+              <a:t>블록·용접부·종류·합격 여부·기간 조건 검색과 말로 검색·요약. 목표: 과거 기록 조회를 서류 수색에서 화면 조회로 — 시연에서 실측</a:t>
             </a:r>
           </a:p>
         </p:txBody>
@@ -12577,7 +12663,7 @@
                 <a:ea typeface="Pretendard"/>
                 <a:cs typeface="Pretendard"/>
               </a:rPr>
-              <a:t>채택 운영점의 검출률·장당 오탐을 함께 공개(AI Hub RT 테스트셋 + GDXray 교차). 현재 폴백 탐지기: 합성 필름 14/14, 장당 오탐 3.8</a:t>
+              <a:t>실제로 쓸 신뢰도 기준에서 검출률·장당 오탐을 함께 공개(AI Hub RT 테스트셋 + GDXray 교차). 현재 폴백 탐지기: 합성 필름 결함 14개 중 14개 탐지, 장당 오탐 3.8건</a:t>
             </a:r>
           </a:p>
         </p:txBody>
@@ -12690,7 +12776,7 @@
                 <a:ea typeface="Pretendard"/>
                 <a:cs typeface="Pretendard"/>
               </a:rPr>
-              <a:t>테스트 235건</a:t>
+              <a:t>테스트 281건</a:t>
             </a:r>
           </a:p>
         </p:txBody>
@@ -12731,7 +12817,7 @@
                 <a:ea typeface="Pretendard"/>
                 <a:cs typeface="Pretendard"/>
               </a:rPr>
-              <a:t>자동 테스트 235건 · 합성 필름 전 과정 자동 검증 · 판정 3종·PDF·DB·라벨 내보내기 회귀 테스트. 운영 시 채택률·직접 추가(미탐) 건수 자동 집계</a:t>
+              <a:t>자동 테스트 281건 · 합성 필름 전 과정 자동 검증 · 판정 3종·PDF·DB·라벨 내보내기 회귀 테스트. 운영 시 채택률·미탐(직접 추가) 건수 자동 집계</a:t>
             </a:r>
           </a:p>
         </p:txBody>
@@ -12794,7 +12880,7 @@
                 <a:ea typeface="Pretendard"/>
                 <a:cs typeface="Pretendard"/>
               </a:rPr>
-              <a:t>이 판정표·PDF·기록에 자동 기재되고, 판본을 바꾸면 재판정이 강제된다 → 판정 근거 누락을 구조적으로 방지(현재는 데모 기준표, 선급 지침 확정 후 JSON 교체)</a:t>
+              <a:t>이 판정표·PDF·기록에 자동 기재되고, 판본을 바꾸면 재판정이 강제된다 → 판정 근거 누락을 구조적으로 방지(현재는 데모 기준표)</a:t>
             </a:r>
           </a:p>
         </p:txBody>
@@ -12835,7 +12921,7 @@
                 <a:ea typeface="Pretendard"/>
                 <a:cs typeface="Pretendard"/>
               </a:rPr>
-              <a:t>참고  [1] IACS UR W33 Rev.2·W34 Rev.1(2026.07.15 승인, 2028.01.01 이후 건조계약분)  ·  [2] 두산에너빌리티 2026.03 전시 인터뷰(위키리크스한국)†  ·  [3] 가스신문 2025.09.18†  ·  [4] KR×Microsoft AI 협력 보도(2026.06)†  ·  [5] DNV-RP-0671(2023.09)  ·  효과 지표는 측정 설계이며 확정 수치 아님  ·  † 검색 요약 기준</a:t>
+              <a:t>참고  [1] IACS UR W33 Rev.2·W34 Rev.1(2026.07.15 승인, 2028.01.01 이후 건조계약분; 100mm 평가 길이 자체는 현행 ISO 10675-1 기준)  ·  [2] 두산에너빌리티 2026.03 전시 인터뷰†  ·  [3] 가스신문 2025.09.18†  ·  [4] KR×Microsoft AI 협력 보도(2026.06)†  ·  [5] DNV-RP-0671(2023.09)†  ·  효과 지표는 측정 설계이며 확정 수치 아님  ·  † 검색 요약 기준</a:t>
             </a:r>
           </a:p>
         </p:txBody>

--- a/rt-workbench/docs/2026_K조선해커톤_계획서_RT판독워크벤치.pptx
+++ b/rt-workbench/docs/2026_K조선해커톤_계획서_RT판독워크벤치.pptx
@@ -2733,7 +2733,7 @@
                 <a:ea typeface="Pretendard"/>
                 <a:cs typeface="Pretendard"/>
               </a:rPr>
-              <a:t>두산에너빌리티 D-Vision(RT 사진 AI 판독)은 2019년 말 자사 시범, 2024.03 출시, 2024.11 에너지공단 협약으로 이어졌다[8] — </a:t>
+              <a:t>두산에너빌리티 D-Vision(RT 사진 AI 판독)은 2019년 사내 시범 → 2024.03 출시 → 2024.11 한국에너지공단 협약으로 이어졌다[8]. 아직 </a:t>
             </a:r>
             <a:r>
               <a:rPr sz="1280" b="1" i="0">
@@ -2755,7 +2755,18 @@
                 <a:ea typeface="Pretendard"/>
                 <a:cs typeface="Pretendard"/>
               </a:rPr>
-              <a:t>이며 외부 유료 고객은 공개 확인되지 않는다. 문제는 실재하나 지불 의사는 미검증</a:t>
+              <a:t>이고, 돈을 내고 쓰는 외부 고객은 공개 자료로 확인되지 않는다 → 문제는 실재하나 </a:t>
+            </a:r>
+            <a:r>
+              <a:rPr sz="1280" b="1" i="0">
+                <a:solidFill>
+                  <a:srgbClr val="1F2A44"/>
+                </a:solidFill>
+                <a:latin typeface="Pretendard"/>
+                <a:ea typeface="Pretendard"/>
+                <a:cs typeface="Pretendard"/>
+              </a:rPr>
+              <a:t>지불할 사람이 있는지는 미검증</a:t>
             </a:r>
           </a:p>
           <a:p>
@@ -3049,7 +3060,7 @@
                 <a:ea typeface="Pretendard"/>
                 <a:cs typeface="Pretendard"/>
               </a:rPr>
-              <a:t> — 판독원에게 새 장비나 새 촬영 절차를 요구하지 않는다. 단, 필름을 스캔하는 장비(스캔 화질 규격 ISO 14096-2 등급의 디지타이저 또는 스캔 서비스)는 </a:t>
+              <a:t> — 판독원에게 새 장비나 새 촬영 절차를 요구하지 않는다. 단, 필름을 디지털 사진으로 바꾸는 </a:t>
             </a:r>
             <a:r>
               <a:rPr sz="1320" b="1" i="0">
@@ -3060,7 +3071,18 @@
                 <a:ea typeface="Pretendard"/>
                 <a:cs typeface="Pretendard"/>
               </a:rPr>
-              <a:t>조직이 갖춰야 할 전제조건</a:t>
+              <a:t>필름 스캐너(디지타이저)</a:t>
+            </a:r>
+            <a:r>
+              <a:rPr sz="1320" b="0" i="0">
+                <a:solidFill>
+                  <a:srgbClr val="1F2A44"/>
+                </a:solidFill>
+                <a:latin typeface="Pretendard"/>
+                <a:ea typeface="Pretendard"/>
+                <a:cs typeface="Pretendard"/>
+              </a:rPr>
+              <a:t>는 조직이 갖춰야 할 전제조건이다(스캔 화질은 ISO 14096-2 등급 기준)</a:t>
             </a:r>
           </a:p>
         </p:txBody>
@@ -3073,7 +3095,7 @@
         </p:nvSpPr>
         <p:spPr>
           <a:xfrm>
-            <a:off x="12710160" y="5166360"/>
+            <a:off x="12710160" y="5440680"/>
             <a:ext cx="4645151" cy="292608"/>
           </a:xfrm>
           <a:prstGeom prst="rect">
@@ -3114,7 +3136,7 @@
         </p:nvSpPr>
         <p:spPr>
           <a:xfrm>
-            <a:off x="12710160" y="5550408"/>
+            <a:off x="12710160" y="5824728"/>
             <a:ext cx="384048" cy="384048"/>
           </a:xfrm>
           <a:prstGeom prst="roundRect">
@@ -3156,7 +3178,7 @@
         </p:nvSpPr>
         <p:spPr>
           <a:xfrm>
-            <a:off x="13213080" y="5513832"/>
+            <a:off x="13213080" y="5788152"/>
             <a:ext cx="4096511" cy="274320"/>
           </a:xfrm>
           <a:prstGeom prst="rect">
@@ -3197,7 +3219,7 @@
         </p:nvSpPr>
         <p:spPr>
           <a:xfrm>
-            <a:off x="13213080" y="5788152"/>
+            <a:off x="13213080" y="6062472"/>
             <a:ext cx="4096511" cy="274320"/>
           </a:xfrm>
           <a:prstGeom prst="rect">
@@ -3238,7 +3260,7 @@
         </p:nvSpPr>
         <p:spPr>
           <a:xfrm>
-            <a:off x="12710160" y="6208776"/>
+            <a:off x="12710160" y="6483096"/>
             <a:ext cx="384048" cy="384048"/>
           </a:xfrm>
           <a:prstGeom prst="roundRect">
@@ -3280,7 +3302,7 @@
         </p:nvSpPr>
         <p:spPr>
           <a:xfrm>
-            <a:off x="13213080" y="6172200"/>
+            <a:off x="13213080" y="6446520"/>
             <a:ext cx="4096511" cy="274320"/>
           </a:xfrm>
           <a:prstGeom prst="rect">
@@ -3321,7 +3343,7 @@
         </p:nvSpPr>
         <p:spPr>
           <a:xfrm>
-            <a:off x="13213080" y="6446520"/>
+            <a:off x="13213080" y="6720840"/>
             <a:ext cx="4096511" cy="274320"/>
           </a:xfrm>
           <a:prstGeom prst="rect">
@@ -3362,7 +3384,7 @@
         </p:nvSpPr>
         <p:spPr>
           <a:xfrm>
-            <a:off x="12710160" y="6867144"/>
+            <a:off x="12710160" y="7141464"/>
             <a:ext cx="384048" cy="384048"/>
           </a:xfrm>
           <a:prstGeom prst="roundRect">
@@ -3404,7 +3426,7 @@
         </p:nvSpPr>
         <p:spPr>
           <a:xfrm>
-            <a:off x="13213080" y="6830568"/>
+            <a:off x="13213080" y="7104888"/>
             <a:ext cx="4096511" cy="274320"/>
           </a:xfrm>
           <a:prstGeom prst="rect">
@@ -3445,7 +3467,7 @@
         </p:nvSpPr>
         <p:spPr>
           <a:xfrm>
-            <a:off x="13213080" y="7104888"/>
+            <a:off x="13213080" y="7379208"/>
             <a:ext cx="4096511" cy="274320"/>
           </a:xfrm>
           <a:prstGeom prst="rect">
@@ -3667,7 +3689,7 @@
                 <a:ea typeface="Pretendard"/>
                 <a:cs typeface="Pretendard"/>
               </a:rPr>
-              <a:t>참고  [1] 황훈규 외, 한국정보통신학회논문지 25(2), 2021.02†  ·  [2] 데일리안·CCTV뉴스 2021.07.02†  ·  [3] IACS UR W34(2019.12; 2021.07.01 이후 건조계약분)  ·  [4] IACS UR W33 Rev.1/Corr.1(2021) §3.3·§8·§9.2  ·  [5] IACS UR W33 Rev.2·W34 Rev.1(2026.07.15 승인)  ·  [6] 뉴스핌 2026.06.04(한화오션×NC AI)†  ·  [7] 아시아투데이 2026.06(HD현대)†  ·  [8] 두산에너빌리티 통합보고서 2024·2026, 팍스경제TV 2024, 이투데이 2024.11.14, 위키리크스한국 2026.03†  ·  [9] 가스신문 2025.09.18†  ·  [10] 가스신문 기고 ‘비파괴검사 시장 현황’†  ·  † 검색 요약 기준(제출 전 원문 확인)</a:t>
+              <a:t>참고  [1] 황훈규 외, 한국정보통신학회논문지 25(2), 2021.02†  ·  [2] 데일리안·CCTV뉴스 2021.07.02†  ·  [3] IACS UR W34(2019.12; 2021.07.01 이후 건조계약분)  ·  [4] IACS UR W33 Rev.1/Corr.1(2021) §3.3·§8·§9.2  ·  [5] IACS UR W33 Rev.2·W34 Rev.1(2026.07.15 승인)  ·  [6] 뉴스핌 2026.06.04(한화오션×NC AI)†  ·  [7] 아시아투데이 2026.06(HD현대)†  ·  [8] 두산에너빌리티 통합보고서 2024·2026† · 팍스경제TV 2024† · 이투데이 2024.11.14† · 위키리크스한국 2026.03†  ·  [9] 가스신문 2025.09.18†  ·  [10] 가스신문 [전문가 기고] ‘글로벌 비파괴검사시장 현황과 국내 비파괴검사분야의 발전방안’(게재일 미확정, 기사 118513)†  ·  † 검색 요약 기준(제출 전 원문 확인)</a:t>
             </a:r>
           </a:p>
         </p:txBody>
@@ -4448,7 +4470,7 @@
                 <a:ea typeface="Pretendard"/>
                 <a:cs typeface="Pretendard"/>
               </a:rPr>
-              <a:t> — 사진을 열면 사람이 놓칠 만한 곳을 AI가 표시한다. 판독원이 결함 종류를 확정하고 클릭 두 번으로 크기를 재면, 규칙 엔진이 100mm 구간 기준으로 합격·불합격을 낸다. 소견서·PDF·기록까지 한 화면에서 끝나는 </a:t>
+              <a:t> — 사진을 열면 사람이 놓칠 만한 곳을 AI가 표시한다. 판독원이 결함 종류를 확정하고 클릭 두 번으로 크기를 재면, 규칙 엔진이 결함 크기를 기준표와 대조해 합격·불합격을 낸다(누적 길이·기공 면적률은 100mm 구간을 옮겨가며 최악 구간으로 판정). 소견서·PDF·기록까지 한 화면에서 끝나는 </a:t>
             </a:r>
             <a:r>
               <a:rPr sz="1300" b="1" i="0">
@@ -4483,7 +4505,7 @@
         </p:nvSpPr>
         <p:spPr>
           <a:xfrm>
-            <a:off x="5120640" y="2907791"/>
+            <a:off x="5120640" y="2706624"/>
             <a:ext cx="12234672" cy="274320"/>
           </a:xfrm>
           <a:prstGeom prst="rect">
@@ -4524,8 +4546,8 @@
         </p:nvSpPr>
         <p:spPr>
           <a:xfrm>
-            <a:off x="5120640" y="3218688"/>
-            <a:ext cx="2894076" cy="1216151"/>
+            <a:off x="5120640" y="3035808"/>
+            <a:ext cx="2894076" cy="1399031"/>
           </a:xfrm>
           <a:prstGeom prst="roundRect">
             <a:avLst>
@@ -4553,7 +4575,7 @@
         </p:nvSpPr>
         <p:spPr>
           <a:xfrm>
-            <a:off x="5285231" y="3328416"/>
+            <a:off x="5285231" y="3145536"/>
             <a:ext cx="2564892" cy="274320"/>
           </a:xfrm>
           <a:prstGeom prst="rect">
@@ -4594,8 +4616,8 @@
         </p:nvSpPr>
         <p:spPr>
           <a:xfrm>
-            <a:off x="5285231" y="3611880"/>
-            <a:ext cx="2564892" cy="758951"/>
+            <a:off x="5285231" y="3429000"/>
+            <a:ext cx="2564892" cy="941831"/>
           </a:xfrm>
           <a:prstGeom prst="rect">
             <a:avLst/>
@@ -4646,8 +4668,8 @@
         </p:nvSpPr>
         <p:spPr>
           <a:xfrm>
-            <a:off x="8234171" y="3218688"/>
-            <a:ext cx="2894076" cy="1216151"/>
+            <a:off x="8234171" y="3035808"/>
+            <a:ext cx="2894076" cy="1399031"/>
           </a:xfrm>
           <a:prstGeom prst="roundRect">
             <a:avLst>
@@ -4675,7 +4697,7 @@
         </p:nvSpPr>
         <p:spPr>
           <a:xfrm>
-            <a:off x="8398763" y="3328416"/>
+            <a:off x="8398763" y="3145536"/>
             <a:ext cx="2564892" cy="274320"/>
           </a:xfrm>
           <a:prstGeom prst="rect">
@@ -4716,8 +4738,8 @@
         </p:nvSpPr>
         <p:spPr>
           <a:xfrm>
-            <a:off x="8398763" y="3611880"/>
-            <a:ext cx="2564892" cy="758951"/>
+            <a:off x="8398763" y="3429000"/>
+            <a:ext cx="2564892" cy="941831"/>
           </a:xfrm>
           <a:prstGeom prst="rect">
             <a:avLst/>
@@ -4744,7 +4766,7 @@
                 <a:ea typeface="Pretendard"/>
                 <a:cs typeface="Pretendard"/>
               </a:rPr>
-              <a:t>기준물(IQI·납마커: 화질·크기 확인용 표준 지시계) 양 끝을 두 번 클릭해 mm/픽셀을 정하고, 결함 양 끝을 두 번 클릭해 크기를 확정한다 → 규칙 엔진(앱 표기: 룰 엔진)이 </a:t>
+              <a:t>사진 속 자 역할의 </a:t>
             </a:r>
             <a:r>
               <a:rPr sz="1100" b="1" i="0">
@@ -4755,6 +4777,28 @@
                 <a:ea typeface="Pretendard"/>
                 <a:cs typeface="Pretendard"/>
               </a:rPr>
+              <a:t>납마커</a:t>
+            </a:r>
+            <a:r>
+              <a:rPr sz="1100" b="0" i="0">
+                <a:solidFill>
+                  <a:srgbClr val="1F2A44"/>
+                </a:solidFill>
+                <a:latin typeface="Pretendard"/>
+                <a:ea typeface="Pretendard"/>
+                <a:cs typeface="Pretendard"/>
+              </a:rPr>
+              <a:t>와 결함의 양 끝을 각각 클릭 두 번 해 mm/픽셀·크기 확정(IQI는 화질 확인용) → 규칙 엔진(앱 표기: 룰 엔진)이 </a:t>
+            </a:r>
+            <a:r>
+              <a:rPr sz="1100" b="1" i="0">
+                <a:solidFill>
+                  <a:srgbClr val="1F2A44"/>
+                </a:solidFill>
+                <a:latin typeface="Pretendard"/>
+                <a:ea typeface="Pretendard"/>
+                <a:cs typeface="Pretendard"/>
+              </a:rPr>
               <a:t>단일 크기·누적 길이·기공 면적률(%)</a:t>
             </a:r>
             <a:r>
@@ -4766,7 +4810,7 @@
                 <a:ea typeface="Pretendard"/>
                 <a:cs typeface="Pretendard"/>
               </a:rPr>
-              <a:t> 3가지로 판정하고 근거 조항을 함께 제시</a:t>
+              <a:t> 3종 판정 + 근거 조항 제시</a:t>
             </a:r>
           </a:p>
         </p:txBody>
@@ -4779,8 +4823,8 @@
         </p:nvSpPr>
         <p:spPr>
           <a:xfrm>
-            <a:off x="11347704" y="3218688"/>
-            <a:ext cx="2894076" cy="1216151"/>
+            <a:off x="11347704" y="3035808"/>
+            <a:ext cx="2894076" cy="1399031"/>
           </a:xfrm>
           <a:prstGeom prst="roundRect">
             <a:avLst>
@@ -4808,7 +4852,7 @@
         </p:nvSpPr>
         <p:spPr>
           <a:xfrm>
-            <a:off x="11512296" y="3328416"/>
+            <a:off x="11512296" y="3145536"/>
             <a:ext cx="2564892" cy="274320"/>
           </a:xfrm>
           <a:prstGeom prst="rect">
@@ -4849,8 +4893,8 @@
         </p:nvSpPr>
         <p:spPr>
           <a:xfrm>
-            <a:off x="11512296" y="3611880"/>
-            <a:ext cx="2564892" cy="758951"/>
+            <a:off x="11512296" y="3429000"/>
+            <a:ext cx="2564892" cy="941831"/>
           </a:xfrm>
           <a:prstGeom prst="rect">
             <a:avLst/>
@@ -4890,8 +4934,8 @@
         </p:nvSpPr>
         <p:spPr>
           <a:xfrm>
-            <a:off x="14461236" y="3218688"/>
-            <a:ext cx="2894076" cy="1216151"/>
+            <a:off x="14461236" y="3035808"/>
+            <a:ext cx="2894076" cy="1399031"/>
           </a:xfrm>
           <a:prstGeom prst="roundRect">
             <a:avLst>
@@ -4919,7 +4963,7 @@
         </p:nvSpPr>
         <p:spPr>
           <a:xfrm>
-            <a:off x="14625828" y="3328416"/>
+            <a:off x="14625828" y="3145536"/>
             <a:ext cx="2564892" cy="274320"/>
           </a:xfrm>
           <a:prstGeom prst="rect">
@@ -4960,8 +5004,8 @@
         </p:nvSpPr>
         <p:spPr>
           <a:xfrm>
-            <a:off x="14625828" y="3611880"/>
-            <a:ext cx="2564892" cy="758951"/>
+            <a:off x="14625828" y="3429000"/>
+            <a:ext cx="2564892" cy="941831"/>
           </a:xfrm>
           <a:prstGeom prst="rect">
             <a:avLst/>
@@ -5102,8 +5146,8 @@
         </p:nvSpPr>
         <p:spPr>
           <a:xfrm>
-            <a:off x="5120640" y="5641848"/>
-            <a:ext cx="3305556" cy="1591056"/>
+            <a:off x="5120640" y="5605272"/>
+            <a:ext cx="3305556" cy="1719072"/>
           </a:xfrm>
           <a:prstGeom prst="roundRect">
             <a:avLst>
@@ -5131,7 +5175,7 @@
         </p:nvSpPr>
         <p:spPr>
           <a:xfrm>
-            <a:off x="5276088" y="5742432"/>
+            <a:off x="5276088" y="5705856"/>
             <a:ext cx="2994660" cy="274320"/>
           </a:xfrm>
           <a:prstGeom prst="rect">
@@ -5172,8 +5216,8 @@
         </p:nvSpPr>
         <p:spPr>
           <a:xfrm>
-            <a:off x="5276088" y="6025896"/>
-            <a:ext cx="2994660" cy="1133856"/>
+            <a:off x="5276088" y="5989320"/>
+            <a:ext cx="2994660" cy="1261872"/>
           </a:xfrm>
           <a:prstGeom prst="rect">
             <a:avLst/>
@@ -5192,7 +5236,7 @@
               </a:lnSpc>
             </a:pPr>
             <a:r>
-              <a:rPr sz="1100" b="0" i="0">
+              <a:rPr sz="1050" b="0" i="0">
                 <a:solidFill>
                   <a:srgbClr val="1F2A44"/>
                 </a:solidFill>
@@ -5203,7 +5247,7 @@
               <a:t>Ultralytics YOLO(</a:t>
             </a:r>
             <a:r>
-              <a:rPr sz="1100" b="1" i="0">
+              <a:rPr sz="1050" b="1" i="0">
                 <a:solidFill>
                   <a:srgbClr val="1F2A44"/>
                 </a:solidFill>
@@ -5214,37 +5258,37 @@
               <a:t>YOLO26s</a:t>
             </a:r>
             <a:r>
-              <a:rPr sz="1100" b="0" i="0">
-                <a:solidFill>
-                  <a:srgbClr val="1F2A44"/>
-                </a:solidFill>
-                <a:latin typeface="Pretendard"/>
-                <a:ea typeface="Pretendard"/>
-                <a:cs typeface="Pretendard"/>
-              </a:rPr>
-              <a:t> 권장, 2026.01 공개[1]; v8·11 가중치 호환) + CLAHE(대비 향상)로 공개 데이터 학습 예정. </a:t>
-            </a:r>
-            <a:r>
-              <a:rPr sz="1100" b="1" i="0">
-                <a:solidFill>
-                  <a:srgbClr val="1F2A44"/>
-                </a:solidFill>
-                <a:latin typeface="Pretendard"/>
-                <a:ea typeface="Pretendard"/>
-                <a:cs typeface="Pretendard"/>
-              </a:rPr>
-              <a:t>지금은 학습 모델이 아닌 대체용(폴백) OpenCV 규칙 탐지기</a:t>
-            </a:r>
-            <a:r>
-              <a:rPr sz="1100" b="0" i="0">
-                <a:solidFill>
-                  <a:srgbClr val="1F2A44"/>
-                </a:solidFill>
-                <a:latin typeface="Pretendard"/>
-                <a:ea typeface="Pretendard"/>
-                <a:cs typeface="Pretendard"/>
-              </a:rPr>
-              <a:t>: 합성 필름 6장의 결함 14개 중 14개 탐지, 장당 오탐 3.8건(신뢰도 기준 0.5). 가중치 + ultralytics≥8.4 설치 시 자동 전환</a:t>
+              <a:rPr sz="1050" b="0" i="0">
+                <a:solidFill>
+                  <a:srgbClr val="1F2A44"/>
+                </a:solidFill>
+                <a:latin typeface="Pretendard"/>
+                <a:ea typeface="Pretendard"/>
+                <a:cs typeface="Pretendard"/>
+              </a:rPr>
+              <a:t> 권장, 2026.01 공개[1]; v8·11 호환) — AGPL-3.0이라 사내 배포 시 Enterprise 라이선스 또는 대체 모델 필요. CLAHE(대비 향상)와 함께 공개 데이터 학습 예정. </a:t>
+            </a:r>
+            <a:r>
+              <a:rPr sz="1050" b="1" i="0">
+                <a:solidFill>
+                  <a:srgbClr val="1F2A44"/>
+                </a:solidFill>
+                <a:latin typeface="Pretendard"/>
+                <a:ea typeface="Pretendard"/>
+                <a:cs typeface="Pretendard"/>
+              </a:rPr>
+              <a:t>지금은 대체용(폴백) OpenCV 규칙 탐지기</a:t>
+            </a:r>
+            <a:r>
+              <a:rPr sz="1050" b="0" i="0">
+                <a:solidFill>
+                  <a:srgbClr val="1F2A44"/>
+                </a:solidFill>
+                <a:latin typeface="Pretendard"/>
+                <a:ea typeface="Pretendard"/>
+                <a:cs typeface="Pretendard"/>
+              </a:rPr>
+              <a:t>: 합성 필름 6장의 결함 14개 중 14개 탐지, 장당 오탐 3.8건(신뢰도 기준 0.5). 가중치+ultralytics≥8.4 설치 시 자동 전환</a:t>
             </a:r>
           </a:p>
         </p:txBody>
@@ -5257,8 +5301,8 @@
         </p:nvSpPr>
         <p:spPr>
           <a:xfrm>
-            <a:off x="8627364" y="5641848"/>
-            <a:ext cx="3305556" cy="1591056"/>
+            <a:off x="8627364" y="5605272"/>
+            <a:ext cx="3305556" cy="1719072"/>
           </a:xfrm>
           <a:prstGeom prst="roundRect">
             <a:avLst>
@@ -5286,7 +5330,7 @@
         </p:nvSpPr>
         <p:spPr>
           <a:xfrm>
-            <a:off x="8782812" y="5742432"/>
+            <a:off x="8782812" y="5705856"/>
             <a:ext cx="2994660" cy="274320"/>
           </a:xfrm>
           <a:prstGeom prst="rect">
@@ -5327,8 +5371,8 @@
         </p:nvSpPr>
         <p:spPr>
           <a:xfrm>
-            <a:off x="8782812" y="6025896"/>
-            <a:ext cx="2994660" cy="1133856"/>
+            <a:off x="8782812" y="5989320"/>
+            <a:ext cx="2994660" cy="1261872"/>
           </a:xfrm>
           <a:prstGeom prst="rect">
             <a:avLst/>
@@ -5347,7 +5391,7 @@
               </a:lnSpc>
             </a:pPr>
             <a:r>
-              <a:rPr sz="1100" b="0" i="0">
+              <a:rPr sz="1050" b="0" i="0">
                 <a:solidFill>
                   <a:srgbClr val="1F2A44"/>
                 </a:solidFill>
@@ -5358,7 +5402,7 @@
               <a:t>기본은 </a:t>
             </a:r>
             <a:r>
-              <a:rPr sz="1100" b="1" i="0">
+              <a:rPr sz="1050" b="1" i="0">
                 <a:solidFill>
                   <a:srgbClr val="1F2A44"/>
                 </a:solidFill>
@@ -5369,37 +5413,37 @@
               <a:t>사내 PC의 로컬 LLM</a:t>
             </a:r>
             <a:r>
-              <a:rPr sz="1100" b="0" i="0">
-                <a:solidFill>
-                  <a:srgbClr val="1F2A44"/>
-                </a:solidFill>
-                <a:latin typeface="Pretendard"/>
-                <a:ea typeface="Pretendard"/>
-                <a:cs typeface="Pretendard"/>
-              </a:rPr>
-              <a:t>(Ollama·vLLM[3]) 또는 오프라인 템플릿. 한국어 모델: EXAONE(코드 기본값 3.5)[4]·HyperCLOVA X SEED[5]. 클라우드(Claude Sonnet 5 → Gemini)[3]는 </a:t>
-            </a:r>
-            <a:r>
-              <a:rPr sz="1100" b="1" i="0">
-                <a:solidFill>
-                  <a:srgbClr val="1F2A44"/>
-                </a:solidFill>
-                <a:latin typeface="Pretendard"/>
-                <a:ea typeface="Pretendard"/>
-                <a:cs typeface="Pretendard"/>
-              </a:rPr>
-              <a:t>명시 허용 시에만</a:t>
-            </a:r>
-            <a:r>
-              <a:rPr sz="1100" b="0" i="0">
-                <a:solidFill>
-                  <a:srgbClr val="1F2A44"/>
-                </a:solidFill>
-                <a:latin typeface="Pretendard"/>
-                <a:ea typeface="Pretendard"/>
-                <a:cs typeface="Pretendard"/>
-              </a:rPr>
-              <a:t> 쓴다. 사진·실명·파일 경로는 절대 보내지 않는다(소견서 전송 내용 미리보기 제공)</a:t>
+              <a:rPr sz="1050" b="0" i="0">
+                <a:solidFill>
+                  <a:srgbClr val="1F2A44"/>
+                </a:solidFill>
+                <a:latin typeface="Pretendard"/>
+                <a:ea typeface="Pretendard"/>
+                <a:cs typeface="Pretendard"/>
+              </a:rPr>
+              <a:t>(Ollama·vLLM[3]) 또는 오프라인 템플릿. 한국어 모델: EXAONE(코드 기본값 3.5)[4](연구·비상업 라이선스 — 상용 배포 시 교체)·HyperCLOVA X SEED[5]. 클라우드는 사용자가 </a:t>
+            </a:r>
+            <a:r>
+              <a:rPr sz="1050" b="1" i="0">
+                <a:solidFill>
+                  <a:srgbClr val="1F2A44"/>
+                </a:solidFill>
+                <a:latin typeface="Pretendard"/>
+                <a:ea typeface="Pretendard"/>
+                <a:cs typeface="Pretendard"/>
+              </a:rPr>
+              <a:t>직접 허용할 때만</a:t>
+            </a:r>
+            <a:r>
+              <a:rPr sz="1050" b="0" i="0">
+                <a:solidFill>
+                  <a:srgbClr val="1F2A44"/>
+                </a:solidFill>
+                <a:latin typeface="Pretendard"/>
+                <a:ea typeface="Pretendard"/>
+                <a:cs typeface="Pretendard"/>
+              </a:rPr>
+              <a:t> 쓴다(기본 Claude Sonnet 5[3]). 사진·실명·파일 경로는 보내지 않는다(전송 내용 미리보기 제공)</a:t>
             </a:r>
           </a:p>
         </p:txBody>
@@ -5412,7 +5456,7 @@
         </p:nvSpPr>
         <p:spPr>
           <a:xfrm>
-            <a:off x="5120640" y="7379208"/>
+            <a:off x="5120640" y="7434071"/>
             <a:ext cx="3305556" cy="1243584"/>
           </a:xfrm>
           <a:prstGeom prst="roundRect">
@@ -5441,7 +5485,7 @@
         </p:nvSpPr>
         <p:spPr>
           <a:xfrm>
-            <a:off x="5276088" y="7479792"/>
+            <a:off x="5276088" y="7534655"/>
             <a:ext cx="2994660" cy="274320"/>
           </a:xfrm>
           <a:prstGeom prst="rect">
@@ -5482,7 +5526,7 @@
         </p:nvSpPr>
         <p:spPr>
           <a:xfrm>
-            <a:off x="5276088" y="7763256"/>
+            <a:off x="5276088" y="7818119"/>
             <a:ext cx="2994660" cy="786384"/>
           </a:xfrm>
           <a:prstGeom prst="rect">
@@ -5502,7 +5546,7 @@
               </a:lnSpc>
             </a:pPr>
             <a:r>
-              <a:rPr sz="1100" b="0" i="0">
+              <a:rPr sz="1050" b="0" i="0">
                 <a:solidFill>
                   <a:srgbClr val="1F2A44"/>
                 </a:solidFill>
@@ -5523,7 +5567,7 @@
         </p:nvSpPr>
         <p:spPr>
           <a:xfrm>
-            <a:off x="8627364" y="7379208"/>
+            <a:off x="8627364" y="7434071"/>
             <a:ext cx="3305556" cy="1243584"/>
           </a:xfrm>
           <a:prstGeom prst="roundRect">
@@ -5552,7 +5596,7 @@
         </p:nvSpPr>
         <p:spPr>
           <a:xfrm>
-            <a:off x="8782812" y="7479792"/>
+            <a:off x="8782812" y="7534655"/>
             <a:ext cx="2994660" cy="274320"/>
           </a:xfrm>
           <a:prstGeom prst="rect">
@@ -5593,7 +5637,7 @@
         </p:nvSpPr>
         <p:spPr>
           <a:xfrm>
-            <a:off x="8782812" y="7763256"/>
+            <a:off x="8782812" y="7818119"/>
             <a:ext cx="2994660" cy="786384"/>
           </a:xfrm>
           <a:prstGeom prst="rect">
@@ -5613,7 +5657,7 @@
               </a:lnSpc>
             </a:pPr>
             <a:r>
-              <a:rPr sz="1100" b="1" i="0">
+              <a:rPr sz="1050" b="1" i="0">
                 <a:solidFill>
                   <a:srgbClr val="1F2A44"/>
                 </a:solidFill>
@@ -5624,7 +5668,7 @@
               <a:t>Claude Code</a:t>
             </a:r>
             <a:r>
-              <a:rPr sz="1100" b="0" i="0">
+              <a:rPr sz="1050" b="0" i="0">
                 <a:solidFill>
                   <a:srgbClr val="1F2A44"/>
                 </a:solidFill>
@@ -5645,7 +5689,7 @@
         </p:nvSpPr>
         <p:spPr>
           <a:xfrm>
-            <a:off x="5120640" y="8769096"/>
+            <a:off x="5120640" y="8787384"/>
             <a:ext cx="6812280" cy="402336"/>
           </a:xfrm>
           <a:prstGeom prst="roundRect">
@@ -5674,7 +5718,7 @@
         </p:nvSpPr>
         <p:spPr>
           <a:xfrm>
-            <a:off x="5276088" y="8860536"/>
+            <a:off x="5276088" y="8878824"/>
             <a:ext cx="6501384" cy="265176"/>
           </a:xfrm>
           <a:prstGeom prst="rect">
@@ -5713,7 +5757,7 @@
                 <a:ea typeface="Pretendard"/>
                 <a:cs typeface="Pretendard"/>
               </a:rPr>
-              <a:t>  Python 3.11 · Streamlit 1.63[2] · OpenCV · SQLite · reportlab(PDF) · 합성 필름 생성기 · Docker · 더블클릭 실행</a:t>
+              <a:t>  Python 3.11 · Streamlit 1.63[10] · OpenCV · SQLite · reportlab(PDF) · 합성 필름 생성기 · Docker · 더블클릭 실행</a:t>
             </a:r>
           </a:p>
         </p:txBody>
@@ -5922,7 +5966,7 @@
                 <a:ea typeface="Pretendard"/>
                 <a:cs typeface="Pretendard"/>
               </a:rPr>
-              <a:t>: 그 시스템은 필름 스캐너·AI 자동 판독·통합관리 플랫폼·선급 비대면 승인을 묶은 특정 조선소 사내 체계였다[2]. 본 안의 차이는 ① 검사업체·조선소가 공용으로 쓰는 설치형 ② 판정을 규칙 엔진+자격자에 두고 조항 번호·100mm 구간을 기록 ③ 소견서 LLM·자연어 검색</a:t>
+              <a:t>: 2020.11 검사 로봇·2021.07 필름리스 RT 발표와 같은 시기의 국책과제(필름 스캐너·AI 자동 판독 플랫폼)를 아우른 특정 조선소 중심의 사내 체계였고, 선급 비대면 승인은 5대 선급과 ‘개발하기로 한’ 협약 단계였다[2]. 본 안의 차이는 ① 검사업체·조선소가 공용으로 쓰는 설치형 ② 판정을 규칙 엔진+자격자에 두고 조항 번호·100mm 구간을 기록 ③ 소견서 LLM·자연어 검색</a:t>
             </a:r>
           </a:p>
           <a:p>
@@ -5996,7 +6040,7 @@
                 <a:ea typeface="Pretendard"/>
                 <a:cs typeface="Pretendard"/>
               </a:rPr>
-              <a:t>자격자 판정·서면 절차·기록 관리 요건(UR W33 §3.2·§6.1.2·§8.5) 안에서 보조 도구로 도입 가능</a:t>
+              <a:t>자격자 판정·서면 절차·기록 관리 요건(UR W33 §3.3·§6.1.2·§8.5) 안에서 보조 도구로 도입 가능</a:t>
             </a:r>
             <a:r>
               <a:rPr sz="1019" b="0" i="0">
@@ -6096,7 +6140,7 @@
                 <a:ea typeface="Pretendard"/>
                 <a:cs typeface="Pretendard"/>
               </a:rPr>
-              <a:t>참고  [1] Ultralytics 8.4.0 릴리스·PyPI(2026.01.14, AGPL-3.0)  ·  [2] 데일리안·CCTV뉴스 2021.07.02 · 황훈규 외 2021.02 · KISTI TRKO202200005836†  ·  [3] Anthropic 모델 문서 · Ollama/vLLM API 문서  ·  [4] LG AI연구원 EXAONE README(2026.04.09)  ·  [5] NAVER HyperCLOVA X SEED Think 보도자료(2025.12.26)†  ·  [6] 헬로티 2024.10(코드비전)†  ·  [7] Trueflaw LinkedIn 2022.02†  ·  [8] DNV GL×GSI 보도자료(2019.12)†  ·  [9] IACS UR W33 Rev.1/Corr.1(2021) §3.2·§6.1.2·§8.5  ·  탐지 수치는 합성 필름 6장 자체 측정(느슨한 매칭 기준)  ·  † 검색 요약 기준</a:t>
+              <a:t>참고  [1] Ultralytics 8.4.0 릴리스·PyPI(2026.01.14, AGPL-3.0)  ·  [2] 데일리안·CCTV뉴스 2021.07.02† · 황훈규 외 2021.02† · KISTI TRKO202200005836†  ·  [3] Anthropic 모델 문서 · Ollama/vLLM API 문서  ·  [4] LG AI연구원 EXAONE README·LICENSE(2026.04.09)  ·  [5] NAVER HyperCLOVA X SEED Think 보도자료(2025.12.26)†  ·  [6] 헬로티 2024.10(코드비전)†  ·  [7] Trueflaw LinkedIn 2022.02†  ·  [8] DNV GL×GSI 보도자료(2019.12)†  ·  [9] IACS UR W33 Rev.1/Corr.1(2021) §3.3·§6.1.2·§8.5  ·  [10] Streamlit PyPI 1.63.0(2026.09.01)  ·  탐지 수치는 합성 필름 6장 자체 측정(느슨한 매칭 기준)  ·  † 검색 요약 기준</a:t>
             </a:r>
           </a:p>
         </p:txBody>
@@ -7003,7 +7047,7 @@
                 <a:ea typeface="Pretendard"/>
                 <a:cs typeface="Pretendard"/>
               </a:rPr>
-              <a:t>판정식 3종(누적 길이·기공 면적률은 100mm 구간을 옮겨가며 최악 구간 선택) · 기준표 판본 선택(적용 판본을 판정표·PDF·기록에 기재) · 선급 보고 항목 25개 충족률 n/25 표시(PDF에 원문 항목명 병기)</a:t>
+              <a:t>판정식 3종(누적 길이·기공 면적률은 100mm 구간 중 최악 구간 선택) · 기준표 판본 선택(판정표·PDF·기록에 기재) · 선급 보고 항목 충족률 n/25</a:t>
             </a:r>
           </a:p>
         </p:txBody>
@@ -8183,7 +8227,7 @@
                 <a:ea typeface="Pretendard"/>
                 <a:cs typeface="Pretendard"/>
               </a:rPr>
-              <a:t>납마커 양 끝 2클릭 → mm/픽셀 확정</a:t>
+              <a:t>납마커 양 끝 클릭 두 번 → mm/픽셀 확정</a:t>
             </a:r>
           </a:p>
         </p:txBody>
@@ -8295,7 +8339,7 @@
                 <a:ea typeface="Pretendard"/>
                 <a:cs typeface="Pretendard"/>
               </a:rPr>
-              <a:t>결함 양 끝 2클릭 → 크기 확정</a:t>
+              <a:t>결함 양 끝 클릭 두 번 → 크기 확정</a:t>
             </a:r>
           </a:p>
         </p:txBody>
@@ -8926,7 +8970,7 @@
                 <a:ea typeface="Pretendard"/>
                 <a:cs typeface="Pretendard"/>
               </a:rPr>
-              <a:t>앱 실제 화면(2026.09.09판) — 합성 RT 필름 · AI 후보 오버레이(주황) · 클릭 도구. 사이드바: 기준표 판본·100mm 구간·보고 항목 충족률</a:t>
+              <a:t>앱 실제 화면(2026.09.09판) — 합성 RT 필름 · AI 후보 오버레이(주황) · 클릭 도구(캘리브레이션·측정·후보 추가) · 결함 후보 목록(유형 확정·채택/기각)</a:t>
             </a:r>
           </a:p>
         </p:txBody>
@@ -8967,7 +9011,7 @@
                 <a:ea typeface="Pretendard"/>
                 <a:cs typeface="Pretendard"/>
               </a:rPr>
-              <a:t>참고  [1] rt-workbench 저장소(2026.09 — 자동 테스트 tests/ · E2E scripts/demo_e2e.py · 탐지 측정 scripts/eval_detector.py)  ·  [2] IACS UR W33 Rev.1/Corr.1(2021) §8.2·§8.5  ·  화면은 앱 실제 캡처(2026.09.09판: 사이드바에 기준표 판본·100mm 평가 구간·선급 보고 항목 충족률)</a:t>
+              <a:t>참고  [1] rt-workbench 저장소(2026.09 — 자동 테스트 tests/ · E2E scripts/demo_e2e.py · 탐지 측정 scripts/eval_detector.py)  ·  [2] IACS UR W33 Rev.1/Corr.1(2021) §8.2·§8.5  ·  화면은 앱 실제 캡처(2026.09.09판: 클릭 도구·AI 후보 오버레이·결함 후보 목록)</a:t>
             </a:r>
           </a:p>
         </p:txBody>
@@ -9820,7 +9864,7 @@
                 <a:ea typeface="Pretendard"/>
                 <a:cs typeface="Pretendard"/>
               </a:rPr>
-              <a:t>「창원 지역 특화산업 고도화 및 디지털 전환 촉진을 위한 용접 AI 학습 데이터」 — 강재(RT·VT=육안검사)·알루미늄(RT) 용접 사진 144,019장(이 중 RT 70,000장; 활용 신청 시 페이지에서 확인한 수치), 결함 영역 폴리곤 라벨(JSON), 공식 예시 모델 YOLOv5x-seg</a:t>
+              <a:t>「창원 지역 특화산업 고도화 및 디지털 전환 촉진을 위한 용접 AI 학습 데이터」 — 강재(RT·VT=육안검사)·알루미늄(RT) 용접 사진 144,019장(이 중 RT 70,000장; 데이터셋 페이지 기준 수치), 결함 영역 폴리곤 라벨(JSON), 공식 예시 모델 YOLOv5x-seg</a:t>
             </a:r>
           </a:p>
         </p:txBody>
@@ -10017,7 +10061,7 @@
                 <a:ea typeface="Pretendard"/>
                 <a:cs typeface="Pretendard"/>
               </a:rPr>
-              <a:t>224×224(문서상 규격) 조각 사진 24,407장. 4종 분류: 균열 7,635 · 기공(용접 속 기포 구멍) 6,320 · 용입부족 4,452 · 정상 6,000(종류 이름 대응은 문헌 기준, 원저자 확인 예정). 결함 위치 박스 없음, 2000×8640 산업 원본에서 잘라낸 조각</a:t>
+              <a:t>224×224(문서상 규격) 조각 사진 24,407장. 4종 분류: 균열 7,635 · 기공(용접 속 기포 구멍) 6,320 · 용입부족(쇳물이 이음매 뿌리까지 차지 않은 상태) 4,452 · 정상 6,000(종류 이름 대응은 문헌 기준, 원저자 확인 예정). 결함 위치 박스 없음, 2000×8640 산업 원본에서 잘라낸 조각</a:t>
             </a:r>
           </a:p>
         </p:txBody>
@@ -10297,7 +10341,7 @@
                 <a:ea typeface="Pretendard"/>
                 <a:cs typeface="Pretendard"/>
               </a:rPr>
-              <a:t>3종 모두 실존 확인(수치는 논문·README·신청 확인 기준). AI Hub 폴리곤 라벨은 YOLO 박스로 변환, RIAWELC는 위치 정보가 없어 분류 사전학습에만 사용. AI Hub는 내국인 활용 신청·승인 필요·국외 반출 금지·출처 표기 의무[3], GDXray는 상업 이용 금지[1], RIAWELC는 공개된 학습·테스트 나눔에 같은 원본의 조각이 섞여 있어 원본 단위로 다시 나눠 쓴다[2]</a:t>
+              <a:t>3종 모두 실존 확인(수치는 논문·README·신청 확인 기준). AI Hub 폴리곤 라벨은 YOLO 박스로 변환, RIAWELC는 위치 정보가 없어 분류 사전학습에만 사용. AI Hub는 내국인 활용 신청·승인 필요·국외 반출 금지·출처 표기 의무[3], GDXray는 상업 이용 금지[1], RIAWELC는 공개된 학습·테스트 나눔에 같은 원본의 조각이 섞여 있어 원본 단위로 다시 나눠 쓴다(배포 아카이브 파일명 자체 집계 기준)</a:t>
             </a:r>
           </a:p>
         </p:txBody>
@@ -10458,7 +10502,7 @@
                 <a:ea typeface="Pretendard"/>
                 <a:cs typeface="Pretendard"/>
               </a:rPr>
-              <a:t>: AI Hub는 내국인 활용 신청(승인 수일). 단, 일부 검색 결과는 이 데이터셋을 국방데이터로 분류해 군 담당자의 별도 승인이 필요하다고 하므로 </a:t>
+              <a:t>: AI Hub는 내국인 활용 신청·승인이 필요하다(승인 수일). 일부 검색 결과는 이 데이터셋을 국방데이터로 분류해 별도 승인을 언급하므로 </a:t>
             </a:r>
             <a:r>
               <a:rPr sz="1160" b="1" i="0">
@@ -10591,7 +10635,7 @@
                 <a:ea typeface="Pretendard"/>
                 <a:cs typeface="Pretendard"/>
               </a:rPr>
-              <a:t>: 필름 스캐너(디지타이저; 스캔 화질 규격 ISO 14096-2의 DS/DB/DA 등급)는 3만 달러급 장비(판매점 가격 기준[8]) → 조직 공용 장비 또는 국내 RT 필름 스캔 서비스로 확보</a:t>
+              <a:t>: 필름 스캐너는 3만 달러급 장비(판매점 가격 기준[8]) → 조직 공용 장비 또는 국내 RT 필름 스캔 서비스로 확보</a:t>
             </a:r>
           </a:p>
         </p:txBody>
@@ -10741,7 +10785,7 @@
                 <a:ea typeface="Pretendard"/>
                 <a:cs typeface="Pretendard"/>
               </a:rPr>
-              <a:t>AI Hub 승인 지연·제공 제한 시 </a:t>
+              <a:t>AI Hub 접근 제한·라벨 변환 실패 시 </a:t>
             </a:r>
             <a:r>
               <a:rPr sz="1160" b="1" i="0">
@@ -10874,7 +10918,7 @@
                 <a:ea typeface="Pretendard"/>
                 <a:cs typeface="Pretendard"/>
               </a:rPr>
-              <a:t>문헌은 정제된 데이터셋에서 mAP@0.5 약 93~97%[6][7], 강관 X-ray 세트는 99%[7]까지 보고한다. 그러나 학습과 다른 데이터셋에 그대로 적용하면 분류 과제에서도 macro-F1 약 64%로 급락하고[4], 정확도도 98.75→90.3→75.8%로 떨어진 보고가 있다[5] → </a:t>
+              <a:t>문헌은 자체·정제 데이터셋에서 mAP@0.5 95~97%[6][7], 강관 X-ray 세트는 99%[7]까지 보고하지만, 같은 계열 공개 데이터(SWRD)의 기본 학습 베이스라인은 0.66에 그친다[7]. 학습 데이터와 다른 데이터셋에 미세조정 없이 적용하면 분류 macro-F1이 약 64%로 떨어졌고[4], 별도 보고에서는 같은 분류기가 정제 데이터셋 98.75%·GDXray 90.3%·저화질 사설 데이터셋 75.8%로 데이터 품질에 따라 갈렸다[5] → </a:t>
             </a:r>
             <a:r>
               <a:rPr sz="1160" b="1" i="0">
@@ -11722,7 +11766,7 @@
                 <a:ea typeface="Pretendard"/>
                 <a:cs typeface="Pretendard"/>
               </a:rPr>
-              <a:t>: 선급 규칙(IACS UR W33 §8)의 보고 항목 25개(일반 13·RT 12)를 입력 필드로 갖추고 충족률 n/25를 표시, PDF에는 규칙 원문 항목명을 함께 적는다</a:t>
+              <a:t>: 선급 규칙(IACS UR W33 §8)의 보고 항목을 입력 필드 25개로 갖추고, 원문 불릿 25개(일반 13·RT 12) 기준 충족률 n/25를 표시. 입력한 항목은 PDF에 규칙 원문 항목명과 함께 적는다</a:t>
             </a:r>
           </a:p>
           <a:p>
@@ -11796,7 +11840,7 @@
                 <a:ea typeface="Pretendard"/>
                 <a:cs typeface="Pretendard"/>
               </a:rPr>
-              <a:t> — 결함 위치를 따라 100mm 구간을 옮겨가며 가장 나쁜 구간으로 판정(위치 정보가 없으면 사진 전체를 한 구간으로 합산해 더 엄격하게). 규칙이 바뀌기 전에 준비된 규칙 엔진</a:t>
+              <a:t> — 결함 위치를 따라 100mm 구간을 옮겨가며 가장 나쁜 구간으로 판정(현재는 용접선이 가로로 놓인 필름 기준, 세로 필름 축 전환은 본선 과제 / 위치 정보가 없으면 사진 전체를 한 구간으로 합산해 더 엄격하게). 규칙이 바뀌기 전에 준비된 규칙 엔진</a:t>
             </a:r>
           </a:p>
           <a:p>
@@ -12031,7 +12075,7 @@
                 <a:ea typeface="Pretendard"/>
                 <a:cs typeface="Pretendard"/>
               </a:rPr>
-              <a:t>도 같은 처리 흐름 — 현재 프로토타입은 8-bit PNG·JPG 입력 기준이며, 12/16-bit TIFF 등 원본 형식 지원은 본선 과제. IACS UR W34 적용 선박(2021.07 이후 건조계약)의 검사 흐름에 편입</a:t>
+              <a:t>도 같은 처리 흐름 — IACS UR W34 적용 선박(2021.07 이후 건조계약)의 검사 흐름에 편입. 단, 지금은 일반 사진 파일(8비트 PNG·JPG)만 받고, 디지털 RT 장비의 원본 파일(12·16비트 TIFF — 밝기 단계가 더 촘촘해 미세 결함이 잘 보인다)은 본선 과제</a:t>
             </a:r>
           </a:p>
           <a:p>
@@ -12663,7 +12707,7 @@
                 <a:ea typeface="Pretendard"/>
                 <a:cs typeface="Pretendard"/>
               </a:rPr>
-              <a:t>실제로 쓸 신뢰도 기준에서 검출률·장당 오탐을 함께 공개(AI Hub RT 테스트셋 + GDXray 교차). 현재 폴백 탐지기: 합성 필름 결함 14개 중 14개 탐지, 장당 오탐 3.8건</a:t>
+              <a:t>실제로 쓸 신뢰도 기준에서 검출률·장당 오탐을 함께 공개(AI Hub RT 테스트셋 + GDXray 교차). 현재 폴백 탐지기: 합성 필름 결함 14개 중 14개 탐지, 장당 오탐 3.8건(신뢰도 기준 0.5·느슨한 매칭)</a:t>
             </a:r>
           </a:p>
         </p:txBody>
